--- a/exports/pptx/lessons/middle-module-09-subtraction-nikhilam/day-03-complement-1000.pptx
+++ b/exports/pptx/lessons/middle-module-09-subtraction-nikhilam/day-03-complement-1000.pptx
@@ -5177,8 +5177,56 @@
         </p:nvSpPr>
         <p:spPr>
           <a:xfrm>
-            <a:off x="634901" y="6627465"/>
-            <a:ext cx="8102798" cy="300930"/>
+            <a:off x="406301" y="5148560"/>
+            <a:ext cx="8498026" cy="213271"/>
+          </a:xfrm>
+          <a:prstGeom prst="rect">
+            <a:avLst/>
+          </a:prstGeom>
+          <a:noFill/>
+          <a:ln/>
+        </p:spPr>
+        <p:txBody>
+          <a:bodyPr wrap="square" lIns="0" tIns="0" rIns="0" bIns="0" rtlCol="0" anchor="t"/>
+          <a:lstStyle/>
+          <a:p>
+            <a:pPr algn="l" indent="0" marL="0">
+              <a:lnSpc>
+                <a:spcPts val="1680"/>
+              </a:lnSpc>
+              <a:spcBef>
+                <a:spcPts val="300"/>
+              </a:spcBef>
+              <a:spcAft>
+                <a:spcPts val="300"/>
+              </a:spcAft>
+              <a:buNone/>
+            </a:pPr>
+            <a:r>
+              <a:rPr lang="en-US" sz="1200" i="1" dirty="0">
+                <a:solidFill>
+                  <a:srgbClr val="1C2833"/>
+                </a:solidFill>
+                <a:latin typeface="Arial" pitchFamily="34" charset="0"/>
+                <a:ea typeface="Arial" pitchFamily="34" charset="-122"/>
+                <a:cs typeface="Arial" pitchFamily="34" charset="-120"/>
+              </a:rPr>
+              <a:t>Each row: Number · Working · Complement · Check.</a:t>
+            </a:r>
+            <a:endParaRPr lang="en-US" sz="1200" dirty="0"/>
+          </a:p>
+        </p:txBody>
+      </p:sp>
+      <p:sp>
+        <p:nvSpPr>
+          <p:cNvPr id="20" name="Text 18"/>
+          <p:cNvSpPr/>
+          <p:nvPr/>
+        </p:nvSpPr>
+        <p:spPr>
+          <a:xfrm>
+            <a:off x="634901" y="5450681"/>
+            <a:ext cx="8102798" cy="1013222"/>
           </a:xfrm>
           <a:prstGeom prst="rect">
             <a:avLst/>
@@ -5209,6 +5257,364 @@
                 <a:ea typeface="Arial" pitchFamily="34" charset="-122"/>
                 <a:cs typeface="Arial" pitchFamily="34" charset="-120"/>
               </a:rPr>
+              <a:t>419</a:t>
+            </a:r>
+            <a:pPr algn="l" indent="0" marL="0">
+              <a:lnSpc>
+                <a:spcPts val="1620"/>
+              </a:lnSpc>
+              <a:spcAft>
+                <a:spcPts val="300"/>
+              </a:spcAft>
+              <a:buNone/>
+            </a:pPr>
+            <a:r>
+              <a:rPr lang="en-US" sz="1200" dirty="0">
+                <a:solidFill>
+                  <a:srgbClr val="1C2833"/>
+                </a:solidFill>
+                <a:latin typeface="Arial" pitchFamily="34" charset="0"/>
+                <a:ea typeface="Arial" pitchFamily="34" charset="-122"/>
+                <a:cs typeface="Arial" pitchFamily="34" charset="-120"/>
+              </a:rPr>
+              <a:t> — 9-4, 9-1, 10-9 = 5, 8, 1 · </a:t>
+            </a:r>
+            <a:pPr algn="l" indent="0" marL="0">
+              <a:lnSpc>
+                <a:spcPts val="1620"/>
+              </a:lnSpc>
+              <a:spcAft>
+                <a:spcPts val="300"/>
+              </a:spcAft>
+              <a:buNone/>
+            </a:pPr>
+            <a:r>
+              <a:rPr lang="en-US" sz="1200" b="1" dirty="0">
+                <a:solidFill>
+                  <a:srgbClr val="1C2833"/>
+                </a:solidFill>
+                <a:latin typeface="Arial" pitchFamily="34" charset="0"/>
+                <a:ea typeface="Arial" pitchFamily="34" charset="-122"/>
+                <a:cs typeface="Arial" pitchFamily="34" charset="-120"/>
+              </a:rPr>
+              <a:t>581</a:t>
+            </a:r>
+            <a:pPr algn="l" indent="0" marL="0">
+              <a:lnSpc>
+                <a:spcPts val="1620"/>
+              </a:lnSpc>
+              <a:spcAft>
+                <a:spcPts val="300"/>
+              </a:spcAft>
+              <a:buNone/>
+            </a:pPr>
+            <a:r>
+              <a:rPr lang="en-US" sz="1200" dirty="0">
+                <a:solidFill>
+                  <a:srgbClr val="1C2833"/>
+                </a:solidFill>
+                <a:latin typeface="Arial" pitchFamily="34" charset="0"/>
+                <a:ea typeface="Arial" pitchFamily="34" charset="-122"/>
+                <a:cs typeface="Arial" pitchFamily="34" charset="-120"/>
+              </a:rPr>
+              <a:t> · 419 + 581 = 1000 ✓</a:t>
+            </a:r>
+            <a:endParaRPr lang="en-US" sz="1200" dirty="0"/>
+          </a:p>
+          <a:p>
+            <a:pPr algn="l" marL="342900" indent="-342900">
+              <a:lnSpc>
+                <a:spcPts val="1620"/>
+              </a:lnSpc>
+              <a:spcAft>
+                <a:spcPts val="300"/>
+              </a:spcAft>
+              <a:buSzPct val="100000"/>
+              <a:buChar char="•"/>
+            </a:pPr>
+            <a:r>
+              <a:rPr lang="en-US" sz="1200" b="1" dirty="0">
+                <a:solidFill>
+                  <a:srgbClr val="1C2833"/>
+                </a:solidFill>
+                <a:latin typeface="Arial" pitchFamily="34" charset="0"/>
+                <a:ea typeface="Arial" pitchFamily="34" charset="-122"/>
+                <a:cs typeface="Arial" pitchFamily="34" charset="-120"/>
+              </a:rPr>
+              <a:t>256</a:t>
+            </a:r>
+            <a:pPr algn="l" indent="0" marL="0">
+              <a:lnSpc>
+                <a:spcPts val="1620"/>
+              </a:lnSpc>
+              <a:spcAft>
+                <a:spcPts val="300"/>
+              </a:spcAft>
+              <a:buNone/>
+            </a:pPr>
+            <a:r>
+              <a:rPr lang="en-US" sz="1200" dirty="0">
+                <a:solidFill>
+                  <a:srgbClr val="1C2833"/>
+                </a:solidFill>
+                <a:latin typeface="Arial" pitchFamily="34" charset="0"/>
+                <a:ea typeface="Arial" pitchFamily="34" charset="-122"/>
+                <a:cs typeface="Arial" pitchFamily="34" charset="-120"/>
+              </a:rPr>
+              <a:t> — 9-2, 9-5, 10-6 = 7, 4, 4 · </a:t>
+            </a:r>
+            <a:pPr algn="l" indent="0" marL="0">
+              <a:lnSpc>
+                <a:spcPts val="1620"/>
+              </a:lnSpc>
+              <a:spcAft>
+                <a:spcPts val="300"/>
+              </a:spcAft>
+              <a:buNone/>
+            </a:pPr>
+            <a:r>
+              <a:rPr lang="en-US" sz="1200" b="1" dirty="0">
+                <a:solidFill>
+                  <a:srgbClr val="1C2833"/>
+                </a:solidFill>
+                <a:latin typeface="Arial" pitchFamily="34" charset="0"/>
+                <a:ea typeface="Arial" pitchFamily="34" charset="-122"/>
+                <a:cs typeface="Arial" pitchFamily="34" charset="-120"/>
+              </a:rPr>
+              <a:t>744</a:t>
+            </a:r>
+            <a:pPr algn="l" indent="0" marL="0">
+              <a:lnSpc>
+                <a:spcPts val="1620"/>
+              </a:lnSpc>
+              <a:spcAft>
+                <a:spcPts val="300"/>
+              </a:spcAft>
+              <a:buNone/>
+            </a:pPr>
+            <a:r>
+              <a:rPr lang="en-US" sz="1200" dirty="0">
+                <a:solidFill>
+                  <a:srgbClr val="1C2833"/>
+                </a:solidFill>
+                <a:latin typeface="Arial" pitchFamily="34" charset="0"/>
+                <a:ea typeface="Arial" pitchFamily="34" charset="-122"/>
+                <a:cs typeface="Arial" pitchFamily="34" charset="-120"/>
+              </a:rPr>
+              <a:t> · 256 + 744 = 1000 ✓</a:t>
+            </a:r>
+            <a:endParaRPr lang="en-US" sz="1200" dirty="0"/>
+          </a:p>
+          <a:p>
+            <a:pPr algn="l" marL="342900" indent="-342900">
+              <a:lnSpc>
+                <a:spcPts val="1620"/>
+              </a:lnSpc>
+              <a:spcAft>
+                <a:spcPts val="300"/>
+              </a:spcAft>
+              <a:buSzPct val="100000"/>
+              <a:buChar char="•"/>
+            </a:pPr>
+            <a:r>
+              <a:rPr lang="en-US" sz="1200" b="1" dirty="0">
+                <a:solidFill>
+                  <a:srgbClr val="1C2833"/>
+                </a:solidFill>
+                <a:latin typeface="Arial" pitchFamily="34" charset="0"/>
+                <a:ea typeface="Arial" pitchFamily="34" charset="-122"/>
+                <a:cs typeface="Arial" pitchFamily="34" charset="-120"/>
+              </a:rPr>
+              <a:t>803</a:t>
+            </a:r>
+            <a:pPr algn="l" indent="0" marL="0">
+              <a:lnSpc>
+                <a:spcPts val="1620"/>
+              </a:lnSpc>
+              <a:spcAft>
+                <a:spcPts val="300"/>
+              </a:spcAft>
+              <a:buNone/>
+            </a:pPr>
+            <a:r>
+              <a:rPr lang="en-US" sz="1200" dirty="0">
+                <a:solidFill>
+                  <a:srgbClr val="1C2833"/>
+                </a:solidFill>
+                <a:latin typeface="Arial" pitchFamily="34" charset="0"/>
+                <a:ea typeface="Arial" pitchFamily="34" charset="-122"/>
+                <a:cs typeface="Arial" pitchFamily="34" charset="-120"/>
+              </a:rPr>
+              <a:t> — 9-8, 9-0, 10-3 = 1, 9, 7 · </a:t>
+            </a:r>
+            <a:pPr algn="l" indent="0" marL="0">
+              <a:lnSpc>
+                <a:spcPts val="1620"/>
+              </a:lnSpc>
+              <a:spcAft>
+                <a:spcPts val="300"/>
+              </a:spcAft>
+              <a:buNone/>
+            </a:pPr>
+            <a:r>
+              <a:rPr lang="en-US" sz="1200" b="1" dirty="0">
+                <a:solidFill>
+                  <a:srgbClr val="1C2833"/>
+                </a:solidFill>
+                <a:latin typeface="Arial" pitchFamily="34" charset="0"/>
+                <a:ea typeface="Arial" pitchFamily="34" charset="-122"/>
+                <a:cs typeface="Arial" pitchFamily="34" charset="-120"/>
+              </a:rPr>
+              <a:t>197</a:t>
+            </a:r>
+            <a:pPr algn="l" indent="0" marL="0">
+              <a:lnSpc>
+                <a:spcPts val="1620"/>
+              </a:lnSpc>
+              <a:spcAft>
+                <a:spcPts val="300"/>
+              </a:spcAft>
+              <a:buNone/>
+            </a:pPr>
+            <a:r>
+              <a:rPr lang="en-US" sz="1200" dirty="0">
+                <a:solidFill>
+                  <a:srgbClr val="1C2833"/>
+                </a:solidFill>
+                <a:latin typeface="Arial" pitchFamily="34" charset="0"/>
+                <a:ea typeface="Arial" pitchFamily="34" charset="-122"/>
+                <a:cs typeface="Arial" pitchFamily="34" charset="-120"/>
+              </a:rPr>
+              <a:t> · 803 + 197 = 1000 ✓</a:t>
+            </a:r>
+            <a:endParaRPr lang="en-US" sz="1200" dirty="0"/>
+          </a:p>
+          <a:p>
+            <a:pPr algn="l" marL="342900" indent="-342900">
+              <a:lnSpc>
+                <a:spcPts val="1620"/>
+              </a:lnSpc>
+              <a:spcAft>
+                <a:spcPts val="300"/>
+              </a:spcAft>
+              <a:buSzPct val="100000"/>
+              <a:buChar char="•"/>
+            </a:pPr>
+            <a:r>
+              <a:rPr lang="en-US" sz="1200" b="1" dirty="0">
+                <a:solidFill>
+                  <a:srgbClr val="1C2833"/>
+                </a:solidFill>
+                <a:latin typeface="Arial" pitchFamily="34" charset="0"/>
+                <a:ea typeface="Arial" pitchFamily="34" charset="-122"/>
+                <a:cs typeface="Arial" pitchFamily="34" charset="-120"/>
+              </a:rPr>
+              <a:t>999</a:t>
+            </a:r>
+            <a:pPr algn="l" indent="0" marL="0">
+              <a:lnSpc>
+                <a:spcPts val="1620"/>
+              </a:lnSpc>
+              <a:spcAft>
+                <a:spcPts val="300"/>
+              </a:spcAft>
+              <a:buNone/>
+            </a:pPr>
+            <a:r>
+              <a:rPr lang="en-US" sz="1200" dirty="0">
+                <a:solidFill>
+                  <a:srgbClr val="1C2833"/>
+                </a:solidFill>
+                <a:latin typeface="Arial" pitchFamily="34" charset="0"/>
+                <a:ea typeface="Arial" pitchFamily="34" charset="-122"/>
+                <a:cs typeface="Arial" pitchFamily="34" charset="-120"/>
+              </a:rPr>
+              <a:t> — 9-9, 9-9, 10-9 = 0, 0, 1 · </a:t>
+            </a:r>
+            <a:pPr algn="l" indent="0" marL="0">
+              <a:lnSpc>
+                <a:spcPts val="1620"/>
+              </a:lnSpc>
+              <a:spcAft>
+                <a:spcPts val="300"/>
+              </a:spcAft>
+              <a:buNone/>
+            </a:pPr>
+            <a:r>
+              <a:rPr lang="en-US" sz="1200" b="1" dirty="0">
+                <a:solidFill>
+                  <a:srgbClr val="1C2833"/>
+                </a:solidFill>
+                <a:latin typeface="Arial" pitchFamily="34" charset="0"/>
+                <a:ea typeface="Arial" pitchFamily="34" charset="-122"/>
+                <a:cs typeface="Arial" pitchFamily="34" charset="-120"/>
+              </a:rPr>
+              <a:t>001</a:t>
+            </a:r>
+            <a:pPr algn="l" indent="0" marL="0">
+              <a:lnSpc>
+                <a:spcPts val="1620"/>
+              </a:lnSpc>
+              <a:spcAft>
+                <a:spcPts val="300"/>
+              </a:spcAft>
+              <a:buNone/>
+            </a:pPr>
+            <a:r>
+              <a:rPr lang="en-US" sz="1200" dirty="0">
+                <a:solidFill>
+                  <a:srgbClr val="1C2833"/>
+                </a:solidFill>
+                <a:latin typeface="Arial" pitchFamily="34" charset="0"/>
+                <a:ea typeface="Arial" pitchFamily="34" charset="-122"/>
+                <a:cs typeface="Arial" pitchFamily="34" charset="-120"/>
+              </a:rPr>
+              <a:t> = 1 · 999 + 1 = 1000 ✓</a:t>
+            </a:r>
+            <a:endParaRPr lang="en-US" sz="1200" dirty="0"/>
+          </a:p>
+        </p:txBody>
+      </p:sp>
+      <p:sp>
+        <p:nvSpPr>
+          <p:cNvPr id="21" name="Text 19"/>
+          <p:cNvSpPr/>
+          <p:nvPr/>
+        </p:nvSpPr>
+        <p:spPr>
+          <a:xfrm>
+            <a:off x="634901" y="6565404"/>
+            <a:ext cx="8102798" cy="300930"/>
+          </a:xfrm>
+          <a:prstGeom prst="rect">
+            <a:avLst/>
+          </a:prstGeom>
+          <a:noFill/>
+          <a:ln/>
+        </p:spPr>
+        <p:txBody>
+          <a:bodyPr wrap="square" lIns="0" tIns="0" rIns="0" bIns="0" rtlCol="0" anchor="t"/>
+          <a:lstStyle/>
+          <a:p>
+            <a:pPr algn="l" marL="342900" indent="-342900">
+              <a:lnSpc>
+                <a:spcPts val="1620"/>
+              </a:lnSpc>
+              <a:spcAft>
+                <a:spcPts val="300"/>
+              </a:spcAft>
+              <a:buSzPct val="100000"/>
+              <a:buChar char="•"/>
+            </a:pPr>
+            <a:r>
+              <a:rPr lang="en-US" sz="1200" b="1" dirty="0">
+                <a:solidFill>
+                  <a:srgbClr val="1C2833"/>
+                </a:solidFill>
+                <a:latin typeface="Arial" pitchFamily="34" charset="0"/>
+                <a:ea typeface="Arial" pitchFamily="34" charset="-122"/>
+                <a:cs typeface="Arial" pitchFamily="34" charset="-120"/>
+              </a:rPr>
               <a:t>Quick extension to 10 000:</a:t>
             </a:r>
             <a:pPr algn="l" indent="0" marL="0">
@@ -5277,13 +5683,13 @@
       </p:sp>
       <p:sp>
         <p:nvSpPr>
-          <p:cNvPr id="20" name="Text 18"/>
-          <p:cNvSpPr/>
-          <p:nvPr/>
-        </p:nvSpPr>
-        <p:spPr>
-          <a:xfrm>
-            <a:off x="406301" y="7017246"/>
+          <p:cNvPr id="22" name="Text 20"/>
+          <p:cNvSpPr/>
+          <p:nvPr/>
+        </p:nvSpPr>
+        <p:spPr>
+          <a:xfrm>
+            <a:off x="406301" y="6955185"/>
             <a:ext cx="8498026" cy="213271"/>
           </a:xfrm>
           <a:prstGeom prst="rect">
@@ -5394,13 +5800,13 @@
       </p:sp>
       <p:sp>
         <p:nvSpPr>
-          <p:cNvPr id="21" name="Text 19"/>
-          <p:cNvSpPr/>
-          <p:nvPr/>
-        </p:nvSpPr>
-        <p:spPr>
-          <a:xfrm>
-            <a:off x="406301" y="7382917"/>
+          <p:cNvPr id="23" name="Text 21"/>
+          <p:cNvSpPr/>
+          <p:nvPr/>
+        </p:nvSpPr>
+        <p:spPr>
+          <a:xfrm>
+            <a:off x="406301" y="7320855"/>
             <a:ext cx="8498026" cy="213271"/>
           </a:xfrm>
           <a:prstGeom prst="rect">

--- a/exports/pptx/lessons/middle-module-09-subtraction-nikhilam/day-03-complement-1000.pptx
+++ b/exports/pptx/lessons/middle-module-09-subtraction-nikhilam/day-03-complement-1000.pptx
@@ -18,9 +18,14 @@
     <p:sldId id="266" r:id="rId12"/>
     <p:sldId id="267" r:id="rId13"/>
     <p:sldId id="268" r:id="rId14"/>
+    <p:sldId id="269" r:id="rId15"/>
+    <p:sldId id="270" r:id="rId16"/>
+    <p:sldId id="271" r:id="rId17"/>
+    <p:sldId id="272" r:id="rId18"/>
+    <p:sldId id="273" r:id="rId19"/>
   </p:sldIdLst>
   <p:notesMasterIdLst>
-    <p:notesMasterId r:id="rId15"/>
+    <p:notesMasterId r:id="rId20"/>
   </p:notesMasterIdLst>
   <p:sldSz cx="9144000" cy="5143500"/>
   <p:notesSz cx="5143500" cy="9144000"/>
@@ -890,6 +895,446 @@
             <a:fld id="{F7021451-1387-4CA6-816F-3879F97B5CBC}" type="slidenum">
               <a:rPr lang="en-US"/>
               <a:t>13</a:t>
+            </a:fld>
+            <a:endParaRPr lang="en-US"/>
+          </a:p>
+        </p:txBody>
+      </p:sp>
+    </p:spTree>
+    <p:extLst>
+      <p:ext uri="{BB962C8B-B14F-4D97-AF65-F5344CB8AC3E}">
+        <p14:creationId xmlns:p14="http://schemas.microsoft.com/office/powerpoint/2010/main" val="1024086991"/>
+      </p:ext>
+    </p:extLst>
+  </p:cSld>
+  <p:clrMapOvr>
+    <a:masterClrMapping/>
+  </p:clrMapOvr>
+</p:notes>
+</file>
+
+<file path=ppt/notesSlides/notesSlide14.xml><?xml version="1.0" encoding="utf-8"?>
+<p:notes xmlns:a="http://schemas.openxmlformats.org/drawingml/2006/main" xmlns:r="http://schemas.openxmlformats.org/officeDocument/2006/relationships" xmlns:p="http://schemas.openxmlformats.org/presentationml/2006/main">
+  <p:cSld>
+    <p:spTree>
+      <p:nvGrpSpPr>
+        <p:cNvPr id="1" name=""/>
+        <p:cNvGrpSpPr/>
+        <p:nvPr/>
+      </p:nvGrpSpPr>
+      <p:grpSpPr>
+        <a:xfrm>
+          <a:off x="0" y="0"/>
+          <a:ext cx="0" cy="0"/>
+          <a:chOff x="0" y="0"/>
+          <a:chExt cx="0" cy="0"/>
+        </a:xfrm>
+      </p:grpSpPr>
+      <p:sp>
+        <p:nvSpPr>
+          <p:cNvPr id="2" name="Slide Image Placeholder 1"/>
+          <p:cNvSpPr>
+            <a:spLocks noGrp="1" noRot="1" noChangeAspect="1"/>
+          </p:cNvSpPr>
+          <p:nvPr>
+            <p:ph type="sldImg"/>
+          </p:nvPr>
+        </p:nvSpPr>
+        <p:spPr/>
+      </p:sp>
+      <p:sp>
+        <p:nvSpPr>
+          <p:cNvPr id="3" name="Notes Placeholder 2"/>
+          <p:cNvSpPr>
+            <a:spLocks noGrp="1"/>
+          </p:cNvSpPr>
+          <p:nvPr>
+            <p:ph type="body" idx="1"/>
+          </p:nvPr>
+        </p:nvSpPr>
+        <p:spPr/>
+        <p:txBody>
+          <a:bodyPr/>
+          <a:lstStyle/>
+          <a:p>
+            <a:r>
+              <a:rPr lang="en-US" dirty="0"/>
+              <a:t/>
+            </a:r>
+            <a:endParaRPr lang="en-US" dirty="0"/>
+          </a:p>
+        </p:txBody>
+      </p:sp>
+      <p:sp>
+        <p:nvSpPr>
+          <p:cNvPr id="4" name="Slide Number Placeholder 3"/>
+          <p:cNvSpPr>
+            <a:spLocks noGrp="1"/>
+          </p:cNvSpPr>
+          <p:nvPr>
+            <p:ph type="sldNum" sz="quarter" idx="10"/>
+          </p:nvPr>
+        </p:nvSpPr>
+        <p:spPr/>
+        <p:txBody>
+          <a:bodyPr/>
+          <a:lstStyle/>
+          <a:p>
+            <a:fld id="{F7021451-1387-4CA6-816F-3879F97B5CBC}" type="slidenum">
+              <a:rPr lang="en-US"/>
+              <a:t>14</a:t>
+            </a:fld>
+            <a:endParaRPr lang="en-US"/>
+          </a:p>
+        </p:txBody>
+      </p:sp>
+    </p:spTree>
+    <p:extLst>
+      <p:ext uri="{BB962C8B-B14F-4D97-AF65-F5344CB8AC3E}">
+        <p14:creationId xmlns:p14="http://schemas.microsoft.com/office/powerpoint/2010/main" val="1024086991"/>
+      </p:ext>
+    </p:extLst>
+  </p:cSld>
+  <p:clrMapOvr>
+    <a:masterClrMapping/>
+  </p:clrMapOvr>
+</p:notes>
+</file>
+
+<file path=ppt/notesSlides/notesSlide15.xml><?xml version="1.0" encoding="utf-8"?>
+<p:notes xmlns:a="http://schemas.openxmlformats.org/drawingml/2006/main" xmlns:r="http://schemas.openxmlformats.org/officeDocument/2006/relationships" xmlns:p="http://schemas.openxmlformats.org/presentationml/2006/main">
+  <p:cSld>
+    <p:spTree>
+      <p:nvGrpSpPr>
+        <p:cNvPr id="1" name=""/>
+        <p:cNvGrpSpPr/>
+        <p:nvPr/>
+      </p:nvGrpSpPr>
+      <p:grpSpPr>
+        <a:xfrm>
+          <a:off x="0" y="0"/>
+          <a:ext cx="0" cy="0"/>
+          <a:chOff x="0" y="0"/>
+          <a:chExt cx="0" cy="0"/>
+        </a:xfrm>
+      </p:grpSpPr>
+      <p:sp>
+        <p:nvSpPr>
+          <p:cNvPr id="2" name="Slide Image Placeholder 1"/>
+          <p:cNvSpPr>
+            <a:spLocks noGrp="1" noRot="1" noChangeAspect="1"/>
+          </p:cNvSpPr>
+          <p:nvPr>
+            <p:ph type="sldImg"/>
+          </p:nvPr>
+        </p:nvSpPr>
+        <p:spPr/>
+      </p:sp>
+      <p:sp>
+        <p:nvSpPr>
+          <p:cNvPr id="3" name="Notes Placeholder 2"/>
+          <p:cNvSpPr>
+            <a:spLocks noGrp="1"/>
+          </p:cNvSpPr>
+          <p:nvPr>
+            <p:ph type="body" idx="1"/>
+          </p:nvPr>
+        </p:nvSpPr>
+        <p:spPr/>
+        <p:txBody>
+          <a:bodyPr/>
+          <a:lstStyle/>
+          <a:p>
+            <a:r>
+              <a:rPr lang="en-US" dirty="0"/>
+              <a:t/>
+            </a:r>
+            <a:endParaRPr lang="en-US" dirty="0"/>
+          </a:p>
+        </p:txBody>
+      </p:sp>
+      <p:sp>
+        <p:nvSpPr>
+          <p:cNvPr id="4" name="Slide Number Placeholder 3"/>
+          <p:cNvSpPr>
+            <a:spLocks noGrp="1"/>
+          </p:cNvSpPr>
+          <p:nvPr>
+            <p:ph type="sldNum" sz="quarter" idx="10"/>
+          </p:nvPr>
+        </p:nvSpPr>
+        <p:spPr/>
+        <p:txBody>
+          <a:bodyPr/>
+          <a:lstStyle/>
+          <a:p>
+            <a:fld id="{F7021451-1387-4CA6-816F-3879F97B5CBC}" type="slidenum">
+              <a:rPr lang="en-US"/>
+              <a:t>15</a:t>
+            </a:fld>
+            <a:endParaRPr lang="en-US"/>
+          </a:p>
+        </p:txBody>
+      </p:sp>
+    </p:spTree>
+    <p:extLst>
+      <p:ext uri="{BB962C8B-B14F-4D97-AF65-F5344CB8AC3E}">
+        <p14:creationId xmlns:p14="http://schemas.microsoft.com/office/powerpoint/2010/main" val="1024086991"/>
+      </p:ext>
+    </p:extLst>
+  </p:cSld>
+  <p:clrMapOvr>
+    <a:masterClrMapping/>
+  </p:clrMapOvr>
+</p:notes>
+</file>
+
+<file path=ppt/notesSlides/notesSlide16.xml><?xml version="1.0" encoding="utf-8"?>
+<p:notes xmlns:a="http://schemas.openxmlformats.org/drawingml/2006/main" xmlns:r="http://schemas.openxmlformats.org/officeDocument/2006/relationships" xmlns:p="http://schemas.openxmlformats.org/presentationml/2006/main">
+  <p:cSld>
+    <p:spTree>
+      <p:nvGrpSpPr>
+        <p:cNvPr id="1" name=""/>
+        <p:cNvGrpSpPr/>
+        <p:nvPr/>
+      </p:nvGrpSpPr>
+      <p:grpSpPr>
+        <a:xfrm>
+          <a:off x="0" y="0"/>
+          <a:ext cx="0" cy="0"/>
+          <a:chOff x="0" y="0"/>
+          <a:chExt cx="0" cy="0"/>
+        </a:xfrm>
+      </p:grpSpPr>
+      <p:sp>
+        <p:nvSpPr>
+          <p:cNvPr id="2" name="Slide Image Placeholder 1"/>
+          <p:cNvSpPr>
+            <a:spLocks noGrp="1" noRot="1" noChangeAspect="1"/>
+          </p:cNvSpPr>
+          <p:nvPr>
+            <p:ph type="sldImg"/>
+          </p:nvPr>
+        </p:nvSpPr>
+        <p:spPr/>
+      </p:sp>
+      <p:sp>
+        <p:nvSpPr>
+          <p:cNvPr id="3" name="Notes Placeholder 2"/>
+          <p:cNvSpPr>
+            <a:spLocks noGrp="1"/>
+          </p:cNvSpPr>
+          <p:nvPr>
+            <p:ph type="body" idx="1"/>
+          </p:nvPr>
+        </p:nvSpPr>
+        <p:spPr/>
+        <p:txBody>
+          <a:bodyPr/>
+          <a:lstStyle/>
+          <a:p>
+            <a:r>
+              <a:rPr lang="en-US" dirty="0"/>
+              <a:t/>
+            </a:r>
+            <a:endParaRPr lang="en-US" dirty="0"/>
+          </a:p>
+        </p:txBody>
+      </p:sp>
+      <p:sp>
+        <p:nvSpPr>
+          <p:cNvPr id="4" name="Slide Number Placeholder 3"/>
+          <p:cNvSpPr>
+            <a:spLocks noGrp="1"/>
+          </p:cNvSpPr>
+          <p:nvPr>
+            <p:ph type="sldNum" sz="quarter" idx="10"/>
+          </p:nvPr>
+        </p:nvSpPr>
+        <p:spPr/>
+        <p:txBody>
+          <a:bodyPr/>
+          <a:lstStyle/>
+          <a:p>
+            <a:fld id="{F7021451-1387-4CA6-816F-3879F97B5CBC}" type="slidenum">
+              <a:rPr lang="en-US"/>
+              <a:t>16</a:t>
+            </a:fld>
+            <a:endParaRPr lang="en-US"/>
+          </a:p>
+        </p:txBody>
+      </p:sp>
+    </p:spTree>
+    <p:extLst>
+      <p:ext uri="{BB962C8B-B14F-4D97-AF65-F5344CB8AC3E}">
+        <p14:creationId xmlns:p14="http://schemas.microsoft.com/office/powerpoint/2010/main" val="1024086991"/>
+      </p:ext>
+    </p:extLst>
+  </p:cSld>
+  <p:clrMapOvr>
+    <a:masterClrMapping/>
+  </p:clrMapOvr>
+</p:notes>
+</file>
+
+<file path=ppt/notesSlides/notesSlide17.xml><?xml version="1.0" encoding="utf-8"?>
+<p:notes xmlns:a="http://schemas.openxmlformats.org/drawingml/2006/main" xmlns:r="http://schemas.openxmlformats.org/officeDocument/2006/relationships" xmlns:p="http://schemas.openxmlformats.org/presentationml/2006/main">
+  <p:cSld>
+    <p:spTree>
+      <p:nvGrpSpPr>
+        <p:cNvPr id="1" name=""/>
+        <p:cNvGrpSpPr/>
+        <p:nvPr/>
+      </p:nvGrpSpPr>
+      <p:grpSpPr>
+        <a:xfrm>
+          <a:off x="0" y="0"/>
+          <a:ext cx="0" cy="0"/>
+          <a:chOff x="0" y="0"/>
+          <a:chExt cx="0" cy="0"/>
+        </a:xfrm>
+      </p:grpSpPr>
+      <p:sp>
+        <p:nvSpPr>
+          <p:cNvPr id="2" name="Slide Image Placeholder 1"/>
+          <p:cNvSpPr>
+            <a:spLocks noGrp="1" noRot="1" noChangeAspect="1"/>
+          </p:cNvSpPr>
+          <p:nvPr>
+            <p:ph type="sldImg"/>
+          </p:nvPr>
+        </p:nvSpPr>
+        <p:spPr/>
+      </p:sp>
+      <p:sp>
+        <p:nvSpPr>
+          <p:cNvPr id="3" name="Notes Placeholder 2"/>
+          <p:cNvSpPr>
+            <a:spLocks noGrp="1"/>
+          </p:cNvSpPr>
+          <p:nvPr>
+            <p:ph type="body" idx="1"/>
+          </p:nvPr>
+        </p:nvSpPr>
+        <p:spPr/>
+        <p:txBody>
+          <a:bodyPr/>
+          <a:lstStyle/>
+          <a:p>
+            <a:r>
+              <a:rPr lang="en-US" dirty="0"/>
+              <a:t/>
+            </a:r>
+            <a:endParaRPr lang="en-US" dirty="0"/>
+          </a:p>
+        </p:txBody>
+      </p:sp>
+      <p:sp>
+        <p:nvSpPr>
+          <p:cNvPr id="4" name="Slide Number Placeholder 3"/>
+          <p:cNvSpPr>
+            <a:spLocks noGrp="1"/>
+          </p:cNvSpPr>
+          <p:nvPr>
+            <p:ph type="sldNum" sz="quarter" idx="10"/>
+          </p:nvPr>
+        </p:nvSpPr>
+        <p:spPr/>
+        <p:txBody>
+          <a:bodyPr/>
+          <a:lstStyle/>
+          <a:p>
+            <a:fld id="{F7021451-1387-4CA6-816F-3879F97B5CBC}" type="slidenum">
+              <a:rPr lang="en-US"/>
+              <a:t>17</a:t>
+            </a:fld>
+            <a:endParaRPr lang="en-US"/>
+          </a:p>
+        </p:txBody>
+      </p:sp>
+    </p:spTree>
+    <p:extLst>
+      <p:ext uri="{BB962C8B-B14F-4D97-AF65-F5344CB8AC3E}">
+        <p14:creationId xmlns:p14="http://schemas.microsoft.com/office/powerpoint/2010/main" val="1024086991"/>
+      </p:ext>
+    </p:extLst>
+  </p:cSld>
+  <p:clrMapOvr>
+    <a:masterClrMapping/>
+  </p:clrMapOvr>
+</p:notes>
+</file>
+
+<file path=ppt/notesSlides/notesSlide18.xml><?xml version="1.0" encoding="utf-8"?>
+<p:notes xmlns:a="http://schemas.openxmlformats.org/drawingml/2006/main" xmlns:r="http://schemas.openxmlformats.org/officeDocument/2006/relationships" xmlns:p="http://schemas.openxmlformats.org/presentationml/2006/main">
+  <p:cSld>
+    <p:spTree>
+      <p:nvGrpSpPr>
+        <p:cNvPr id="1" name=""/>
+        <p:cNvGrpSpPr/>
+        <p:nvPr/>
+      </p:nvGrpSpPr>
+      <p:grpSpPr>
+        <a:xfrm>
+          <a:off x="0" y="0"/>
+          <a:ext cx="0" cy="0"/>
+          <a:chOff x="0" y="0"/>
+          <a:chExt cx="0" cy="0"/>
+        </a:xfrm>
+      </p:grpSpPr>
+      <p:sp>
+        <p:nvSpPr>
+          <p:cNvPr id="2" name="Slide Image Placeholder 1"/>
+          <p:cNvSpPr>
+            <a:spLocks noGrp="1" noRot="1" noChangeAspect="1"/>
+          </p:cNvSpPr>
+          <p:nvPr>
+            <p:ph type="sldImg"/>
+          </p:nvPr>
+        </p:nvSpPr>
+        <p:spPr/>
+      </p:sp>
+      <p:sp>
+        <p:nvSpPr>
+          <p:cNvPr id="3" name="Notes Placeholder 2"/>
+          <p:cNvSpPr>
+            <a:spLocks noGrp="1"/>
+          </p:cNvSpPr>
+          <p:nvPr>
+            <p:ph type="body" idx="1"/>
+          </p:nvPr>
+        </p:nvSpPr>
+        <p:spPr/>
+        <p:txBody>
+          <a:bodyPr/>
+          <a:lstStyle/>
+          <a:p>
+            <a:r>
+              <a:rPr lang="en-US" dirty="0"/>
+              <a:t/>
+            </a:r>
+            <a:endParaRPr lang="en-US" dirty="0"/>
+          </a:p>
+        </p:txBody>
+      </p:sp>
+      <p:sp>
+        <p:nvSpPr>
+          <p:cNvPr id="4" name="Slide Number Placeholder 3"/>
+          <p:cNvSpPr>
+            <a:spLocks noGrp="1"/>
+          </p:cNvSpPr>
+          <p:nvPr>
+            <p:ph type="sldNum" sz="quarter" idx="10"/>
+          </p:nvPr>
+        </p:nvSpPr>
+        <p:spPr/>
+        <p:txBody>
+          <a:bodyPr/>
+          <a:lstStyle/>
+          <a:p>
+            <a:fld id="{F7021451-1387-4CA6-816F-3879F97B5CBC}" type="slidenum">
+              <a:rPr lang="en-US"/>
+              <a:t>18</a:t>
             </a:fld>
             <a:endParaRPr lang="en-US"/>
           </a:p>
@@ -2189,102 +2634,6 @@
         </p:nvSpPr>
         <p:spPr>
           <a:xfrm>
-            <a:off x="406301" y="1223963"/>
-            <a:ext cx="8498026" cy="274290"/>
-          </a:xfrm>
-          <a:prstGeom prst="rect">
-            <a:avLst/>
-          </a:prstGeom>
-          <a:noFill/>
-          <a:ln/>
-        </p:spPr>
-        <p:txBody>
-          <a:bodyPr wrap="square" lIns="0" tIns="0" rIns="0" bIns="0" rtlCol="0" anchor="t"/>
-          <a:lstStyle/>
-          <a:p>
-            <a:pPr algn="l" indent="0" marL="0">
-              <a:lnSpc>
-                <a:spcPts val="2160"/>
-              </a:lnSpc>
-              <a:spcBef>
-                <a:spcPts val="600"/>
-              </a:spcBef>
-              <a:spcAft>
-                <a:spcPts val="800"/>
-              </a:spcAft>
-              <a:buNone/>
-            </a:pPr>
-            <a:r>
-              <a:rPr lang="en-US" sz="1800" b="1" dirty="0">
-                <a:solidFill>
-                  <a:srgbClr val="FE4447"/>
-                </a:solidFill>
-                <a:latin typeface="Georgia" pitchFamily="34" charset="0"/>
-                <a:ea typeface="Georgia" pitchFamily="34" charset="-122"/>
-                <a:cs typeface="Georgia" pitchFamily="34" charset="-120"/>
-              </a:rPr>
-              <a:t>Learning objective</a:t>
-            </a:r>
-            <a:endParaRPr lang="en-US" sz="1800" dirty="0"/>
-          </a:p>
-        </p:txBody>
-      </p:sp>
-      <p:sp>
-        <p:nvSpPr>
-          <p:cNvPr id="6" name="Text 4"/>
-          <p:cNvSpPr/>
-          <p:nvPr/>
-        </p:nvSpPr>
-        <p:spPr>
-          <a:xfrm>
-            <a:off x="406301" y="1637854"/>
-            <a:ext cx="8498026" cy="426541"/>
-          </a:xfrm>
-          <a:prstGeom prst="rect">
-            <a:avLst/>
-          </a:prstGeom>
-          <a:noFill/>
-          <a:ln/>
-        </p:spPr>
-        <p:txBody>
-          <a:bodyPr wrap="square" lIns="0" tIns="0" rIns="0" bIns="0" rtlCol="0" anchor="t"/>
-          <a:lstStyle/>
-          <a:p>
-            <a:pPr algn="l" indent="0" marL="0">
-              <a:lnSpc>
-                <a:spcPts val="1680"/>
-              </a:lnSpc>
-              <a:spcBef>
-                <a:spcPts val="300"/>
-              </a:spcBef>
-              <a:spcAft>
-                <a:spcPts val="300"/>
-              </a:spcAft>
-              <a:buNone/>
-            </a:pPr>
-            <a:r>
-              <a:rPr lang="en-US" sz="1200" dirty="0">
-                <a:solidFill>
-                  <a:srgbClr val="1C2833"/>
-                </a:solidFill>
-                <a:latin typeface="Arial" pitchFamily="34" charset="0"/>
-                <a:ea typeface="Arial" pitchFamily="34" charset="-122"/>
-                <a:cs typeface="Arial" pitchFamily="34" charset="-120"/>
-              </a:rPr>
-              <a:t>By the end of this lesson, students will find the complement of any 3-digit number to 1000 in under 4 seconds, and will recognise the same pattern extends to 10 000, 100 000, and beyond.</a:t>
-            </a:r>
-            <a:endParaRPr lang="en-US" sz="1200" dirty="0"/>
-          </a:p>
-        </p:txBody>
-      </p:sp>
-      <p:sp>
-        <p:nvSpPr>
-          <p:cNvPr id="7" name="Text 5"/>
-          <p:cNvSpPr/>
-          <p:nvPr/>
-        </p:nvSpPr>
-        <p:spPr>
-          <a:xfrm>
             <a:off x="406301" y="4434929"/>
             <a:ext cx="8498026" cy="213271"/>
           </a:xfrm>
@@ -2429,7 +2778,7 @@
                 <a:ea typeface="Georgia" pitchFamily="34" charset="-122"/>
                 <a:cs typeface="Georgia" pitchFamily="34" charset="-120"/>
               </a:rPr>
-              <a:t>Homework</a:t>
+              <a:t>Core (15 min) — Three digits, same rule (cont.)</a:t>
             </a:r>
             <a:endParaRPr lang="en-US" sz="1800" dirty="0"/>
           </a:p>
@@ -2443,8 +2792,61 @@
         </p:nvSpPr>
         <p:spPr>
           <a:xfrm>
-            <a:off x="406301" y="870942"/>
-            <a:ext cx="8498026" cy="639812"/>
+            <a:off x="406301" y="883593"/>
+            <a:ext cx="8331398" cy="428476"/>
+          </a:xfrm>
+          <a:prstGeom prst="rect">
+            <a:avLst/>
+          </a:prstGeom>
+          <a:solidFill>
+            <a:srgbClr val="F4F8F9"/>
+          </a:solidFill>
+          <a:ln/>
+        </p:spPr>
+        <p:txBody>
+          <a:bodyPr wrap="square" rtlCol="0" anchor="ctr"/>
+          <a:lstStyle/>
+          <a:p>
+            <a:pPr indent="0" marL="0">
+              <a:buNone/>
+            </a:pPr>
+            <a:endParaRPr lang="en-US" dirty="0"/>
+          </a:p>
+        </p:txBody>
+      </p:sp>
+      <p:sp>
+        <p:nvSpPr>
+          <p:cNvPr id="5" name="Shape 3"/>
+          <p:cNvSpPr/>
+          <p:nvPr/>
+        </p:nvSpPr>
+        <p:spPr>
+          <a:xfrm>
+            <a:off x="430113" y="883593"/>
+            <a:ext cx="0" cy="428476"/>
+          </a:xfrm>
+          <a:prstGeom prst="line">
+            <a:avLst/>
+          </a:prstGeom>
+          <a:noFill/>
+          <a:ln w="47625">
+            <a:solidFill>
+              <a:srgbClr val="277884"/>
+            </a:solidFill>
+            <a:prstDash val="solid"/>
+          </a:ln>
+        </p:spPr>
+      </p:sp>
+      <p:sp>
+        <p:nvSpPr>
+          <p:cNvPr id="6" name="Text 4"/>
+          <p:cNvSpPr/>
+          <p:nvPr/>
+        </p:nvSpPr>
+        <p:spPr>
+          <a:xfrm>
+            <a:off x="631627" y="1010543"/>
+            <a:ext cx="8086939" cy="174575"/>
           </a:xfrm>
           <a:prstGeom prst="rect">
             <a:avLst/>
@@ -2458,6 +2860,48 @@
           <a:p>
             <a:pPr algn="l" indent="0" marL="0">
               <a:lnSpc>
+                <a:spcPts val="1375"/>
+              </a:lnSpc>
+              <a:buNone/>
+            </a:pPr>
+            <a:r>
+              <a:rPr lang="en-US" sz="1100" dirty="0">
+                <a:solidFill>
+                  <a:srgbClr val="1C2833"/>
+                </a:solidFill>
+                <a:latin typeface="Courier New" pitchFamily="34" charset="0"/>
+                <a:ea typeface="Courier New" pitchFamily="34" charset="-122"/>
+                <a:cs typeface="Courier New" pitchFamily="34" charset="-120"/>
+              </a:rPr>
+              <a:t>(9 − d₁), (9 − d₂), …, (9 − dₙ₋₁), (10 − dₙ)</a:t>
+            </a:r>
+            <a:endParaRPr lang="en-US" sz="1100" dirty="0"/>
+          </a:p>
+        </p:txBody>
+      </p:sp>
+      <p:sp>
+        <p:nvSpPr>
+          <p:cNvPr id="7" name="Text 5"/>
+          <p:cNvSpPr/>
+          <p:nvPr/>
+        </p:nvSpPr>
+        <p:spPr>
+          <a:xfrm>
+            <a:off x="406301" y="1400919"/>
+            <a:ext cx="8498026" cy="213271"/>
+          </a:xfrm>
+          <a:prstGeom prst="rect">
+            <a:avLst/>
+          </a:prstGeom>
+          <a:noFill/>
+          <a:ln/>
+        </p:spPr>
+        <p:txBody>
+          <a:bodyPr wrap="square" lIns="0" tIns="0" rIns="0" bIns="0" rtlCol="0" anchor="t"/>
+          <a:lstStyle/>
+          <a:p>
+            <a:pPr algn="l" indent="0" marL="0">
+              <a:lnSpc>
                 <a:spcPts val="1680"/>
               </a:lnSpc>
               <a:spcBef>
@@ -2477,7 +2921,7 @@
                 <a:ea typeface="Arial" pitchFamily="34" charset="-122"/>
                 <a:cs typeface="Arial" pitchFamily="34" charset="-120"/>
               </a:rPr>
-              <a:t>– Find the complement of each of these to 1000:   – 156, 423, 789, 802, 64 (treat as 064), 7 (treat as 007), 555, 900. – Find the complement of each of these to 10 000:   – 3456, 1027, 8888, 75 (treat as 0075), 999. – Time yourself. Total time goal: under 2 minutes.</a:t>
+              <a:t>where d₁ … dₙ are the digits left-to-right.</a:t>
             </a:r>
             <a:endParaRPr lang="en-US" sz="1200" dirty="0"/>
           </a:p>
@@ -2485,7 +2929,101 @@
       </p:sp>
       <p:sp>
         <p:nvSpPr>
-          <p:cNvPr id="5" name="Text 3"/>
+          <p:cNvPr id="8" name="Text 6"/>
+          <p:cNvSpPr/>
+          <p:nvPr/>
+        </p:nvSpPr>
+        <p:spPr>
+          <a:xfrm>
+            <a:off x="634901" y="1703040"/>
+            <a:ext cx="8102798" cy="281880"/>
+          </a:xfrm>
+          <a:prstGeom prst="rect">
+            <a:avLst/>
+          </a:prstGeom>
+          <a:noFill/>
+          <a:ln/>
+        </p:spPr>
+        <p:txBody>
+          <a:bodyPr wrap="square" lIns="0" tIns="0" rIns="0" bIns="0" rtlCol="0" anchor="t"/>
+          <a:lstStyle/>
+          <a:p>
+            <a:pPr algn="l" marL="342900" indent="-342900">
+              <a:lnSpc>
+                <a:spcPts val="1620"/>
+              </a:lnSpc>
+              <a:spcAft>
+                <a:spcPts val="300"/>
+              </a:spcAft>
+              <a:buSzPct val="100000"/>
+              <a:buChar char="•"/>
+            </a:pPr>
+            <a:r>
+              <a:rPr lang="en-US" sz="1200" b="1" dirty="0">
+                <a:solidFill>
+                  <a:srgbClr val="1C2833"/>
+                </a:solidFill>
+                <a:latin typeface="Arial" pitchFamily="34" charset="0"/>
+                <a:ea typeface="Arial" pitchFamily="34" charset="-122"/>
+                <a:cs typeface="Arial" pitchFamily="34" charset="-120"/>
+              </a:rPr>
+              <a:t>Demo 4 more, with class chanting along:</a:t>
+            </a:r>
+            <a:endParaRPr lang="en-US" sz="1200" dirty="0"/>
+          </a:p>
+        </p:txBody>
+      </p:sp>
+      <p:sp>
+        <p:nvSpPr>
+          <p:cNvPr id="9" name="Text 7"/>
+          <p:cNvSpPr/>
+          <p:nvPr/>
+        </p:nvSpPr>
+        <p:spPr>
+          <a:xfrm>
+            <a:off x="406301" y="2073771"/>
+            <a:ext cx="8498026" cy="213271"/>
+          </a:xfrm>
+          <a:prstGeom prst="rect">
+            <a:avLst/>
+          </a:prstGeom>
+          <a:noFill/>
+          <a:ln/>
+        </p:spPr>
+        <p:txBody>
+          <a:bodyPr wrap="square" lIns="0" tIns="0" rIns="0" bIns="0" rtlCol="0" anchor="t"/>
+          <a:lstStyle/>
+          <a:p>
+            <a:pPr algn="l" indent="0" marL="0">
+              <a:lnSpc>
+                <a:spcPts val="1680"/>
+              </a:lnSpc>
+              <a:spcBef>
+                <a:spcPts val="300"/>
+              </a:spcBef>
+              <a:spcAft>
+                <a:spcPts val="300"/>
+              </a:spcAft>
+              <a:buNone/>
+            </a:pPr>
+            <a:r>
+              <a:rPr lang="en-US" sz="1200" i="1" dirty="0">
+                <a:solidFill>
+                  <a:srgbClr val="1C2833"/>
+                </a:solidFill>
+                <a:latin typeface="Arial" pitchFamily="34" charset="0"/>
+                <a:ea typeface="Arial" pitchFamily="34" charset="-122"/>
+                <a:cs typeface="Arial" pitchFamily="34" charset="-120"/>
+              </a:rPr>
+              <a:t>Each row: Number · Working · Complement · Check.</a:t>
+            </a:r>
+            <a:endParaRPr lang="en-US" sz="1200" dirty="0"/>
+          </a:p>
+        </p:txBody>
+      </p:sp>
+      <p:sp>
+        <p:nvSpPr>
+          <p:cNvPr id="10" name="Text 8"/>
           <p:cNvSpPr/>
           <p:nvPr/>
         </p:nvSpPr>
@@ -2635,7 +3173,7 @@
                 <a:ea typeface="Georgia" pitchFamily="34" charset="-122"/>
                 <a:cs typeface="Georgia" pitchFamily="34" charset="-120"/>
               </a:rPr>
-              <a:t>Differentiation</a:t>
+              <a:t>Core (15 min) — Three digits, same rule (cont.)</a:t>
             </a:r>
             <a:endParaRPr lang="en-US" sz="1800" dirty="0"/>
           </a:p>
@@ -2650,7 +3188,7 @@
         <p:spPr>
           <a:xfrm>
             <a:off x="634901" y="883593"/>
-            <a:ext cx="8102798" cy="525661"/>
+            <a:ext cx="8102798" cy="1013222"/>
           </a:xfrm>
           <a:prstGeom prst="rect">
             <a:avLst/>
@@ -2681,7 +3219,7 @@
                 <a:ea typeface="Arial" pitchFamily="34" charset="-122"/>
                 <a:cs typeface="Arial" pitchFamily="34" charset="-120"/>
               </a:rPr>
-              <a:t>Tier up:</a:t>
+              <a:t>419</a:t>
             </a:r>
             <a:pPr algn="l" indent="0" marL="0">
               <a:lnSpc>
@@ -2701,7 +3239,47 @@
                 <a:ea typeface="Arial" pitchFamily="34" charset="-122"/>
                 <a:cs typeface="Arial" pitchFamily="34" charset="-120"/>
               </a:rPr>
-              <a:t> Complement of 5-digit numbers to 100 000. Time goal: under 6 sec each.</a:t>
+              <a:t> — 9-4, 9-1, 10-9 = 5, 8, 1 · </a:t>
+            </a:r>
+            <a:pPr algn="l" indent="0" marL="0">
+              <a:lnSpc>
+                <a:spcPts val="1620"/>
+              </a:lnSpc>
+              <a:spcAft>
+                <a:spcPts val="300"/>
+              </a:spcAft>
+              <a:buNone/>
+            </a:pPr>
+            <a:r>
+              <a:rPr lang="en-US" sz="1200" b="1" dirty="0">
+                <a:solidFill>
+                  <a:srgbClr val="1C2833"/>
+                </a:solidFill>
+                <a:latin typeface="Arial" pitchFamily="34" charset="0"/>
+                <a:ea typeface="Arial" pitchFamily="34" charset="-122"/>
+                <a:cs typeface="Arial" pitchFamily="34" charset="-120"/>
+              </a:rPr>
+              <a:t>581</a:t>
+            </a:r>
+            <a:pPr algn="l" indent="0" marL="0">
+              <a:lnSpc>
+                <a:spcPts val="1620"/>
+              </a:lnSpc>
+              <a:spcAft>
+                <a:spcPts val="300"/>
+              </a:spcAft>
+              <a:buNone/>
+            </a:pPr>
+            <a:r>
+              <a:rPr lang="en-US" sz="1200" dirty="0">
+                <a:solidFill>
+                  <a:srgbClr val="1C2833"/>
+                </a:solidFill>
+                <a:latin typeface="Arial" pitchFamily="34" charset="0"/>
+                <a:ea typeface="Arial" pitchFamily="34" charset="-122"/>
+                <a:cs typeface="Arial" pitchFamily="34" charset="-120"/>
+              </a:rPr>
+              <a:t> · 419 + 581 = 1000 ✓</a:t>
             </a:r>
             <a:endParaRPr lang="en-US" sz="1200" dirty="0"/>
           </a:p>
@@ -2725,7 +3303,7 @@
                 <a:ea typeface="Arial" pitchFamily="34" charset="-122"/>
                 <a:cs typeface="Arial" pitchFamily="34" charset="-120"/>
               </a:rPr>
-              <a:t>Tier down:</a:t>
+              <a:t>256</a:t>
             </a:r>
             <a:pPr algn="l" indent="0" marL="0">
               <a:lnSpc>
@@ -2745,7 +3323,215 @@
                 <a:ea typeface="Arial" pitchFamily="34" charset="-122"/>
                 <a:cs typeface="Arial" pitchFamily="34" charset="-120"/>
               </a:rPr>
-              <a:t> Stay on 3-digit complements. The four-digit and five-digit cases come naturally once 3-digit is automatic.</a:t>
+              <a:t> — 9-2, 9-5, 10-6 = 7, 4, 4 · </a:t>
+            </a:r>
+            <a:pPr algn="l" indent="0" marL="0">
+              <a:lnSpc>
+                <a:spcPts val="1620"/>
+              </a:lnSpc>
+              <a:spcAft>
+                <a:spcPts val="300"/>
+              </a:spcAft>
+              <a:buNone/>
+            </a:pPr>
+            <a:r>
+              <a:rPr lang="en-US" sz="1200" b="1" dirty="0">
+                <a:solidFill>
+                  <a:srgbClr val="1C2833"/>
+                </a:solidFill>
+                <a:latin typeface="Arial" pitchFamily="34" charset="0"/>
+                <a:ea typeface="Arial" pitchFamily="34" charset="-122"/>
+                <a:cs typeface="Arial" pitchFamily="34" charset="-120"/>
+              </a:rPr>
+              <a:t>744</a:t>
+            </a:r>
+            <a:pPr algn="l" indent="0" marL="0">
+              <a:lnSpc>
+                <a:spcPts val="1620"/>
+              </a:lnSpc>
+              <a:spcAft>
+                <a:spcPts val="300"/>
+              </a:spcAft>
+              <a:buNone/>
+            </a:pPr>
+            <a:r>
+              <a:rPr lang="en-US" sz="1200" dirty="0">
+                <a:solidFill>
+                  <a:srgbClr val="1C2833"/>
+                </a:solidFill>
+                <a:latin typeface="Arial" pitchFamily="34" charset="0"/>
+                <a:ea typeface="Arial" pitchFamily="34" charset="-122"/>
+                <a:cs typeface="Arial" pitchFamily="34" charset="-120"/>
+              </a:rPr>
+              <a:t> · 256 + 744 = 1000 ✓</a:t>
+            </a:r>
+            <a:endParaRPr lang="en-US" sz="1200" dirty="0"/>
+          </a:p>
+          <a:p>
+            <a:pPr algn="l" marL="342900" indent="-342900">
+              <a:lnSpc>
+                <a:spcPts val="1620"/>
+              </a:lnSpc>
+              <a:spcAft>
+                <a:spcPts val="300"/>
+              </a:spcAft>
+              <a:buSzPct val="100000"/>
+              <a:buChar char="•"/>
+            </a:pPr>
+            <a:r>
+              <a:rPr lang="en-US" sz="1200" b="1" dirty="0">
+                <a:solidFill>
+                  <a:srgbClr val="1C2833"/>
+                </a:solidFill>
+                <a:latin typeface="Arial" pitchFamily="34" charset="0"/>
+                <a:ea typeface="Arial" pitchFamily="34" charset="-122"/>
+                <a:cs typeface="Arial" pitchFamily="34" charset="-120"/>
+              </a:rPr>
+              <a:t>803</a:t>
+            </a:r>
+            <a:pPr algn="l" indent="0" marL="0">
+              <a:lnSpc>
+                <a:spcPts val="1620"/>
+              </a:lnSpc>
+              <a:spcAft>
+                <a:spcPts val="300"/>
+              </a:spcAft>
+              <a:buNone/>
+            </a:pPr>
+            <a:r>
+              <a:rPr lang="en-US" sz="1200" dirty="0">
+                <a:solidFill>
+                  <a:srgbClr val="1C2833"/>
+                </a:solidFill>
+                <a:latin typeface="Arial" pitchFamily="34" charset="0"/>
+                <a:ea typeface="Arial" pitchFamily="34" charset="-122"/>
+                <a:cs typeface="Arial" pitchFamily="34" charset="-120"/>
+              </a:rPr>
+              <a:t> — 9-8, 9-0, 10-3 = 1, 9, 7 · </a:t>
+            </a:r>
+            <a:pPr algn="l" indent="0" marL="0">
+              <a:lnSpc>
+                <a:spcPts val="1620"/>
+              </a:lnSpc>
+              <a:spcAft>
+                <a:spcPts val="300"/>
+              </a:spcAft>
+              <a:buNone/>
+            </a:pPr>
+            <a:r>
+              <a:rPr lang="en-US" sz="1200" b="1" dirty="0">
+                <a:solidFill>
+                  <a:srgbClr val="1C2833"/>
+                </a:solidFill>
+                <a:latin typeface="Arial" pitchFamily="34" charset="0"/>
+                <a:ea typeface="Arial" pitchFamily="34" charset="-122"/>
+                <a:cs typeface="Arial" pitchFamily="34" charset="-120"/>
+              </a:rPr>
+              <a:t>197</a:t>
+            </a:r>
+            <a:pPr algn="l" indent="0" marL="0">
+              <a:lnSpc>
+                <a:spcPts val="1620"/>
+              </a:lnSpc>
+              <a:spcAft>
+                <a:spcPts val="300"/>
+              </a:spcAft>
+              <a:buNone/>
+            </a:pPr>
+            <a:r>
+              <a:rPr lang="en-US" sz="1200" dirty="0">
+                <a:solidFill>
+                  <a:srgbClr val="1C2833"/>
+                </a:solidFill>
+                <a:latin typeface="Arial" pitchFamily="34" charset="0"/>
+                <a:ea typeface="Arial" pitchFamily="34" charset="-122"/>
+                <a:cs typeface="Arial" pitchFamily="34" charset="-120"/>
+              </a:rPr>
+              <a:t> · 803 + 197 = 1000 ✓</a:t>
+            </a:r>
+            <a:endParaRPr lang="en-US" sz="1200" dirty="0"/>
+          </a:p>
+          <a:p>
+            <a:pPr algn="l" marL="342900" indent="-342900">
+              <a:lnSpc>
+                <a:spcPts val="1620"/>
+              </a:lnSpc>
+              <a:spcAft>
+                <a:spcPts val="300"/>
+              </a:spcAft>
+              <a:buSzPct val="100000"/>
+              <a:buChar char="•"/>
+            </a:pPr>
+            <a:r>
+              <a:rPr lang="en-US" sz="1200" b="1" dirty="0">
+                <a:solidFill>
+                  <a:srgbClr val="1C2833"/>
+                </a:solidFill>
+                <a:latin typeface="Arial" pitchFamily="34" charset="0"/>
+                <a:ea typeface="Arial" pitchFamily="34" charset="-122"/>
+                <a:cs typeface="Arial" pitchFamily="34" charset="-120"/>
+              </a:rPr>
+              <a:t>999</a:t>
+            </a:r>
+            <a:pPr algn="l" indent="0" marL="0">
+              <a:lnSpc>
+                <a:spcPts val="1620"/>
+              </a:lnSpc>
+              <a:spcAft>
+                <a:spcPts val="300"/>
+              </a:spcAft>
+              <a:buNone/>
+            </a:pPr>
+            <a:r>
+              <a:rPr lang="en-US" sz="1200" dirty="0">
+                <a:solidFill>
+                  <a:srgbClr val="1C2833"/>
+                </a:solidFill>
+                <a:latin typeface="Arial" pitchFamily="34" charset="0"/>
+                <a:ea typeface="Arial" pitchFamily="34" charset="-122"/>
+                <a:cs typeface="Arial" pitchFamily="34" charset="-120"/>
+              </a:rPr>
+              <a:t> — 9-9, 9-9, 10-9 = 0, 0, 1 · </a:t>
+            </a:r>
+            <a:pPr algn="l" indent="0" marL="0">
+              <a:lnSpc>
+                <a:spcPts val="1620"/>
+              </a:lnSpc>
+              <a:spcAft>
+                <a:spcPts val="300"/>
+              </a:spcAft>
+              <a:buNone/>
+            </a:pPr>
+            <a:r>
+              <a:rPr lang="en-US" sz="1200" b="1" dirty="0">
+                <a:solidFill>
+                  <a:srgbClr val="1C2833"/>
+                </a:solidFill>
+                <a:latin typeface="Arial" pitchFamily="34" charset="0"/>
+                <a:ea typeface="Arial" pitchFamily="34" charset="-122"/>
+                <a:cs typeface="Arial" pitchFamily="34" charset="-120"/>
+              </a:rPr>
+              <a:t>001</a:t>
+            </a:r>
+            <a:pPr algn="l" indent="0" marL="0">
+              <a:lnSpc>
+                <a:spcPts val="1620"/>
+              </a:lnSpc>
+              <a:spcAft>
+                <a:spcPts val="300"/>
+              </a:spcAft>
+              <a:buNone/>
+            </a:pPr>
+            <a:r>
+              <a:rPr lang="en-US" sz="1200" dirty="0">
+                <a:solidFill>
+                  <a:srgbClr val="1C2833"/>
+                </a:solidFill>
+                <a:latin typeface="Arial" pitchFamily="34" charset="0"/>
+                <a:ea typeface="Arial" pitchFamily="34" charset="-122"/>
+                <a:cs typeface="Arial" pitchFamily="34" charset="-120"/>
+              </a:rPr>
+              <a:t> = 1 · 999 + 1 = 1000 ✓</a:t>
             </a:r>
             <a:endParaRPr lang="en-US" sz="1200" dirty="0"/>
           </a:p>
@@ -2903,7 +3689,7 @@
                 <a:ea typeface="Georgia" pitchFamily="34" charset="-122"/>
                 <a:cs typeface="Georgia" pitchFamily="34" charset="-120"/>
               </a:rPr>
-              <a:t>Teacher notes</a:t>
+              <a:t>Core (15 min) — Three digits, same rule (cont.)</a:t>
             </a:r>
             <a:endParaRPr lang="en-US" sz="1800" dirty="0"/>
           </a:p>
@@ -2917,8 +3703,8 @@
         </p:nvSpPr>
         <p:spPr>
           <a:xfrm>
-            <a:off x="406301" y="870942"/>
-            <a:ext cx="8498026" cy="1492895"/>
+            <a:off x="634901" y="883593"/>
+            <a:ext cx="8102798" cy="300930"/>
           </a:xfrm>
           <a:prstGeom prst="rect">
             <a:avLst/>
@@ -2930,13 +3716,31 @@
           <a:bodyPr wrap="square" lIns="0" tIns="0" rIns="0" bIns="0" rtlCol="0" anchor="t"/>
           <a:lstStyle/>
           <a:p>
-            <a:pPr algn="l" indent="0" marL="0">
-              <a:lnSpc>
-                <a:spcPts val="1680"/>
-              </a:lnSpc>
-              <a:spcBef>
-                <a:spcPts val="300"/>
-              </a:spcBef>
+            <a:pPr algn="l" marL="342900" indent="-342900">
+              <a:lnSpc>
+                <a:spcPts val="1620"/>
+              </a:lnSpc>
+              <a:spcAft>
+                <a:spcPts val="300"/>
+              </a:spcAft>
+              <a:buSzPct val="100000"/>
+              <a:buChar char="•"/>
+            </a:pPr>
+            <a:r>
+              <a:rPr lang="en-US" sz="1200" b="1" dirty="0">
+                <a:solidFill>
+                  <a:srgbClr val="1C2833"/>
+                </a:solidFill>
+                <a:latin typeface="Arial" pitchFamily="34" charset="0"/>
+                <a:ea typeface="Arial" pitchFamily="34" charset="-122"/>
+                <a:cs typeface="Arial" pitchFamily="34" charset="-120"/>
+              </a:rPr>
+              <a:t>Quick extension to 10 000:</a:t>
+            </a:r>
+            <a:pPr algn="l" indent="0" marL="0">
+              <a:lnSpc>
+                <a:spcPts val="1620"/>
+              </a:lnSpc>
               <a:spcAft>
                 <a:spcPts val="300"/>
               </a:spcAft>
@@ -2951,19 +3755,170 @@
                 <a:ea typeface="Arial" pitchFamily="34" charset="-122"/>
                 <a:cs typeface="Arial" pitchFamily="34" charset="-120"/>
               </a:rPr>
-              <a:t>– The most common error: a number like 64 has only two digits; students forget the rule wants a 3-digit number, so they apply the rule to "64" (giving 36) instead of "064" (giving 936). Make sure they "pad with zeros" mentally. – Another common error: the last digit being 0. For 800 → complement to 1000: digit-wise gives 9-8, 9-0, 10-0 = 1, 9, 10. The "10" carries. Easier reading: 800 + 200 = 1000, so complement is 200. The rule still works (1, 9, 10 → 1, 10, 0 → 200), but it's a place where the padding/carry interacts. Use this as a teachable moment; preview Day 6's algebraic justification. – Some students will sniff out a shortcut: "the complement just makes everything add to 9 except the last column which adds to 10." Great — that </a:t>
-            </a:r>
-            <a:pPr algn="l" indent="0" marL="0">
-              <a:lnSpc>
-                <a:spcPts val="1680"/>
-              </a:lnSpc>
-              <a:spcBef>
-                <a:spcPts val="300"/>
-              </a:spcBef>
-              <a:spcAft>
-                <a:spcPts val="300"/>
-              </a:spcAft>
-              <a:buNone/>
+              <a:t> Complement of </a:t>
+            </a:r>
+            <a:pPr algn="l" indent="0" marL="0">
+              <a:lnSpc>
+                <a:spcPts val="1620"/>
+              </a:lnSpc>
+              <a:spcAft>
+                <a:spcPts val="300"/>
+              </a:spcAft>
+              <a:buNone/>
+            </a:pPr>
+            <a:r>
+              <a:rPr lang="en-US" sz="1200" dirty="0">
+                <a:solidFill>
+                  <a:srgbClr val="1C2833"/>
+                </a:solidFill>
+                <a:latin typeface="Arial" pitchFamily="34" charset="0"/>
+                <a:ea typeface="Arial" pitchFamily="34" charset="-122"/>
+                <a:cs typeface="Arial" pitchFamily="34" charset="-120"/>
+              </a:rPr>
+              <a:t>2347</a:t>
+            </a:r>
+            <a:pPr algn="l" indent="0" marL="0">
+              <a:lnSpc>
+                <a:spcPts val="1620"/>
+              </a:lnSpc>
+              <a:spcAft>
+                <a:spcPts val="300"/>
+              </a:spcAft>
+              <a:buNone/>
+            </a:pPr>
+            <a:r>
+              <a:rPr lang="en-US" sz="1200" dirty="0">
+                <a:solidFill>
+                  <a:srgbClr val="1C2833"/>
+                </a:solidFill>
+                <a:latin typeface="Arial" pitchFamily="34" charset="0"/>
+                <a:ea typeface="Arial" pitchFamily="34" charset="-122"/>
+                <a:cs typeface="Arial" pitchFamily="34" charset="-120"/>
+              </a:rPr>
+              <a:t> to 10 000?</a:t>
+            </a:r>
+            <a:endParaRPr lang="en-US" sz="1200" dirty="0"/>
+          </a:p>
+        </p:txBody>
+      </p:sp>
+      <p:sp>
+        <p:nvSpPr>
+          <p:cNvPr id="5" name="Text 3"/>
+          <p:cNvSpPr/>
+          <p:nvPr/>
+        </p:nvSpPr>
+        <p:spPr>
+          <a:xfrm>
+            <a:off x="634901" y="1286024"/>
+            <a:ext cx="8102798" cy="769441"/>
+          </a:xfrm>
+          <a:prstGeom prst="rect">
+            <a:avLst/>
+          </a:prstGeom>
+          <a:noFill/>
+          <a:ln/>
+        </p:spPr>
+        <p:txBody>
+          <a:bodyPr wrap="square" lIns="0" tIns="0" rIns="0" bIns="0" rtlCol="0" anchor="t"/>
+          <a:lstStyle/>
+          <a:p>
+            <a:pPr algn="l" marL="342900" indent="-342900">
+              <a:lnSpc>
+                <a:spcPts val="1620"/>
+              </a:lnSpc>
+              <a:spcAft>
+                <a:spcPts val="300"/>
+              </a:spcAft>
+              <a:buSzPct val="100000"/>
+              <a:buChar char="•"/>
+            </a:pPr>
+            <a:r>
+              <a:rPr lang="en-US" sz="1200" dirty="0">
+                <a:solidFill>
+                  <a:srgbClr val="1C2833"/>
+                </a:solidFill>
+                <a:latin typeface="Arial" pitchFamily="34" charset="0"/>
+                <a:ea typeface="Arial" pitchFamily="34" charset="-122"/>
+                <a:cs typeface="Arial" pitchFamily="34" charset="-120"/>
+              </a:rPr>
+              <a:t>9-2, 9-3, 9-4, 10-7 = </a:t>
+            </a:r>
+            <a:pPr algn="l" indent="0" marL="0">
+              <a:lnSpc>
+                <a:spcPts val="1620"/>
+              </a:lnSpc>
+              <a:spcAft>
+                <a:spcPts val="300"/>
+              </a:spcAft>
+              <a:buNone/>
+            </a:pPr>
+            <a:r>
+              <a:rPr lang="en-US" sz="1200" b="1" dirty="0">
+                <a:solidFill>
+                  <a:srgbClr val="1C2833"/>
+                </a:solidFill>
+                <a:latin typeface="Arial" pitchFamily="34" charset="0"/>
+                <a:ea typeface="Arial" pitchFamily="34" charset="-122"/>
+                <a:cs typeface="Arial" pitchFamily="34" charset="-120"/>
+              </a:rPr>
+              <a:t>7653</a:t>
+            </a:r>
+            <a:pPr algn="l" indent="0" marL="0">
+              <a:lnSpc>
+                <a:spcPts val="1620"/>
+              </a:lnSpc>
+              <a:spcAft>
+                <a:spcPts val="300"/>
+              </a:spcAft>
+              <a:buNone/>
+            </a:pPr>
+            <a:r>
+              <a:rPr lang="en-US" sz="1200" dirty="0">
+                <a:solidFill>
+                  <a:srgbClr val="1C2833"/>
+                </a:solidFill>
+                <a:latin typeface="Arial" pitchFamily="34" charset="0"/>
+                <a:ea typeface="Arial" pitchFamily="34" charset="-122"/>
+                <a:cs typeface="Arial" pitchFamily="34" charset="-120"/>
+              </a:rPr>
+              <a:t>.</a:t>
+            </a:r>
+            <a:endParaRPr lang="en-US" sz="1200" dirty="0"/>
+          </a:p>
+          <a:p>
+            <a:pPr algn="l" marL="342900" indent="-342900">
+              <a:lnSpc>
+                <a:spcPts val="1620"/>
+              </a:lnSpc>
+              <a:spcAft>
+                <a:spcPts val="300"/>
+              </a:spcAft>
+              <a:buSzPct val="100000"/>
+              <a:buChar char="•"/>
+            </a:pPr>
+            <a:r>
+              <a:rPr lang="en-US" sz="1200" dirty="0">
+                <a:solidFill>
+                  <a:srgbClr val="1C2833"/>
+                </a:solidFill>
+                <a:latin typeface="Arial" pitchFamily="34" charset="0"/>
+                <a:ea typeface="Arial" pitchFamily="34" charset="-122"/>
+                <a:cs typeface="Arial" pitchFamily="34" charset="-120"/>
+              </a:rPr>
+              <a:t>2347 + 7653 = 10 000. ✓</a:t>
+            </a:r>
+            <a:endParaRPr lang="en-US" sz="1200" dirty="0"/>
+          </a:p>
+          <a:p>
+            <a:pPr algn="l" marL="342900" indent="-342900">
+              <a:lnSpc>
+                <a:spcPts val="1620"/>
+              </a:lnSpc>
+              <a:spcAft>
+                <a:spcPts val="300"/>
+              </a:spcAft>
+              <a:buSzPct val="100000"/>
+              <a:buChar char="•"/>
             </a:pPr>
             <a:r>
               <a:rPr lang="en-US" sz="1200" i="1" dirty="0">
@@ -2974,30 +3929,7 @@
                 <a:ea typeface="Arial" pitchFamily="34" charset="-122"/>
                 <a:cs typeface="Arial" pitchFamily="34" charset="-120"/>
               </a:rPr>
-              <a:t>is</a:t>
-            </a:r>
-            <a:pPr algn="l" indent="0" marL="0">
-              <a:lnSpc>
-                <a:spcPts val="1680"/>
-              </a:lnSpc>
-              <a:spcBef>
-                <a:spcPts val="300"/>
-              </a:spcBef>
-              <a:spcAft>
-                <a:spcPts val="300"/>
-              </a:spcAft>
-              <a:buNone/>
-            </a:pPr>
-            <a:r>
-              <a:rPr lang="en-US" sz="1200" dirty="0">
-                <a:solidFill>
-                  <a:srgbClr val="1C2833"/>
-                </a:solidFill>
-                <a:latin typeface="Arial" pitchFamily="34" charset="0"/>
-                <a:ea typeface="Arial" pitchFamily="34" charset="-122"/>
-                <a:cs typeface="Arial" pitchFamily="34" charset="-120"/>
-              </a:rPr>
-              <a:t> the rule, restated. Praise.</a:t>
+              <a:t>"Same rule. Just more digits."</a:t>
             </a:r>
             <a:endParaRPr lang="en-US" sz="1200" dirty="0"/>
           </a:p>
@@ -3005,7 +3937,7 @@
       </p:sp>
       <p:sp>
         <p:nvSpPr>
-          <p:cNvPr id="5" name="Text 3"/>
+          <p:cNvPr id="6" name="Text 4"/>
           <p:cNvSpPr/>
           <p:nvPr/>
         </p:nvSpPr>
@@ -3155,7 +4087,7 @@
                 <a:ea typeface="Georgia" pitchFamily="34" charset="-122"/>
                 <a:cs typeface="Georgia" pitchFamily="34" charset="-120"/>
               </a:rPr>
-              <a:t>Citation(s) used in this lesson</a:t>
+              <a:t>Activity (15 min) — Speed drill</a:t>
             </a:r>
             <a:endParaRPr lang="en-US" sz="1800" dirty="0"/>
           </a:p>
@@ -3169,8 +4101,8 @@
         </p:nvSpPr>
         <p:spPr>
           <a:xfrm>
-            <a:off x="406301" y="870942"/>
-            <a:ext cx="8498026" cy="213271"/>
+            <a:off x="634901" y="883593"/>
+            <a:ext cx="8102798" cy="769441"/>
           </a:xfrm>
           <a:prstGeom prst="rect">
             <a:avLst/>
@@ -3182,17 +4114,15 @@
           <a:bodyPr wrap="square" lIns="0" tIns="0" rIns="0" bIns="0" rtlCol="0" anchor="t"/>
           <a:lstStyle/>
           <a:p>
-            <a:pPr algn="l" indent="0" marL="0">
-              <a:lnSpc>
-                <a:spcPts val="1680"/>
-              </a:lnSpc>
-              <a:spcBef>
-                <a:spcPts val="300"/>
-              </a:spcBef>
-              <a:spcAft>
-                <a:spcPts val="300"/>
-              </a:spcAft>
-              <a:buNone/>
+            <a:pPr algn="l" marL="342900" indent="-342900">
+              <a:lnSpc>
+                <a:spcPts val="1620"/>
+              </a:lnSpc>
+              <a:spcAft>
+                <a:spcPts val="300"/>
+              </a:spcAft>
+              <a:buSzPct val="100000"/>
+              <a:buChar char="•"/>
             </a:pPr>
             <a:r>
               <a:rPr lang="en-US" sz="1200" dirty="0">
@@ -3203,42 +4133,20 @@
                 <a:ea typeface="Arial" pitchFamily="34" charset="-122"/>
                 <a:cs typeface="Arial" pitchFamily="34" charset="-120"/>
               </a:rPr>
-              <a:t>– Tirthaji, </a:t>
-            </a:r>
-            <a:pPr algn="l" indent="0" marL="0">
-              <a:lnSpc>
-                <a:spcPts val="1680"/>
-              </a:lnSpc>
-              <a:spcBef>
-                <a:spcPts val="300"/>
-              </a:spcBef>
-              <a:spcAft>
-                <a:spcPts val="300"/>
-              </a:spcAft>
-              <a:buNone/>
-            </a:pPr>
-            <a:r>
-              <a:rPr lang="en-US" sz="1200" i="1" dirty="0">
-                <a:solidFill>
-                  <a:srgbClr val="1C2833"/>
-                </a:solidFill>
-                <a:latin typeface="Arial" pitchFamily="34" charset="0"/>
-                <a:ea typeface="Arial" pitchFamily="34" charset="-122"/>
-                <a:cs typeface="Arial" pitchFamily="34" charset="-120"/>
-              </a:rPr>
-              <a:t>Vedic Mathematics</a:t>
-            </a:r>
-            <a:pPr algn="l" indent="0" marL="0">
-              <a:lnSpc>
-                <a:spcPts val="1680"/>
-              </a:lnSpc>
-              <a:spcBef>
-                <a:spcPts val="300"/>
-              </a:spcBef>
-              <a:spcAft>
-                <a:spcPts val="300"/>
-              </a:spcAft>
-              <a:buNone/>
+              <a:t>Pair-drill: 20 three-digit numbers. Aim for all 20 in under 90 seconds.</a:t>
+            </a:r>
+            <a:endParaRPr lang="en-US" sz="1200" dirty="0"/>
+          </a:p>
+          <a:p>
+            <a:pPr algn="l" marL="342900" indent="-342900">
+              <a:lnSpc>
+                <a:spcPts val="1620"/>
+              </a:lnSpc>
+              <a:spcAft>
+                <a:spcPts val="300"/>
+              </a:spcAft>
+              <a:buSzPct val="100000"/>
+              <a:buChar char="•"/>
             </a:pPr>
             <a:r>
               <a:rPr lang="en-US" sz="1200" dirty="0">
@@ -3249,10 +4157,34 @@
                 <a:ea typeface="Arial" pitchFamily="34" charset="-122"/>
                 <a:cs typeface="Arial" pitchFamily="34" charset="-120"/>
               </a:rPr>
-              <a:t> (1965), sūtra Nikhilam (#2).</a:t>
+              <a:t>Self-check using a calculator: number + your complement should equal 1000.</a:t>
             </a:r>
             <a:endParaRPr lang="en-US" sz="1200" dirty="0"/>
           </a:p>
+          <a:p>
+            <a:pPr algn="l" marL="342900" indent="-342900">
+              <a:lnSpc>
+                <a:spcPts val="1620"/>
+              </a:lnSpc>
+              <a:spcAft>
+                <a:spcPts val="300"/>
+              </a:spcAft>
+              <a:buSzPct val="100000"/>
+              <a:buChar char="•"/>
+            </a:pPr>
+            <a:r>
+              <a:rPr lang="en-US" sz="1200" dirty="0">
+                <a:solidFill>
+                  <a:srgbClr val="1C2833"/>
+                </a:solidFill>
+                <a:latin typeface="Arial" pitchFamily="34" charset="0"/>
+                <a:ea typeface="Arial" pitchFamily="34" charset="-122"/>
+                <a:cs typeface="Arial" pitchFamily="34" charset="-120"/>
+              </a:rPr>
+              <a:t>Second sheet: 10 four-digit numbers, complement to 10 000. Aim under 60 seconds for the set.</a:t>
+            </a:r>
+            <a:endParaRPr lang="en-US" sz="1200" dirty="0"/>
+          </a:p>
         </p:txBody>
       </p:sp>
       <p:sp>
@@ -3263,8 +4195,8 @@
         </p:nvSpPr>
         <p:spPr>
           <a:xfrm>
-            <a:off x="634901" y="1173063"/>
-            <a:ext cx="8102798" cy="281880"/>
+            <a:off x="406301" y="4434929"/>
+            <a:ext cx="8498026" cy="213271"/>
           </a:xfrm>
           <a:prstGeom prst="rect">
             <a:avLst/>
@@ -3276,6 +4208,164 @@
           <a:bodyPr wrap="square" lIns="0" tIns="0" rIns="0" bIns="0" rtlCol="0" anchor="t"/>
           <a:lstStyle/>
           <a:p>
+            <a:pPr algn="l" indent="0" marL="0">
+              <a:lnSpc>
+                <a:spcPts val="1680"/>
+              </a:lnSpc>
+              <a:spcBef>
+                <a:spcPts val="300"/>
+              </a:spcBef>
+              <a:spcAft>
+                <a:spcPts val="300"/>
+              </a:spcAft>
+              <a:buNone/>
+            </a:pPr>
+            <a:r>
+              <a:rPr lang="en-US" sz="1200" dirty="0">
+                <a:solidFill>
+                  <a:srgbClr val="1C2833"/>
+                </a:solidFill>
+                <a:latin typeface="Arial" pitchFamily="34" charset="0"/>
+                <a:ea typeface="Arial" pitchFamily="34" charset="-122"/>
+                <a:cs typeface="Arial" pitchFamily="34" charset="-120"/>
+              </a:rPr>
+              <a:t>Middle ·  · IKS Curriculum</a:t>
+            </a:r>
+            <a:endParaRPr lang="en-US" sz="1200" dirty="0"/>
+          </a:p>
+        </p:txBody>
+      </p:sp>
+    </p:spTree>
+  </p:cSld>
+  <p:clrMapOvr>
+    <a:masterClrMapping/>
+  </p:clrMapOvr>
+</p:sld>
+</file>
+
+<file path=ppt/slides/slide14.xml><?xml version="1.0" encoding="utf-8"?>
+<p:sld xmlns:a="http://schemas.openxmlformats.org/drawingml/2006/main" xmlns:r="http://schemas.openxmlformats.org/officeDocument/2006/relationships" xmlns:p="http://schemas.openxmlformats.org/presentationml/2006/main">
+  <p:cSld name="Slide 14">
+    <p:bg>
+      <p:bgPr>
+        <a:solidFill>
+          <a:srgbClr val="FFFFFF"/>
+        </a:solidFill>
+      </p:bgPr>
+    </p:bg>
+    <p:spTree>
+      <p:nvGrpSpPr>
+        <p:cNvPr id="1" name=""/>
+        <p:cNvGrpSpPr/>
+        <p:nvPr/>
+      </p:nvGrpSpPr>
+      <p:grpSpPr>
+        <a:xfrm>
+          <a:off x="0" y="0"/>
+          <a:ext cx="0" cy="0"/>
+          <a:chOff x="0" y="0"/>
+          <a:chExt cx="0" cy="0"/>
+        </a:xfrm>
+      </p:grpSpPr>
+      <p:sp>
+        <p:nvSpPr>
+          <p:cNvPr id="2" name="Text 0"/>
+          <p:cNvSpPr/>
+          <p:nvPr/>
+        </p:nvSpPr>
+        <p:spPr>
+          <a:xfrm>
+            <a:off x="0" y="0"/>
+            <a:ext cx="9144000" cy="101501"/>
+          </a:xfrm>
+          <a:prstGeom prst="rect">
+            <a:avLst/>
+          </a:prstGeom>
+          <a:solidFill>
+            <a:srgbClr val="277884"/>
+          </a:solidFill>
+          <a:ln/>
+        </p:spPr>
+        <p:txBody>
+          <a:bodyPr wrap="square" rtlCol="0" anchor="ctr"/>
+          <a:lstStyle/>
+          <a:p>
+            <a:pPr indent="0" marL="0">
+              <a:buNone/>
+            </a:pPr>
+            <a:endParaRPr lang="en-US" dirty="0"/>
+          </a:p>
+        </p:txBody>
+      </p:sp>
+      <p:sp>
+        <p:nvSpPr>
+          <p:cNvPr id="3" name="Text 1"/>
+          <p:cNvSpPr/>
+          <p:nvPr/>
+        </p:nvSpPr>
+        <p:spPr>
+          <a:xfrm>
+            <a:off x="406301" y="457051"/>
+            <a:ext cx="8498026" cy="274290"/>
+          </a:xfrm>
+          <a:prstGeom prst="rect">
+            <a:avLst/>
+          </a:prstGeom>
+          <a:noFill/>
+          <a:ln/>
+        </p:spPr>
+        <p:txBody>
+          <a:bodyPr wrap="square" lIns="0" tIns="0" rIns="0" bIns="0" rtlCol="0" anchor="t"/>
+          <a:lstStyle/>
+          <a:p>
+            <a:pPr algn="l" indent="0" marL="0">
+              <a:lnSpc>
+                <a:spcPts val="2160"/>
+              </a:lnSpc>
+              <a:spcBef>
+                <a:spcPts val="600"/>
+              </a:spcBef>
+              <a:spcAft>
+                <a:spcPts val="800"/>
+              </a:spcAft>
+              <a:buNone/>
+            </a:pPr>
+            <a:r>
+              <a:rPr lang="en-US" sz="1800" b="1" dirty="0">
+                <a:solidFill>
+                  <a:srgbClr val="FE4447"/>
+                </a:solidFill>
+                <a:latin typeface="Georgia" pitchFamily="34" charset="0"/>
+                <a:ea typeface="Georgia" pitchFamily="34" charset="-122"/>
+                <a:cs typeface="Georgia" pitchFamily="34" charset="-120"/>
+              </a:rPr>
+              <a:t>Wrap-up + Formative quiz (10 min)</a:t>
+            </a:r>
+            <a:endParaRPr lang="en-US" sz="1800" dirty="0"/>
+          </a:p>
+        </p:txBody>
+      </p:sp>
+      <p:sp>
+        <p:nvSpPr>
+          <p:cNvPr id="4" name="Text 2"/>
+          <p:cNvSpPr/>
+          <p:nvPr/>
+        </p:nvSpPr>
+        <p:spPr>
+          <a:xfrm>
+            <a:off x="634901" y="883593"/>
+            <a:ext cx="8102798" cy="544711"/>
+          </a:xfrm>
+          <a:prstGeom prst="rect">
+            <a:avLst/>
+          </a:prstGeom>
+          <a:noFill/>
+          <a:ln/>
+        </p:spPr>
+        <p:txBody>
+          <a:bodyPr wrap="square" lIns="0" tIns="0" rIns="0" bIns="0" rtlCol="0" anchor="t"/>
+          <a:lstStyle/>
+          <a:p>
             <a:pPr algn="l" marL="342900" indent="-342900">
               <a:lnSpc>
                 <a:spcPts val="1620"/>
@@ -3287,6 +4377,910 @@
               <a:buChar char="•"/>
             </a:pPr>
             <a:r>
+              <a:rPr lang="en-US" sz="1200" dirty="0">
+                <a:solidFill>
+                  <a:srgbClr val="1C2833"/>
+                </a:solidFill>
+                <a:latin typeface="Arial" pitchFamily="34" charset="0"/>
+                <a:ea typeface="Arial" pitchFamily="34" charset="-122"/>
+                <a:cs typeface="Arial" pitchFamily="34" charset="-120"/>
+              </a:rPr>
+              <a:t>Formative quiz Part A from </a:t>
+            </a:r>
+            <a:pPr algn="l" indent="0" marL="0">
+              <a:lnSpc>
+                <a:spcPts val="1620"/>
+              </a:lnSpc>
+              <a:spcAft>
+                <a:spcPts val="300"/>
+              </a:spcAft>
+              <a:buNone/>
+            </a:pPr>
+            <a:r>
+              <a:rPr lang="en-US" sz="1200" dirty="0">
+                <a:solidFill>
+                  <a:srgbClr val="1C2833"/>
+                </a:solidFill>
+                <a:latin typeface="Arial" pitchFamily="34" charset="0"/>
+                <a:ea typeface="Arial" pitchFamily="34" charset="-122"/>
+                <a:cs typeface="Arial" pitchFamily="34" charset="-120"/>
+              </a:rPr>
+              <a:t>quizzes/formative.md</a:t>
+            </a:r>
+            <a:pPr algn="l" indent="0" marL="0">
+              <a:lnSpc>
+                <a:spcPts val="1620"/>
+              </a:lnSpc>
+              <a:spcAft>
+                <a:spcPts val="300"/>
+              </a:spcAft>
+              <a:buNone/>
+            </a:pPr>
+            <a:r>
+              <a:rPr lang="en-US" sz="1200" dirty="0">
+                <a:solidFill>
+                  <a:srgbClr val="1C2833"/>
+                </a:solidFill>
+                <a:latin typeface="Arial" pitchFamily="34" charset="0"/>
+                <a:ea typeface="Arial" pitchFamily="34" charset="-122"/>
+                <a:cs typeface="Arial" pitchFamily="34" charset="-120"/>
+              </a:rPr>
+              <a:t> — 5 questions on slips of paper, 5 min.</a:t>
+            </a:r>
+            <a:endParaRPr lang="en-US" sz="1200" dirty="0"/>
+          </a:p>
+          <a:p>
+            <a:pPr algn="l" marL="342900" indent="-342900">
+              <a:lnSpc>
+                <a:spcPts val="1620"/>
+              </a:lnSpc>
+              <a:spcAft>
+                <a:spcPts val="300"/>
+              </a:spcAft>
+              <a:buSzPct val="100000"/>
+              <a:buChar char="•"/>
+            </a:pPr>
+            <a:r>
+              <a:rPr lang="en-US" sz="1200" dirty="0">
+                <a:solidFill>
+                  <a:srgbClr val="1C2833"/>
+                </a:solidFill>
+                <a:latin typeface="Arial" pitchFamily="34" charset="0"/>
+                <a:ea typeface="Arial" pitchFamily="34" charset="-122"/>
+                <a:cs typeface="Arial" pitchFamily="34" charset="-120"/>
+              </a:rPr>
+              <a:t>Collect. Next class includes the result.</a:t>
+            </a:r>
+            <a:endParaRPr lang="en-US" sz="1200" dirty="0"/>
+          </a:p>
+        </p:txBody>
+      </p:sp>
+      <p:sp>
+        <p:nvSpPr>
+          <p:cNvPr id="5" name="Text 3"/>
+          <p:cNvSpPr/>
+          <p:nvPr/>
+        </p:nvSpPr>
+        <p:spPr>
+          <a:xfrm>
+            <a:off x="406301" y="4434929"/>
+            <a:ext cx="8498026" cy="213271"/>
+          </a:xfrm>
+          <a:prstGeom prst="rect">
+            <a:avLst/>
+          </a:prstGeom>
+          <a:noFill/>
+          <a:ln/>
+        </p:spPr>
+        <p:txBody>
+          <a:bodyPr wrap="square" lIns="0" tIns="0" rIns="0" bIns="0" rtlCol="0" anchor="t"/>
+          <a:lstStyle/>
+          <a:p>
+            <a:pPr algn="l" indent="0" marL="0">
+              <a:lnSpc>
+                <a:spcPts val="1680"/>
+              </a:lnSpc>
+              <a:spcBef>
+                <a:spcPts val="300"/>
+              </a:spcBef>
+              <a:spcAft>
+                <a:spcPts val="300"/>
+              </a:spcAft>
+              <a:buNone/>
+            </a:pPr>
+            <a:r>
+              <a:rPr lang="en-US" sz="1200" dirty="0">
+                <a:solidFill>
+                  <a:srgbClr val="1C2833"/>
+                </a:solidFill>
+                <a:latin typeface="Arial" pitchFamily="34" charset="0"/>
+                <a:ea typeface="Arial" pitchFamily="34" charset="-122"/>
+                <a:cs typeface="Arial" pitchFamily="34" charset="-120"/>
+              </a:rPr>
+              <a:t>Middle ·  · IKS Curriculum</a:t>
+            </a:r>
+            <a:endParaRPr lang="en-US" sz="1200" dirty="0"/>
+          </a:p>
+        </p:txBody>
+      </p:sp>
+    </p:spTree>
+  </p:cSld>
+  <p:clrMapOvr>
+    <a:masterClrMapping/>
+  </p:clrMapOvr>
+</p:sld>
+</file>
+
+<file path=ppt/slides/slide15.xml><?xml version="1.0" encoding="utf-8"?>
+<p:sld xmlns:a="http://schemas.openxmlformats.org/drawingml/2006/main" xmlns:r="http://schemas.openxmlformats.org/officeDocument/2006/relationships" xmlns:p="http://schemas.openxmlformats.org/presentationml/2006/main">
+  <p:cSld name="Slide 15">
+    <p:bg>
+      <p:bgPr>
+        <a:solidFill>
+          <a:srgbClr val="FFFFFF"/>
+        </a:solidFill>
+      </p:bgPr>
+    </p:bg>
+    <p:spTree>
+      <p:nvGrpSpPr>
+        <p:cNvPr id="1" name=""/>
+        <p:cNvGrpSpPr/>
+        <p:nvPr/>
+      </p:nvGrpSpPr>
+      <p:grpSpPr>
+        <a:xfrm>
+          <a:off x="0" y="0"/>
+          <a:ext cx="0" cy="0"/>
+          <a:chOff x="0" y="0"/>
+          <a:chExt cx="0" cy="0"/>
+        </a:xfrm>
+      </p:grpSpPr>
+      <p:sp>
+        <p:nvSpPr>
+          <p:cNvPr id="2" name="Text 0"/>
+          <p:cNvSpPr/>
+          <p:nvPr/>
+        </p:nvSpPr>
+        <p:spPr>
+          <a:xfrm>
+            <a:off x="0" y="0"/>
+            <a:ext cx="9144000" cy="101501"/>
+          </a:xfrm>
+          <a:prstGeom prst="rect">
+            <a:avLst/>
+          </a:prstGeom>
+          <a:solidFill>
+            <a:srgbClr val="277884"/>
+          </a:solidFill>
+          <a:ln/>
+        </p:spPr>
+        <p:txBody>
+          <a:bodyPr wrap="square" rtlCol="0" anchor="ctr"/>
+          <a:lstStyle/>
+          <a:p>
+            <a:pPr indent="0" marL="0">
+              <a:buNone/>
+            </a:pPr>
+            <a:endParaRPr lang="en-US" dirty="0"/>
+          </a:p>
+        </p:txBody>
+      </p:sp>
+      <p:sp>
+        <p:nvSpPr>
+          <p:cNvPr id="3" name="Text 1"/>
+          <p:cNvSpPr/>
+          <p:nvPr/>
+        </p:nvSpPr>
+        <p:spPr>
+          <a:xfrm>
+            <a:off x="406301" y="457051"/>
+            <a:ext cx="8498026" cy="274290"/>
+          </a:xfrm>
+          <a:prstGeom prst="rect">
+            <a:avLst/>
+          </a:prstGeom>
+          <a:noFill/>
+          <a:ln/>
+        </p:spPr>
+        <p:txBody>
+          <a:bodyPr wrap="square" lIns="0" tIns="0" rIns="0" bIns="0" rtlCol="0" anchor="t"/>
+          <a:lstStyle/>
+          <a:p>
+            <a:pPr algn="l" indent="0" marL="0">
+              <a:lnSpc>
+                <a:spcPts val="2160"/>
+              </a:lnSpc>
+              <a:spcBef>
+                <a:spcPts val="600"/>
+              </a:spcBef>
+              <a:spcAft>
+                <a:spcPts val="800"/>
+              </a:spcAft>
+              <a:buNone/>
+            </a:pPr>
+            <a:r>
+              <a:rPr lang="en-US" sz="1800" b="1" dirty="0">
+                <a:solidFill>
+                  <a:srgbClr val="FE4447"/>
+                </a:solidFill>
+                <a:latin typeface="Georgia" pitchFamily="34" charset="0"/>
+                <a:ea typeface="Georgia" pitchFamily="34" charset="-122"/>
+                <a:cs typeface="Georgia" pitchFamily="34" charset="-120"/>
+              </a:rPr>
+              <a:t>Homework</a:t>
+            </a:r>
+            <a:endParaRPr lang="en-US" sz="1800" dirty="0"/>
+          </a:p>
+        </p:txBody>
+      </p:sp>
+      <p:sp>
+        <p:nvSpPr>
+          <p:cNvPr id="4" name="Text 2"/>
+          <p:cNvSpPr/>
+          <p:nvPr/>
+        </p:nvSpPr>
+        <p:spPr>
+          <a:xfrm>
+            <a:off x="634901" y="883593"/>
+            <a:ext cx="8102798" cy="1257002"/>
+          </a:xfrm>
+          <a:prstGeom prst="rect">
+            <a:avLst/>
+          </a:prstGeom>
+          <a:noFill/>
+          <a:ln/>
+        </p:spPr>
+        <p:txBody>
+          <a:bodyPr wrap="square" lIns="0" tIns="0" rIns="0" bIns="0" rtlCol="0" anchor="t"/>
+          <a:lstStyle/>
+          <a:p>
+            <a:pPr algn="l" marL="342900" indent="-342900">
+              <a:lnSpc>
+                <a:spcPts val="1620"/>
+              </a:lnSpc>
+              <a:spcAft>
+                <a:spcPts val="300"/>
+              </a:spcAft>
+              <a:buSzPct val="100000"/>
+              <a:buChar char="•"/>
+            </a:pPr>
+            <a:r>
+              <a:rPr lang="en-US" sz="1200" dirty="0">
+                <a:solidFill>
+                  <a:srgbClr val="1C2833"/>
+                </a:solidFill>
+                <a:latin typeface="Arial" pitchFamily="34" charset="0"/>
+                <a:ea typeface="Arial" pitchFamily="34" charset="-122"/>
+                <a:cs typeface="Arial" pitchFamily="34" charset="-120"/>
+              </a:rPr>
+              <a:t>Find the complement of each of these to 1000:</a:t>
+            </a:r>
+            <a:endParaRPr lang="en-US" sz="1200" dirty="0"/>
+          </a:p>
+          <a:p>
+            <a:pPr algn="l" marL="342900" indent="-342900">
+              <a:lnSpc>
+                <a:spcPts val="1620"/>
+              </a:lnSpc>
+              <a:spcAft>
+                <a:spcPts val="300"/>
+              </a:spcAft>
+              <a:buSzPct val="100000"/>
+              <a:buChar char="•"/>
+            </a:pPr>
+            <a:r>
+              <a:rPr lang="en-US" sz="1200" dirty="0">
+                <a:solidFill>
+                  <a:srgbClr val="1C2833"/>
+                </a:solidFill>
+                <a:latin typeface="Arial" pitchFamily="34" charset="0"/>
+                <a:ea typeface="Arial" pitchFamily="34" charset="-122"/>
+                <a:cs typeface="Arial" pitchFamily="34" charset="-120"/>
+              </a:rPr>
+              <a:t>156, 423, 789, 802, 64 (treat as 064), 7 (treat as 007), 555, 900.</a:t>
+            </a:r>
+            <a:endParaRPr lang="en-US" sz="1200" dirty="0"/>
+          </a:p>
+          <a:p>
+            <a:pPr algn="l" marL="342900" indent="-342900">
+              <a:lnSpc>
+                <a:spcPts val="1620"/>
+              </a:lnSpc>
+              <a:spcAft>
+                <a:spcPts val="300"/>
+              </a:spcAft>
+              <a:buSzPct val="100000"/>
+              <a:buChar char="•"/>
+            </a:pPr>
+            <a:r>
+              <a:rPr lang="en-US" sz="1200" dirty="0">
+                <a:solidFill>
+                  <a:srgbClr val="1C2833"/>
+                </a:solidFill>
+                <a:latin typeface="Arial" pitchFamily="34" charset="0"/>
+                <a:ea typeface="Arial" pitchFamily="34" charset="-122"/>
+                <a:cs typeface="Arial" pitchFamily="34" charset="-120"/>
+              </a:rPr>
+              <a:t>Find the complement of each of these to 10 000:</a:t>
+            </a:r>
+            <a:endParaRPr lang="en-US" sz="1200" dirty="0"/>
+          </a:p>
+          <a:p>
+            <a:pPr algn="l" marL="342900" indent="-342900">
+              <a:lnSpc>
+                <a:spcPts val="1620"/>
+              </a:lnSpc>
+              <a:spcAft>
+                <a:spcPts val="300"/>
+              </a:spcAft>
+              <a:buSzPct val="100000"/>
+              <a:buChar char="•"/>
+            </a:pPr>
+            <a:r>
+              <a:rPr lang="en-US" sz="1200" dirty="0">
+                <a:solidFill>
+                  <a:srgbClr val="1C2833"/>
+                </a:solidFill>
+                <a:latin typeface="Arial" pitchFamily="34" charset="0"/>
+                <a:ea typeface="Arial" pitchFamily="34" charset="-122"/>
+                <a:cs typeface="Arial" pitchFamily="34" charset="-120"/>
+              </a:rPr>
+              <a:t>3456, 1027, 8888, 75 (treat as 0075), 999.</a:t>
+            </a:r>
+            <a:endParaRPr lang="en-US" sz="1200" dirty="0"/>
+          </a:p>
+          <a:p>
+            <a:pPr algn="l" marL="342900" indent="-342900">
+              <a:lnSpc>
+                <a:spcPts val="1620"/>
+              </a:lnSpc>
+              <a:spcAft>
+                <a:spcPts val="300"/>
+              </a:spcAft>
+              <a:buSzPct val="100000"/>
+              <a:buChar char="•"/>
+            </a:pPr>
+            <a:r>
+              <a:rPr lang="en-US" sz="1200" dirty="0">
+                <a:solidFill>
+                  <a:srgbClr val="1C2833"/>
+                </a:solidFill>
+                <a:latin typeface="Arial" pitchFamily="34" charset="0"/>
+                <a:ea typeface="Arial" pitchFamily="34" charset="-122"/>
+                <a:cs typeface="Arial" pitchFamily="34" charset="-120"/>
+              </a:rPr>
+              <a:t>Time yourself. Total time goal: under 2 minutes.</a:t>
+            </a:r>
+            <a:endParaRPr lang="en-US" sz="1200" dirty="0"/>
+          </a:p>
+        </p:txBody>
+      </p:sp>
+      <p:sp>
+        <p:nvSpPr>
+          <p:cNvPr id="5" name="Text 3"/>
+          <p:cNvSpPr/>
+          <p:nvPr/>
+        </p:nvSpPr>
+        <p:spPr>
+          <a:xfrm>
+            <a:off x="406301" y="4434929"/>
+            <a:ext cx="8498026" cy="213271"/>
+          </a:xfrm>
+          <a:prstGeom prst="rect">
+            <a:avLst/>
+          </a:prstGeom>
+          <a:noFill/>
+          <a:ln/>
+        </p:spPr>
+        <p:txBody>
+          <a:bodyPr wrap="square" lIns="0" tIns="0" rIns="0" bIns="0" rtlCol="0" anchor="t"/>
+          <a:lstStyle/>
+          <a:p>
+            <a:pPr algn="l" indent="0" marL="0">
+              <a:lnSpc>
+                <a:spcPts val="1680"/>
+              </a:lnSpc>
+              <a:spcBef>
+                <a:spcPts val="300"/>
+              </a:spcBef>
+              <a:spcAft>
+                <a:spcPts val="300"/>
+              </a:spcAft>
+              <a:buNone/>
+            </a:pPr>
+            <a:r>
+              <a:rPr lang="en-US" sz="1200" dirty="0">
+                <a:solidFill>
+                  <a:srgbClr val="1C2833"/>
+                </a:solidFill>
+                <a:latin typeface="Arial" pitchFamily="34" charset="0"/>
+                <a:ea typeface="Arial" pitchFamily="34" charset="-122"/>
+                <a:cs typeface="Arial" pitchFamily="34" charset="-120"/>
+              </a:rPr>
+              <a:t>Middle ·  · IKS Curriculum</a:t>
+            </a:r>
+            <a:endParaRPr lang="en-US" sz="1200" dirty="0"/>
+          </a:p>
+        </p:txBody>
+      </p:sp>
+    </p:spTree>
+  </p:cSld>
+  <p:clrMapOvr>
+    <a:masterClrMapping/>
+  </p:clrMapOvr>
+</p:sld>
+</file>
+
+<file path=ppt/slides/slide16.xml><?xml version="1.0" encoding="utf-8"?>
+<p:sld xmlns:a="http://schemas.openxmlformats.org/drawingml/2006/main" xmlns:r="http://schemas.openxmlformats.org/officeDocument/2006/relationships" xmlns:p="http://schemas.openxmlformats.org/presentationml/2006/main">
+  <p:cSld name="Slide 16">
+    <p:bg>
+      <p:bgPr>
+        <a:solidFill>
+          <a:srgbClr val="FFFFFF"/>
+        </a:solidFill>
+      </p:bgPr>
+    </p:bg>
+    <p:spTree>
+      <p:nvGrpSpPr>
+        <p:cNvPr id="1" name=""/>
+        <p:cNvGrpSpPr/>
+        <p:nvPr/>
+      </p:nvGrpSpPr>
+      <p:grpSpPr>
+        <a:xfrm>
+          <a:off x="0" y="0"/>
+          <a:ext cx="0" cy="0"/>
+          <a:chOff x="0" y="0"/>
+          <a:chExt cx="0" cy="0"/>
+        </a:xfrm>
+      </p:grpSpPr>
+      <p:sp>
+        <p:nvSpPr>
+          <p:cNvPr id="2" name="Text 0"/>
+          <p:cNvSpPr/>
+          <p:nvPr/>
+        </p:nvSpPr>
+        <p:spPr>
+          <a:xfrm>
+            <a:off x="0" y="0"/>
+            <a:ext cx="9144000" cy="101501"/>
+          </a:xfrm>
+          <a:prstGeom prst="rect">
+            <a:avLst/>
+          </a:prstGeom>
+          <a:solidFill>
+            <a:srgbClr val="277884"/>
+          </a:solidFill>
+          <a:ln/>
+        </p:spPr>
+        <p:txBody>
+          <a:bodyPr wrap="square" rtlCol="0" anchor="ctr"/>
+          <a:lstStyle/>
+          <a:p>
+            <a:pPr indent="0" marL="0">
+              <a:buNone/>
+            </a:pPr>
+            <a:endParaRPr lang="en-US" dirty="0"/>
+          </a:p>
+        </p:txBody>
+      </p:sp>
+      <p:sp>
+        <p:nvSpPr>
+          <p:cNvPr id="3" name="Text 1"/>
+          <p:cNvSpPr/>
+          <p:nvPr/>
+        </p:nvSpPr>
+        <p:spPr>
+          <a:xfrm>
+            <a:off x="406301" y="457051"/>
+            <a:ext cx="8498026" cy="274290"/>
+          </a:xfrm>
+          <a:prstGeom prst="rect">
+            <a:avLst/>
+          </a:prstGeom>
+          <a:noFill/>
+          <a:ln/>
+        </p:spPr>
+        <p:txBody>
+          <a:bodyPr wrap="square" lIns="0" tIns="0" rIns="0" bIns="0" rtlCol="0" anchor="t"/>
+          <a:lstStyle/>
+          <a:p>
+            <a:pPr algn="l" indent="0" marL="0">
+              <a:lnSpc>
+                <a:spcPts val="2160"/>
+              </a:lnSpc>
+              <a:spcBef>
+                <a:spcPts val="600"/>
+              </a:spcBef>
+              <a:spcAft>
+                <a:spcPts val="800"/>
+              </a:spcAft>
+              <a:buNone/>
+            </a:pPr>
+            <a:r>
+              <a:rPr lang="en-US" sz="1800" b="1" dirty="0">
+                <a:solidFill>
+                  <a:srgbClr val="FE4447"/>
+                </a:solidFill>
+                <a:latin typeface="Georgia" pitchFamily="34" charset="0"/>
+                <a:ea typeface="Georgia" pitchFamily="34" charset="-122"/>
+                <a:cs typeface="Georgia" pitchFamily="34" charset="-120"/>
+              </a:rPr>
+              <a:t>Differentiation</a:t>
+            </a:r>
+            <a:endParaRPr lang="en-US" sz="1800" dirty="0"/>
+          </a:p>
+        </p:txBody>
+      </p:sp>
+      <p:sp>
+        <p:nvSpPr>
+          <p:cNvPr id="4" name="Text 2"/>
+          <p:cNvSpPr/>
+          <p:nvPr/>
+        </p:nvSpPr>
+        <p:spPr>
+          <a:xfrm>
+            <a:off x="634901" y="883593"/>
+            <a:ext cx="8102798" cy="525661"/>
+          </a:xfrm>
+          <a:prstGeom prst="rect">
+            <a:avLst/>
+          </a:prstGeom>
+          <a:noFill/>
+          <a:ln/>
+        </p:spPr>
+        <p:txBody>
+          <a:bodyPr wrap="square" lIns="0" tIns="0" rIns="0" bIns="0" rtlCol="0" anchor="t"/>
+          <a:lstStyle/>
+          <a:p>
+            <a:pPr algn="l" marL="342900" indent="-342900">
+              <a:lnSpc>
+                <a:spcPts val="1620"/>
+              </a:lnSpc>
+              <a:spcAft>
+                <a:spcPts val="300"/>
+              </a:spcAft>
+              <a:buSzPct val="100000"/>
+              <a:buChar char="•"/>
+            </a:pPr>
+            <a:r>
+              <a:rPr lang="en-US" sz="1200" b="1" dirty="0">
+                <a:solidFill>
+                  <a:srgbClr val="1C2833"/>
+                </a:solidFill>
+                <a:latin typeface="Arial" pitchFamily="34" charset="0"/>
+                <a:ea typeface="Arial" pitchFamily="34" charset="-122"/>
+                <a:cs typeface="Arial" pitchFamily="34" charset="-120"/>
+              </a:rPr>
+              <a:t>Tier up:</a:t>
+            </a:r>
+            <a:pPr algn="l" indent="0" marL="0">
+              <a:lnSpc>
+                <a:spcPts val="1620"/>
+              </a:lnSpc>
+              <a:spcAft>
+                <a:spcPts val="300"/>
+              </a:spcAft>
+              <a:buNone/>
+            </a:pPr>
+            <a:r>
+              <a:rPr lang="en-US" sz="1200" dirty="0">
+                <a:solidFill>
+                  <a:srgbClr val="1C2833"/>
+                </a:solidFill>
+                <a:latin typeface="Arial" pitchFamily="34" charset="0"/>
+                <a:ea typeface="Arial" pitchFamily="34" charset="-122"/>
+                <a:cs typeface="Arial" pitchFamily="34" charset="-120"/>
+              </a:rPr>
+              <a:t> Complement of 5-digit numbers to 100 000. Time goal: under 6 sec each.</a:t>
+            </a:r>
+            <a:endParaRPr lang="en-US" sz="1200" dirty="0"/>
+          </a:p>
+          <a:p>
+            <a:pPr algn="l" marL="342900" indent="-342900">
+              <a:lnSpc>
+                <a:spcPts val="1620"/>
+              </a:lnSpc>
+              <a:spcAft>
+                <a:spcPts val="300"/>
+              </a:spcAft>
+              <a:buSzPct val="100000"/>
+              <a:buChar char="•"/>
+            </a:pPr>
+            <a:r>
+              <a:rPr lang="en-US" sz="1200" b="1" dirty="0">
+                <a:solidFill>
+                  <a:srgbClr val="1C2833"/>
+                </a:solidFill>
+                <a:latin typeface="Arial" pitchFamily="34" charset="0"/>
+                <a:ea typeface="Arial" pitchFamily="34" charset="-122"/>
+                <a:cs typeface="Arial" pitchFamily="34" charset="-120"/>
+              </a:rPr>
+              <a:t>Tier down:</a:t>
+            </a:r>
+            <a:pPr algn="l" indent="0" marL="0">
+              <a:lnSpc>
+                <a:spcPts val="1620"/>
+              </a:lnSpc>
+              <a:spcAft>
+                <a:spcPts val="300"/>
+              </a:spcAft>
+              <a:buNone/>
+            </a:pPr>
+            <a:r>
+              <a:rPr lang="en-US" sz="1200" dirty="0">
+                <a:solidFill>
+                  <a:srgbClr val="1C2833"/>
+                </a:solidFill>
+                <a:latin typeface="Arial" pitchFamily="34" charset="0"/>
+                <a:ea typeface="Arial" pitchFamily="34" charset="-122"/>
+                <a:cs typeface="Arial" pitchFamily="34" charset="-120"/>
+              </a:rPr>
+              <a:t> Stay on 3-digit complements. The four-digit and five-digit cases come naturally once 3-digit is automatic.</a:t>
+            </a:r>
+            <a:endParaRPr lang="en-US" sz="1200" dirty="0"/>
+          </a:p>
+        </p:txBody>
+      </p:sp>
+      <p:sp>
+        <p:nvSpPr>
+          <p:cNvPr id="5" name="Text 3"/>
+          <p:cNvSpPr/>
+          <p:nvPr/>
+        </p:nvSpPr>
+        <p:spPr>
+          <a:xfrm>
+            <a:off x="406301" y="4434929"/>
+            <a:ext cx="8498026" cy="213271"/>
+          </a:xfrm>
+          <a:prstGeom prst="rect">
+            <a:avLst/>
+          </a:prstGeom>
+          <a:noFill/>
+          <a:ln/>
+        </p:spPr>
+        <p:txBody>
+          <a:bodyPr wrap="square" lIns="0" tIns="0" rIns="0" bIns="0" rtlCol="0" anchor="t"/>
+          <a:lstStyle/>
+          <a:p>
+            <a:pPr algn="l" indent="0" marL="0">
+              <a:lnSpc>
+                <a:spcPts val="1680"/>
+              </a:lnSpc>
+              <a:spcBef>
+                <a:spcPts val="300"/>
+              </a:spcBef>
+              <a:spcAft>
+                <a:spcPts val="300"/>
+              </a:spcAft>
+              <a:buNone/>
+            </a:pPr>
+            <a:r>
+              <a:rPr lang="en-US" sz="1200" dirty="0">
+                <a:solidFill>
+                  <a:srgbClr val="1C2833"/>
+                </a:solidFill>
+                <a:latin typeface="Arial" pitchFamily="34" charset="0"/>
+                <a:ea typeface="Arial" pitchFamily="34" charset="-122"/>
+                <a:cs typeface="Arial" pitchFamily="34" charset="-120"/>
+              </a:rPr>
+              <a:t>Middle ·  · IKS Curriculum</a:t>
+            </a:r>
+            <a:endParaRPr lang="en-US" sz="1200" dirty="0"/>
+          </a:p>
+        </p:txBody>
+      </p:sp>
+    </p:spTree>
+  </p:cSld>
+  <p:clrMapOvr>
+    <a:masterClrMapping/>
+  </p:clrMapOvr>
+</p:sld>
+</file>
+
+<file path=ppt/slides/slide17.xml><?xml version="1.0" encoding="utf-8"?>
+<p:sld xmlns:a="http://schemas.openxmlformats.org/drawingml/2006/main" xmlns:r="http://schemas.openxmlformats.org/officeDocument/2006/relationships" xmlns:p="http://schemas.openxmlformats.org/presentationml/2006/main">
+  <p:cSld name="Slide 17">
+    <p:bg>
+      <p:bgPr>
+        <a:solidFill>
+          <a:srgbClr val="FFFFFF"/>
+        </a:solidFill>
+      </p:bgPr>
+    </p:bg>
+    <p:spTree>
+      <p:nvGrpSpPr>
+        <p:cNvPr id="1" name=""/>
+        <p:cNvGrpSpPr/>
+        <p:nvPr/>
+      </p:nvGrpSpPr>
+      <p:grpSpPr>
+        <a:xfrm>
+          <a:off x="0" y="0"/>
+          <a:ext cx="0" cy="0"/>
+          <a:chOff x="0" y="0"/>
+          <a:chExt cx="0" cy="0"/>
+        </a:xfrm>
+      </p:grpSpPr>
+      <p:sp>
+        <p:nvSpPr>
+          <p:cNvPr id="2" name="Text 0"/>
+          <p:cNvSpPr/>
+          <p:nvPr/>
+        </p:nvSpPr>
+        <p:spPr>
+          <a:xfrm>
+            <a:off x="0" y="0"/>
+            <a:ext cx="9144000" cy="101501"/>
+          </a:xfrm>
+          <a:prstGeom prst="rect">
+            <a:avLst/>
+          </a:prstGeom>
+          <a:solidFill>
+            <a:srgbClr val="277884"/>
+          </a:solidFill>
+          <a:ln/>
+        </p:spPr>
+        <p:txBody>
+          <a:bodyPr wrap="square" rtlCol="0" anchor="ctr"/>
+          <a:lstStyle/>
+          <a:p>
+            <a:pPr indent="0" marL="0">
+              <a:buNone/>
+            </a:pPr>
+            <a:endParaRPr lang="en-US" dirty="0"/>
+          </a:p>
+        </p:txBody>
+      </p:sp>
+      <p:sp>
+        <p:nvSpPr>
+          <p:cNvPr id="3" name="Text 1"/>
+          <p:cNvSpPr/>
+          <p:nvPr/>
+        </p:nvSpPr>
+        <p:spPr>
+          <a:xfrm>
+            <a:off x="406301" y="457051"/>
+            <a:ext cx="8498026" cy="274290"/>
+          </a:xfrm>
+          <a:prstGeom prst="rect">
+            <a:avLst/>
+          </a:prstGeom>
+          <a:noFill/>
+          <a:ln/>
+        </p:spPr>
+        <p:txBody>
+          <a:bodyPr wrap="square" lIns="0" tIns="0" rIns="0" bIns="0" rtlCol="0" anchor="t"/>
+          <a:lstStyle/>
+          <a:p>
+            <a:pPr algn="l" indent="0" marL="0">
+              <a:lnSpc>
+                <a:spcPts val="2160"/>
+              </a:lnSpc>
+              <a:spcBef>
+                <a:spcPts val="600"/>
+              </a:spcBef>
+              <a:spcAft>
+                <a:spcPts val="800"/>
+              </a:spcAft>
+              <a:buNone/>
+            </a:pPr>
+            <a:r>
+              <a:rPr lang="en-US" sz="1800" b="1" dirty="0">
+                <a:solidFill>
+                  <a:srgbClr val="FE4447"/>
+                </a:solidFill>
+                <a:latin typeface="Georgia" pitchFamily="34" charset="0"/>
+                <a:ea typeface="Georgia" pitchFamily="34" charset="-122"/>
+                <a:cs typeface="Georgia" pitchFamily="34" charset="-120"/>
+              </a:rPr>
+              <a:t>Teacher notes</a:t>
+            </a:r>
+            <a:endParaRPr lang="en-US" sz="1800" dirty="0"/>
+          </a:p>
+        </p:txBody>
+      </p:sp>
+      <p:sp>
+        <p:nvSpPr>
+          <p:cNvPr id="4" name="Text 2"/>
+          <p:cNvSpPr/>
+          <p:nvPr/>
+        </p:nvSpPr>
+        <p:spPr>
+          <a:xfrm>
+            <a:off x="634901" y="883593"/>
+            <a:ext cx="8102798" cy="1797844"/>
+          </a:xfrm>
+          <a:prstGeom prst="rect">
+            <a:avLst/>
+          </a:prstGeom>
+          <a:noFill/>
+          <a:ln/>
+        </p:spPr>
+        <p:txBody>
+          <a:bodyPr wrap="square" lIns="0" tIns="0" rIns="0" bIns="0" rtlCol="0" anchor="t"/>
+          <a:lstStyle/>
+          <a:p>
+            <a:pPr algn="l" marL="342900" indent="-342900">
+              <a:lnSpc>
+                <a:spcPts val="1620"/>
+              </a:lnSpc>
+              <a:spcAft>
+                <a:spcPts val="300"/>
+              </a:spcAft>
+              <a:buSzPct val="100000"/>
+              <a:buChar char="•"/>
+            </a:pPr>
+            <a:r>
+              <a:rPr lang="en-US" sz="1200" dirty="0">
+                <a:solidFill>
+                  <a:srgbClr val="1C2833"/>
+                </a:solidFill>
+                <a:latin typeface="Arial" pitchFamily="34" charset="0"/>
+                <a:ea typeface="Arial" pitchFamily="34" charset="-122"/>
+                <a:cs typeface="Arial" pitchFamily="34" charset="-120"/>
+              </a:rPr>
+              <a:t>The most common error: a number like 64 has only two digits; students forget the rule wants a 3-digit number, so they apply the rule to "64" (giving 36) instead of "064" (giving 936). Make sure they "pad with zeros" mentally.</a:t>
+            </a:r>
+            <a:endParaRPr lang="en-US" sz="1200" dirty="0"/>
+          </a:p>
+          <a:p>
+            <a:pPr algn="l" marL="342900" indent="-342900">
+              <a:lnSpc>
+                <a:spcPts val="1620"/>
+              </a:lnSpc>
+              <a:spcAft>
+                <a:spcPts val="300"/>
+              </a:spcAft>
+              <a:buSzPct val="100000"/>
+              <a:buChar char="•"/>
+            </a:pPr>
+            <a:r>
+              <a:rPr lang="en-US" sz="1200" dirty="0">
+                <a:solidFill>
+                  <a:srgbClr val="1C2833"/>
+                </a:solidFill>
+                <a:latin typeface="Arial" pitchFamily="34" charset="0"/>
+                <a:ea typeface="Arial" pitchFamily="34" charset="-122"/>
+                <a:cs typeface="Arial" pitchFamily="34" charset="-120"/>
+              </a:rPr>
+              <a:t>Another common error: the last digit being 0. For 800 → complement to 1000: digit-wise gives 9-8, 9-0, 10-0 = 1, 9, 10. The "10" carries. Easier reading: 800 + 200 = 1000, so complement is 200. The rule still works (1, 9, 10 → 1, 10, 0 → 200), but it's a place where the padding/carry interacts. Use this as a teachable moment; preview Day 6's algebraic justification.</a:t>
+            </a:r>
+            <a:endParaRPr lang="en-US" sz="1200" dirty="0"/>
+          </a:p>
+          <a:p>
+            <a:pPr algn="l" marL="342900" indent="-342900">
+              <a:lnSpc>
+                <a:spcPts val="1620"/>
+              </a:lnSpc>
+              <a:spcAft>
+                <a:spcPts val="300"/>
+              </a:spcAft>
+              <a:buSzPct val="100000"/>
+              <a:buChar char="•"/>
+            </a:pPr>
+            <a:r>
+              <a:rPr lang="en-US" sz="1200" dirty="0">
+                <a:solidFill>
+                  <a:srgbClr val="1C2833"/>
+                </a:solidFill>
+                <a:latin typeface="Arial" pitchFamily="34" charset="0"/>
+                <a:ea typeface="Arial" pitchFamily="34" charset="-122"/>
+                <a:cs typeface="Arial" pitchFamily="34" charset="-120"/>
+              </a:rPr>
+              <a:t>Some students will sniff out a shortcut: "the complement just makes everything add to 9 except the last column which adds to 10." Great — that </a:t>
+            </a:r>
+            <a:pPr algn="l" indent="0" marL="0">
+              <a:lnSpc>
+                <a:spcPts val="1620"/>
+              </a:lnSpc>
+              <a:spcAft>
+                <a:spcPts val="300"/>
+              </a:spcAft>
+              <a:buNone/>
+            </a:pPr>
+            <a:r>
               <a:rPr lang="en-US" sz="1200" i="1" dirty="0">
                 <a:solidFill>
                   <a:srgbClr val="1C2833"/>
@@ -3295,6 +5289,294 @@
                 <a:ea typeface="Arial" pitchFamily="34" charset="-122"/>
                 <a:cs typeface="Arial" pitchFamily="34" charset="-120"/>
               </a:rPr>
+              <a:t>is</a:t>
+            </a:r>
+            <a:pPr algn="l" indent="0" marL="0">
+              <a:lnSpc>
+                <a:spcPts val="1620"/>
+              </a:lnSpc>
+              <a:spcAft>
+                <a:spcPts val="300"/>
+              </a:spcAft>
+              <a:buNone/>
+            </a:pPr>
+            <a:r>
+              <a:rPr lang="en-US" sz="1200" dirty="0">
+                <a:solidFill>
+                  <a:srgbClr val="1C2833"/>
+                </a:solidFill>
+                <a:latin typeface="Arial" pitchFamily="34" charset="0"/>
+                <a:ea typeface="Arial" pitchFamily="34" charset="-122"/>
+                <a:cs typeface="Arial" pitchFamily="34" charset="-120"/>
+              </a:rPr>
+              <a:t> the rule, restated. Praise.</a:t>
+            </a:r>
+            <a:endParaRPr lang="en-US" sz="1200" dirty="0"/>
+          </a:p>
+        </p:txBody>
+      </p:sp>
+      <p:sp>
+        <p:nvSpPr>
+          <p:cNvPr id="5" name="Text 3"/>
+          <p:cNvSpPr/>
+          <p:nvPr/>
+        </p:nvSpPr>
+        <p:spPr>
+          <a:xfrm>
+            <a:off x="406301" y="4434929"/>
+            <a:ext cx="8498026" cy="213271"/>
+          </a:xfrm>
+          <a:prstGeom prst="rect">
+            <a:avLst/>
+          </a:prstGeom>
+          <a:noFill/>
+          <a:ln/>
+        </p:spPr>
+        <p:txBody>
+          <a:bodyPr wrap="square" lIns="0" tIns="0" rIns="0" bIns="0" rtlCol="0" anchor="t"/>
+          <a:lstStyle/>
+          <a:p>
+            <a:pPr algn="l" indent="0" marL="0">
+              <a:lnSpc>
+                <a:spcPts val="1680"/>
+              </a:lnSpc>
+              <a:spcBef>
+                <a:spcPts val="300"/>
+              </a:spcBef>
+              <a:spcAft>
+                <a:spcPts val="300"/>
+              </a:spcAft>
+              <a:buNone/>
+            </a:pPr>
+            <a:r>
+              <a:rPr lang="en-US" sz="1200" dirty="0">
+                <a:solidFill>
+                  <a:srgbClr val="1C2833"/>
+                </a:solidFill>
+                <a:latin typeface="Arial" pitchFamily="34" charset="0"/>
+                <a:ea typeface="Arial" pitchFamily="34" charset="-122"/>
+                <a:cs typeface="Arial" pitchFamily="34" charset="-120"/>
+              </a:rPr>
+              <a:t>Middle ·  · IKS Curriculum</a:t>
+            </a:r>
+            <a:endParaRPr lang="en-US" sz="1200" dirty="0"/>
+          </a:p>
+        </p:txBody>
+      </p:sp>
+    </p:spTree>
+  </p:cSld>
+  <p:clrMapOvr>
+    <a:masterClrMapping/>
+  </p:clrMapOvr>
+</p:sld>
+</file>
+
+<file path=ppt/slides/slide18.xml><?xml version="1.0" encoding="utf-8"?>
+<p:sld xmlns:a="http://schemas.openxmlformats.org/drawingml/2006/main" xmlns:r="http://schemas.openxmlformats.org/officeDocument/2006/relationships" xmlns:p="http://schemas.openxmlformats.org/presentationml/2006/main">
+  <p:cSld name="Slide 18">
+    <p:bg>
+      <p:bgPr>
+        <a:solidFill>
+          <a:srgbClr val="FFFFFF"/>
+        </a:solidFill>
+      </p:bgPr>
+    </p:bg>
+    <p:spTree>
+      <p:nvGrpSpPr>
+        <p:cNvPr id="1" name=""/>
+        <p:cNvGrpSpPr/>
+        <p:nvPr/>
+      </p:nvGrpSpPr>
+      <p:grpSpPr>
+        <a:xfrm>
+          <a:off x="0" y="0"/>
+          <a:ext cx="0" cy="0"/>
+          <a:chOff x="0" y="0"/>
+          <a:chExt cx="0" cy="0"/>
+        </a:xfrm>
+      </p:grpSpPr>
+      <p:sp>
+        <p:nvSpPr>
+          <p:cNvPr id="2" name="Text 0"/>
+          <p:cNvSpPr/>
+          <p:nvPr/>
+        </p:nvSpPr>
+        <p:spPr>
+          <a:xfrm>
+            <a:off x="0" y="0"/>
+            <a:ext cx="9144000" cy="101501"/>
+          </a:xfrm>
+          <a:prstGeom prst="rect">
+            <a:avLst/>
+          </a:prstGeom>
+          <a:solidFill>
+            <a:srgbClr val="277884"/>
+          </a:solidFill>
+          <a:ln/>
+        </p:spPr>
+        <p:txBody>
+          <a:bodyPr wrap="square" rtlCol="0" anchor="ctr"/>
+          <a:lstStyle/>
+          <a:p>
+            <a:pPr indent="0" marL="0">
+              <a:buNone/>
+            </a:pPr>
+            <a:endParaRPr lang="en-US" dirty="0"/>
+          </a:p>
+        </p:txBody>
+      </p:sp>
+      <p:sp>
+        <p:nvSpPr>
+          <p:cNvPr id="3" name="Text 1"/>
+          <p:cNvSpPr/>
+          <p:nvPr/>
+        </p:nvSpPr>
+        <p:spPr>
+          <a:xfrm>
+            <a:off x="406301" y="457051"/>
+            <a:ext cx="8498026" cy="274290"/>
+          </a:xfrm>
+          <a:prstGeom prst="rect">
+            <a:avLst/>
+          </a:prstGeom>
+          <a:noFill/>
+          <a:ln/>
+        </p:spPr>
+        <p:txBody>
+          <a:bodyPr wrap="square" lIns="0" tIns="0" rIns="0" bIns="0" rtlCol="0" anchor="t"/>
+          <a:lstStyle/>
+          <a:p>
+            <a:pPr algn="l" indent="0" marL="0">
+              <a:lnSpc>
+                <a:spcPts val="2160"/>
+              </a:lnSpc>
+              <a:spcBef>
+                <a:spcPts val="600"/>
+              </a:spcBef>
+              <a:spcAft>
+                <a:spcPts val="800"/>
+              </a:spcAft>
+              <a:buNone/>
+            </a:pPr>
+            <a:r>
+              <a:rPr lang="en-US" sz="1800" b="1" dirty="0">
+                <a:solidFill>
+                  <a:srgbClr val="FE4447"/>
+                </a:solidFill>
+                <a:latin typeface="Georgia" pitchFamily="34" charset="0"/>
+                <a:ea typeface="Georgia" pitchFamily="34" charset="-122"/>
+                <a:cs typeface="Georgia" pitchFamily="34" charset="-120"/>
+              </a:rPr>
+              <a:t>Citation(s) used in this lesson</a:t>
+            </a:r>
+            <a:endParaRPr lang="en-US" sz="1800" dirty="0"/>
+          </a:p>
+        </p:txBody>
+      </p:sp>
+      <p:sp>
+        <p:nvSpPr>
+          <p:cNvPr id="4" name="Text 2"/>
+          <p:cNvSpPr/>
+          <p:nvPr/>
+        </p:nvSpPr>
+        <p:spPr>
+          <a:xfrm>
+            <a:off x="634901" y="883593"/>
+            <a:ext cx="8102798" cy="525661"/>
+          </a:xfrm>
+          <a:prstGeom prst="rect">
+            <a:avLst/>
+          </a:prstGeom>
+          <a:noFill/>
+          <a:ln/>
+        </p:spPr>
+        <p:txBody>
+          <a:bodyPr wrap="square" lIns="0" tIns="0" rIns="0" bIns="0" rtlCol="0" anchor="t"/>
+          <a:lstStyle/>
+          <a:p>
+            <a:pPr algn="l" marL="342900" indent="-342900">
+              <a:lnSpc>
+                <a:spcPts val="1620"/>
+              </a:lnSpc>
+              <a:spcAft>
+                <a:spcPts val="300"/>
+              </a:spcAft>
+              <a:buSzPct val="100000"/>
+              <a:buChar char="•"/>
+            </a:pPr>
+            <a:r>
+              <a:rPr lang="en-US" sz="1200" dirty="0">
+                <a:solidFill>
+                  <a:srgbClr val="1C2833"/>
+                </a:solidFill>
+                <a:latin typeface="Arial" pitchFamily="34" charset="0"/>
+                <a:ea typeface="Arial" pitchFamily="34" charset="-122"/>
+                <a:cs typeface="Arial" pitchFamily="34" charset="-120"/>
+              </a:rPr>
+              <a:t>Tirthaji, </a:t>
+            </a:r>
+            <a:pPr algn="l" indent="0" marL="0">
+              <a:lnSpc>
+                <a:spcPts val="1620"/>
+              </a:lnSpc>
+              <a:spcAft>
+                <a:spcPts val="300"/>
+              </a:spcAft>
+              <a:buNone/>
+            </a:pPr>
+            <a:r>
+              <a:rPr lang="en-US" sz="1200" i="1" dirty="0">
+                <a:solidFill>
+                  <a:srgbClr val="1C2833"/>
+                </a:solidFill>
+                <a:latin typeface="Arial" pitchFamily="34" charset="0"/>
+                <a:ea typeface="Arial" pitchFamily="34" charset="-122"/>
+                <a:cs typeface="Arial" pitchFamily="34" charset="-120"/>
+              </a:rPr>
+              <a:t>Vedic Mathematics</a:t>
+            </a:r>
+            <a:pPr algn="l" indent="0" marL="0">
+              <a:lnSpc>
+                <a:spcPts val="1620"/>
+              </a:lnSpc>
+              <a:spcAft>
+                <a:spcPts val="300"/>
+              </a:spcAft>
+              <a:buNone/>
+            </a:pPr>
+            <a:r>
+              <a:rPr lang="en-US" sz="1200" dirty="0">
+                <a:solidFill>
+                  <a:srgbClr val="1C2833"/>
+                </a:solidFill>
+                <a:latin typeface="Arial" pitchFamily="34" charset="0"/>
+                <a:ea typeface="Arial" pitchFamily="34" charset="-122"/>
+                <a:cs typeface="Arial" pitchFamily="34" charset="-120"/>
+              </a:rPr>
+              <a:t> (1965), sūtra Nikhilam (#2).</a:t>
+            </a:r>
+            <a:endParaRPr lang="en-US" sz="1200" dirty="0"/>
+          </a:p>
+          <a:p>
+            <a:pPr algn="l" marL="342900" indent="-342900">
+              <a:lnSpc>
+                <a:spcPts val="1620"/>
+              </a:lnSpc>
+              <a:spcAft>
+                <a:spcPts val="300"/>
+              </a:spcAft>
+              <a:buSzPct val="100000"/>
+              <a:buChar char="•"/>
+            </a:pPr>
+            <a:r>
+              <a:rPr lang="en-US" sz="1200" i="1" dirty="0">
+                <a:solidFill>
+                  <a:srgbClr val="1C2833"/>
+                </a:solidFill>
+                <a:latin typeface="Arial" pitchFamily="34" charset="0"/>
+                <a:ea typeface="Arial" pitchFamily="34" charset="-122"/>
+                <a:cs typeface="Arial" pitchFamily="34" charset="-120"/>
+              </a:rPr>
               <a:t>FUNDAMENTAL AND VEDIC MATHEMATICS .pdf</a:t>
             </a:r>
             <a:pPr algn="l" indent="0" marL="0">
@@ -3323,7 +5605,7 @@
       </p:sp>
       <p:sp>
         <p:nvSpPr>
-          <p:cNvPr id="6" name="Text 4"/>
+          <p:cNvPr id="5" name="Text 3"/>
           <p:cNvSpPr/>
           <p:nvPr/>
         </p:nvSpPr>
@@ -3473,7 +5755,7 @@
                 <a:ea typeface="Georgia" pitchFamily="34" charset="-122"/>
                 <a:cs typeface="Georgia" pitchFamily="34" charset="-120"/>
               </a:rPr>
-              <a:t>Materials</a:t>
+              <a:t>Learning objective</a:t>
             </a:r>
             <a:endParaRPr lang="en-US" sz="1800" dirty="0"/>
           </a:p>
@@ -3521,7 +5803,7 @@
                 <a:ea typeface="Arial" pitchFamily="34" charset="-122"/>
                 <a:cs typeface="Arial" pitchFamily="34" charset="-120"/>
               </a:rPr>
-              <a:t>– Whiteboard – Pair-drill sheets (20 three-digit numbers; second set with mixed 3- and 4-digit) – Stopwatch – Calculator (for self-verification only)</a:t>
+              <a:t>By the end of this lesson, students will find the complement of any 3-digit number to 1000 in under 4 seconds, and will recognise the same pattern extends to 10 000, 100 000, and beyond.</a:t>
             </a:r>
             <a:endParaRPr lang="en-US" sz="1200" dirty="0"/>
           </a:p>
@@ -3679,7 +5961,7 @@
                 <a:ea typeface="Georgia" pitchFamily="34" charset="-122"/>
                 <a:cs typeface="Georgia" pitchFamily="34" charset="-120"/>
               </a:rPr>
-              <a:t>Vocabulary</a:t>
+              <a:t>Materials</a:t>
             </a:r>
             <a:endParaRPr lang="en-US" sz="1800" dirty="0"/>
           </a:p>
@@ -3694,7 +5976,7 @@
         <p:spPr>
           <a:xfrm>
             <a:off x="634901" y="883593"/>
-            <a:ext cx="8102798" cy="281880"/>
+            <a:ext cx="8102798" cy="1013222"/>
           </a:xfrm>
           <a:prstGeom prst="rect">
             <a:avLst/>
@@ -3717,24 +5999,28 @@
               <a:buChar char="•"/>
             </a:pPr>
             <a:r>
-              <a:rPr lang="en-US" sz="1200" i="1" dirty="0">
-                <a:solidFill>
-                  <a:srgbClr val="1C2833"/>
-                </a:solidFill>
-                <a:latin typeface="Arial" pitchFamily="34" charset="0"/>
-                <a:ea typeface="Arial" pitchFamily="34" charset="-122"/>
-                <a:cs typeface="Arial" pitchFamily="34" charset="-120"/>
-              </a:rPr>
-              <a:t>pūraka</a:t>
-            </a:r>
-            <a:pPr algn="l" indent="0" marL="0">
+              <a:rPr lang="en-US" sz="1200" dirty="0">
+                <a:solidFill>
+                  <a:srgbClr val="1C2833"/>
+                </a:solidFill>
+                <a:latin typeface="Arial" pitchFamily="34" charset="0"/>
+                <a:ea typeface="Arial" pitchFamily="34" charset="-122"/>
+                <a:cs typeface="Arial" pitchFamily="34" charset="-120"/>
+              </a:rPr>
+              <a:t>Whiteboard</a:t>
+            </a:r>
+            <a:endParaRPr lang="en-US" sz="1200" dirty="0"/>
+          </a:p>
+          <a:p>
+            <a:pPr algn="l" marL="342900" indent="-342900">
               <a:lnSpc>
                 <a:spcPts val="1620"/>
               </a:lnSpc>
               <a:spcAft>
                 <a:spcPts val="300"/>
               </a:spcAft>
-              <a:buNone/>
+              <a:buSzPct val="100000"/>
+              <a:buChar char="•"/>
             </a:pPr>
             <a:r>
               <a:rPr lang="en-US" sz="1200" dirty="0">
@@ -3745,7 +6031,55 @@
                 <a:ea typeface="Arial" pitchFamily="34" charset="-122"/>
                 <a:cs typeface="Arial" pitchFamily="34" charset="-120"/>
               </a:rPr>
-              <a:t> — complement (introduced Day 2; reuse)</a:t>
+              <a:t>Pair-drill sheets (20 three-digit numbers; second set with mixed 3- and 4-digit)</a:t>
+            </a:r>
+            <a:endParaRPr lang="en-US" sz="1200" dirty="0"/>
+          </a:p>
+          <a:p>
+            <a:pPr algn="l" marL="342900" indent="-342900">
+              <a:lnSpc>
+                <a:spcPts val="1620"/>
+              </a:lnSpc>
+              <a:spcAft>
+                <a:spcPts val="300"/>
+              </a:spcAft>
+              <a:buSzPct val="100000"/>
+              <a:buChar char="•"/>
+            </a:pPr>
+            <a:r>
+              <a:rPr lang="en-US" sz="1200" dirty="0">
+                <a:solidFill>
+                  <a:srgbClr val="1C2833"/>
+                </a:solidFill>
+                <a:latin typeface="Arial" pitchFamily="34" charset="0"/>
+                <a:ea typeface="Arial" pitchFamily="34" charset="-122"/>
+                <a:cs typeface="Arial" pitchFamily="34" charset="-120"/>
+              </a:rPr>
+              <a:t>Stopwatch</a:t>
+            </a:r>
+            <a:endParaRPr lang="en-US" sz="1200" dirty="0"/>
+          </a:p>
+          <a:p>
+            <a:pPr algn="l" marL="342900" indent="-342900">
+              <a:lnSpc>
+                <a:spcPts val="1620"/>
+              </a:lnSpc>
+              <a:spcAft>
+                <a:spcPts val="300"/>
+              </a:spcAft>
+              <a:buSzPct val="100000"/>
+              <a:buChar char="•"/>
+            </a:pPr>
+            <a:r>
+              <a:rPr lang="en-US" sz="1200" dirty="0">
+                <a:solidFill>
+                  <a:srgbClr val="1C2833"/>
+                </a:solidFill>
+                <a:latin typeface="Arial" pitchFamily="34" charset="0"/>
+                <a:ea typeface="Arial" pitchFamily="34" charset="-122"/>
+                <a:cs typeface="Arial" pitchFamily="34" charset="-120"/>
+              </a:rPr>
+              <a:t>Calculator (for self-verification only)</a:t>
             </a:r>
             <a:endParaRPr lang="en-US" sz="1200" dirty="0"/>
           </a:p>
@@ -3903,7 +6237,7 @@
                 <a:ea typeface="Georgia" pitchFamily="34" charset="-122"/>
                 <a:cs typeface="Georgia" pitchFamily="34" charset="-120"/>
               </a:rPr>
-              <a:t>Lesson flow</a:t>
+              <a:t>Vocabulary</a:t>
             </a:r>
             <a:endParaRPr lang="en-US" sz="1800" dirty="0"/>
           </a:p>
@@ -3912,6 +6246,72 @@
       <p:sp>
         <p:nvSpPr>
           <p:cNvPr id="4" name="Text 2"/>
+          <p:cNvSpPr/>
+          <p:nvPr/>
+        </p:nvSpPr>
+        <p:spPr>
+          <a:xfrm>
+            <a:off x="634901" y="883593"/>
+            <a:ext cx="8102798" cy="281880"/>
+          </a:xfrm>
+          <a:prstGeom prst="rect">
+            <a:avLst/>
+          </a:prstGeom>
+          <a:noFill/>
+          <a:ln/>
+        </p:spPr>
+        <p:txBody>
+          <a:bodyPr wrap="square" lIns="0" tIns="0" rIns="0" bIns="0" rtlCol="0" anchor="t"/>
+          <a:lstStyle/>
+          <a:p>
+            <a:pPr algn="l" marL="342900" indent="-342900">
+              <a:lnSpc>
+                <a:spcPts val="1620"/>
+              </a:lnSpc>
+              <a:spcAft>
+                <a:spcPts val="300"/>
+              </a:spcAft>
+              <a:buSzPct val="100000"/>
+              <a:buChar char="•"/>
+            </a:pPr>
+            <a:r>
+              <a:rPr lang="en-US" sz="1200" i="1" dirty="0">
+                <a:solidFill>
+                  <a:srgbClr val="1C2833"/>
+                </a:solidFill>
+                <a:latin typeface="Arial" pitchFamily="34" charset="0"/>
+                <a:ea typeface="Arial" pitchFamily="34" charset="-122"/>
+                <a:cs typeface="Arial" pitchFamily="34" charset="-120"/>
+              </a:rPr>
+              <a:t>pūraka</a:t>
+            </a:r>
+            <a:pPr algn="l" indent="0" marL="0">
+              <a:lnSpc>
+                <a:spcPts val="1620"/>
+              </a:lnSpc>
+              <a:spcAft>
+                <a:spcPts val="300"/>
+              </a:spcAft>
+              <a:buNone/>
+            </a:pPr>
+            <a:r>
+              <a:rPr lang="en-US" sz="1200" dirty="0">
+                <a:solidFill>
+                  <a:srgbClr val="1C2833"/>
+                </a:solidFill>
+                <a:latin typeface="Arial" pitchFamily="34" charset="0"/>
+                <a:ea typeface="Arial" pitchFamily="34" charset="-122"/>
+                <a:cs typeface="Arial" pitchFamily="34" charset="-120"/>
+              </a:rPr>
+              <a:t> — complement (introduced Day 2; reuse)</a:t>
+            </a:r>
+            <a:endParaRPr lang="en-US" sz="1200" dirty="0"/>
+          </a:p>
+        </p:txBody>
+      </p:sp>
+      <p:sp>
+        <p:nvSpPr>
+          <p:cNvPr id="5" name="Text 3"/>
           <p:cNvSpPr/>
           <p:nvPr/>
         </p:nvSpPr>
@@ -4061,7 +6461,7 @@
                 <a:ea typeface="Georgia" pitchFamily="34" charset="-122"/>
                 <a:cs typeface="Georgia" pitchFamily="34" charset="-120"/>
               </a:rPr>
-              <a:t>Warm-up (5 min)</a:t>
+              <a:t>Lesson flow</a:t>
             </a:r>
             <a:endParaRPr lang="en-US" sz="1800" dirty="0"/>
           </a:p>
@@ -4070,54 +6470,6 @@
       <p:sp>
         <p:nvSpPr>
           <p:cNvPr id="4" name="Text 2"/>
-          <p:cNvSpPr/>
-          <p:nvPr/>
-        </p:nvSpPr>
-        <p:spPr>
-          <a:xfrm>
-            <a:off x="406301" y="870942"/>
-            <a:ext cx="8498026" cy="426541"/>
-          </a:xfrm>
-          <a:prstGeom prst="rect">
-            <a:avLst/>
-          </a:prstGeom>
-          <a:noFill/>
-          <a:ln/>
-        </p:spPr>
-        <p:txBody>
-          <a:bodyPr wrap="square" lIns="0" tIns="0" rIns="0" bIns="0" rtlCol="0" anchor="t"/>
-          <a:lstStyle/>
-          <a:p>
-            <a:pPr algn="l" indent="0" marL="0">
-              <a:lnSpc>
-                <a:spcPts val="1680"/>
-              </a:lnSpc>
-              <a:spcBef>
-                <a:spcPts val="300"/>
-              </a:spcBef>
-              <a:spcAft>
-                <a:spcPts val="300"/>
-              </a:spcAft>
-              <a:buNone/>
-            </a:pPr>
-            <a:r>
-              <a:rPr lang="en-US" sz="1200" dirty="0">
-                <a:solidFill>
-                  <a:srgbClr val="1C2833"/>
-                </a:solidFill>
-                <a:latin typeface="Arial" pitchFamily="34" charset="0"/>
-                <a:ea typeface="Arial" pitchFamily="34" charset="-122"/>
-                <a:cs typeface="Arial" pitchFamily="34" charset="-120"/>
-              </a:rPr>
-              <a:t>– Sūtra chant 3 times. – Quick fire: teacher calls 2-digit numbers; students chorus the complement to 100.   – 73 → 27, 41 → 59, 28 → 72, 86 → 14, 95 → 05, 60 → 40, 17 → 83.</a:t>
-            </a:r>
-            <a:endParaRPr lang="en-US" sz="1200" dirty="0"/>
-          </a:p>
-        </p:txBody>
-      </p:sp>
-      <p:sp>
-        <p:nvSpPr>
-          <p:cNvPr id="5" name="Text 3"/>
           <p:cNvSpPr/>
           <p:nvPr/>
         </p:nvSpPr>
@@ -4267,7 +6619,7 @@
                 <a:ea typeface="Georgia" pitchFamily="34" charset="-122"/>
                 <a:cs typeface="Georgia" pitchFamily="34" charset="-120"/>
               </a:rPr>
-              <a:t>Core (15 min) — Three digits, same rule</a:t>
+              <a:t>Warm-up (5 min)</a:t>
             </a:r>
             <a:endParaRPr lang="en-US" sz="1800" dirty="0"/>
           </a:p>
@@ -4282,7 +6634,7 @@
         <p:spPr>
           <a:xfrm>
             <a:off x="634901" y="883593"/>
-            <a:ext cx="8102798" cy="525661"/>
+            <a:ext cx="8102798" cy="769441"/>
           </a:xfrm>
           <a:prstGeom prst="rect">
             <a:avLst/>
@@ -4305,26 +6657,6 @@
               <a:buChar char="•"/>
             </a:pPr>
             <a:r>
-              <a:rPr lang="en-US" sz="1200" b="1" dirty="0">
-                <a:solidFill>
-                  <a:srgbClr val="1C2833"/>
-                </a:solidFill>
-                <a:latin typeface="Arial" pitchFamily="34" charset="0"/>
-                <a:ea typeface="Arial" pitchFamily="34" charset="-122"/>
-                <a:cs typeface="Arial" pitchFamily="34" charset="-120"/>
-              </a:rPr>
-              <a:t>Pose:</a:t>
-            </a:r>
-            <a:pPr algn="l" indent="0" marL="0">
-              <a:lnSpc>
-                <a:spcPts val="1620"/>
-              </a:lnSpc>
-              <a:spcAft>
-                <a:spcPts val="300"/>
-              </a:spcAft>
-              <a:buNone/>
-            </a:pPr>
-            <a:r>
               <a:rPr lang="en-US" sz="1200" dirty="0">
                 <a:solidFill>
                   <a:srgbClr val="1C2833"/>
@@ -4333,27 +6665,7 @@
                 <a:ea typeface="Arial" pitchFamily="34" charset="-122"/>
                 <a:cs typeface="Arial" pitchFamily="34" charset="-120"/>
               </a:rPr>
-              <a:t> </a:t>
-            </a:r>
-            <a:pPr algn="l" indent="0" marL="0">
-              <a:lnSpc>
-                <a:spcPts val="1620"/>
-              </a:lnSpc>
-              <a:spcAft>
-                <a:spcPts val="300"/>
-              </a:spcAft>
-              <a:buNone/>
-            </a:pPr>
-            <a:r>
-              <a:rPr lang="en-US" sz="1200" i="1" dirty="0">
-                <a:solidFill>
-                  <a:srgbClr val="1C2833"/>
-                </a:solidFill>
-                <a:latin typeface="Arial" pitchFamily="34" charset="0"/>
-                <a:ea typeface="Arial" pitchFamily="34" charset="-122"/>
-                <a:cs typeface="Arial" pitchFamily="34" charset="-120"/>
-              </a:rPr>
-              <a:t>"What's the complement of 738 to 1000?"</a:t>
+              <a:t>Sūtra chant 3 times.</a:t>
             </a:r>
             <a:endParaRPr lang="en-US" sz="1200" dirty="0"/>
           </a:p>
@@ -4377,443 +6689,10 @@
                 <a:ea typeface="Arial" pitchFamily="34" charset="-122"/>
                 <a:cs typeface="Arial" pitchFamily="34" charset="-120"/>
               </a:rPr>
-              <a:t>Walk through:</a:t>
+              <a:t>Quick fire: teacher calls 2-digit numbers; students chorus the complement to 100.</a:t>
             </a:r>
             <a:endParaRPr lang="en-US" sz="1200" dirty="0"/>
           </a:p>
-        </p:txBody>
-      </p:sp>
-      <p:sp>
-        <p:nvSpPr>
-          <p:cNvPr id="5" name="Text 3"/>
-          <p:cNvSpPr/>
-          <p:nvPr/>
-        </p:nvSpPr>
-        <p:spPr>
-          <a:xfrm>
-            <a:off x="406301" y="1510754"/>
-            <a:ext cx="8331398" cy="777627"/>
-          </a:xfrm>
-          <a:prstGeom prst="rect">
-            <a:avLst/>
-          </a:prstGeom>
-          <a:solidFill>
-            <a:srgbClr val="F4F8F9"/>
-          </a:solidFill>
-          <a:ln/>
-        </p:spPr>
-        <p:txBody>
-          <a:bodyPr wrap="square" rtlCol="0" anchor="ctr"/>
-          <a:lstStyle/>
-          <a:p>
-            <a:pPr indent="0" marL="0">
-              <a:buNone/>
-            </a:pPr>
-            <a:endParaRPr lang="en-US" dirty="0"/>
-          </a:p>
-        </p:txBody>
-      </p:sp>
-      <p:sp>
-        <p:nvSpPr>
-          <p:cNvPr id="6" name="Shape 4"/>
-          <p:cNvSpPr/>
-          <p:nvPr/>
-        </p:nvSpPr>
-        <p:spPr>
-          <a:xfrm>
-            <a:off x="430113" y="1510754"/>
-            <a:ext cx="0" cy="777627"/>
-          </a:xfrm>
-          <a:prstGeom prst="line">
-            <a:avLst/>
-          </a:prstGeom>
-          <a:noFill/>
-          <a:ln w="47625">
-            <a:solidFill>
-              <a:srgbClr val="277884"/>
-            </a:solidFill>
-            <a:prstDash val="solid"/>
-          </a:ln>
-        </p:spPr>
-      </p:sp>
-      <p:sp>
-        <p:nvSpPr>
-          <p:cNvPr id="7" name="Text 5"/>
-          <p:cNvSpPr/>
-          <p:nvPr/>
-        </p:nvSpPr>
-        <p:spPr>
-          <a:xfrm>
-            <a:off x="631627" y="1637705"/>
-            <a:ext cx="8086939" cy="174575"/>
-          </a:xfrm>
-          <a:prstGeom prst="rect">
-            <a:avLst/>
-          </a:prstGeom>
-          <a:noFill/>
-          <a:ln/>
-        </p:spPr>
-        <p:txBody>
-          <a:bodyPr wrap="square" lIns="0" tIns="0" rIns="0" bIns="0" rtlCol="0" anchor="t"/>
-          <a:lstStyle/>
-          <a:p>
-            <a:pPr algn="l" indent="0" marL="0">
-              <a:lnSpc>
-                <a:spcPts val="1375"/>
-              </a:lnSpc>
-              <a:buNone/>
-            </a:pPr>
-            <a:r>
-              <a:rPr lang="en-US" sz="1100" dirty="0">
-                <a:solidFill>
-                  <a:srgbClr val="1C2833"/>
-                </a:solidFill>
-                <a:latin typeface="Courier New" pitchFamily="34" charset="0"/>
-                <a:ea typeface="Courier New" pitchFamily="34" charset="-122"/>
-                <a:cs typeface="Courier New" pitchFamily="34" charset="-120"/>
-              </a:rPr>
-              <a:t>1000</a:t>
-            </a:r>
-            <a:endParaRPr lang="en-US" sz="1100" dirty="0"/>
-          </a:p>
-        </p:txBody>
-      </p:sp>
-      <p:sp>
-        <p:nvSpPr>
-          <p:cNvPr id="8" name="Text 6"/>
-          <p:cNvSpPr/>
-          <p:nvPr/>
-        </p:nvSpPr>
-        <p:spPr>
-          <a:xfrm>
-            <a:off x="631627" y="1812280"/>
-            <a:ext cx="8086939" cy="174575"/>
-          </a:xfrm>
-          <a:prstGeom prst="rect">
-            <a:avLst/>
-          </a:prstGeom>
-          <a:noFill/>
-          <a:ln/>
-        </p:spPr>
-        <p:txBody>
-          <a:bodyPr wrap="square" lIns="0" tIns="0" rIns="0" bIns="0" rtlCol="0" anchor="t"/>
-          <a:lstStyle/>
-          <a:p>
-            <a:pPr algn="l" indent="0" marL="0">
-              <a:lnSpc>
-                <a:spcPts val="1375"/>
-              </a:lnSpc>
-              <a:buNone/>
-            </a:pPr>
-            <a:r>
-              <a:rPr lang="en-US" sz="1100" dirty="0">
-                <a:solidFill>
-                  <a:srgbClr val="1C2833"/>
-                </a:solidFill>
-                <a:latin typeface="Courier New" pitchFamily="34" charset="0"/>
-                <a:ea typeface="Courier New" pitchFamily="34" charset="-122"/>
-                <a:cs typeface="Courier New" pitchFamily="34" charset="-120"/>
-              </a:rPr>
-              <a:t>−    738</a:t>
-            </a:r>
-            <a:endParaRPr lang="en-US" sz="1100" dirty="0"/>
-          </a:p>
-        </p:txBody>
-      </p:sp>
-      <p:sp>
-        <p:nvSpPr>
-          <p:cNvPr id="9" name="Text 7"/>
-          <p:cNvSpPr/>
-          <p:nvPr/>
-        </p:nvSpPr>
-        <p:spPr>
-          <a:xfrm>
-            <a:off x="631627" y="1986855"/>
-            <a:ext cx="8086939" cy="174575"/>
-          </a:xfrm>
-          <a:prstGeom prst="rect">
-            <a:avLst/>
-          </a:prstGeom>
-          <a:noFill/>
-          <a:ln/>
-        </p:spPr>
-        <p:txBody>
-          <a:bodyPr wrap="square" lIns="0" tIns="0" rIns="0" bIns="0" rtlCol="0" anchor="t"/>
-          <a:lstStyle/>
-          <a:p>
-            <a:pPr algn="l" indent="0" marL="0">
-              <a:lnSpc>
-                <a:spcPts val="1375"/>
-              </a:lnSpc>
-              <a:buNone/>
-            </a:pPr>
-            <a:r>
-              <a:rPr lang="en-US" sz="1100" dirty="0">
-                <a:solidFill>
-                  <a:srgbClr val="1C2833"/>
-                </a:solidFill>
-                <a:latin typeface="Courier New" pitchFamily="34" charset="0"/>
-                <a:ea typeface="Courier New" pitchFamily="34" charset="-122"/>
-                <a:cs typeface="Courier New" pitchFamily="34" charset="-120"/>
-              </a:rPr>
-              <a:t>————————</a:t>
-            </a:r>
-            <a:endParaRPr lang="en-US" sz="1100" dirty="0"/>
-          </a:p>
-        </p:txBody>
-      </p:sp>
-      <p:sp>
-        <p:nvSpPr>
-          <p:cNvPr id="10" name="Text 8"/>
-          <p:cNvSpPr/>
-          <p:nvPr/>
-        </p:nvSpPr>
-        <p:spPr>
-          <a:xfrm>
-            <a:off x="406301" y="2377232"/>
-            <a:ext cx="8498026" cy="426541"/>
-          </a:xfrm>
-          <a:prstGeom prst="rect">
-            <a:avLst/>
-          </a:prstGeom>
-          <a:noFill/>
-          <a:ln/>
-        </p:spPr>
-        <p:txBody>
-          <a:bodyPr wrap="square" lIns="0" tIns="0" rIns="0" bIns="0" rtlCol="0" anchor="t"/>
-          <a:lstStyle/>
-          <a:p>
-            <a:pPr algn="l" indent="0" marL="0">
-              <a:lnSpc>
-                <a:spcPts val="1680"/>
-              </a:lnSpc>
-              <a:spcBef>
-                <a:spcPts val="300"/>
-              </a:spcBef>
-              <a:spcAft>
-                <a:spcPts val="300"/>
-              </a:spcAft>
-              <a:buNone/>
-            </a:pPr>
-            <a:r>
-              <a:rPr lang="en-US" sz="1200" dirty="0">
-                <a:solidFill>
-                  <a:srgbClr val="1C2833"/>
-                </a:solidFill>
-                <a:latin typeface="Arial" pitchFamily="34" charset="0"/>
-                <a:ea typeface="Arial" pitchFamily="34" charset="-122"/>
-                <a:cs typeface="Arial" pitchFamily="34" charset="-120"/>
-              </a:rPr>
-              <a:t>– First digit (7): 9 − 7 = </a:t>
-            </a:r>
-            <a:pPr algn="l" indent="0" marL="0">
-              <a:lnSpc>
-                <a:spcPts val="1680"/>
-              </a:lnSpc>
-              <a:spcBef>
-                <a:spcPts val="300"/>
-              </a:spcBef>
-              <a:spcAft>
-                <a:spcPts val="300"/>
-              </a:spcAft>
-              <a:buNone/>
-            </a:pPr>
-            <a:r>
-              <a:rPr lang="en-US" sz="1200" b="1" dirty="0">
-                <a:solidFill>
-                  <a:srgbClr val="1C2833"/>
-                </a:solidFill>
-                <a:latin typeface="Arial" pitchFamily="34" charset="0"/>
-                <a:ea typeface="Arial" pitchFamily="34" charset="-122"/>
-                <a:cs typeface="Arial" pitchFamily="34" charset="-120"/>
-              </a:rPr>
-              <a:t>2</a:t>
-            </a:r>
-            <a:pPr algn="l" indent="0" marL="0">
-              <a:lnSpc>
-                <a:spcPts val="1680"/>
-              </a:lnSpc>
-              <a:spcBef>
-                <a:spcPts val="300"/>
-              </a:spcBef>
-              <a:spcAft>
-                <a:spcPts val="300"/>
-              </a:spcAft>
-              <a:buNone/>
-            </a:pPr>
-            <a:r>
-              <a:rPr lang="en-US" sz="1200" dirty="0">
-                <a:solidFill>
-                  <a:srgbClr val="1C2833"/>
-                </a:solidFill>
-                <a:latin typeface="Arial" pitchFamily="34" charset="0"/>
-                <a:ea typeface="Arial" pitchFamily="34" charset="-122"/>
-                <a:cs typeface="Arial" pitchFamily="34" charset="-120"/>
-              </a:rPr>
-              <a:t> – Second digit (3): 9 − 3 = </a:t>
-            </a:r>
-            <a:pPr algn="l" indent="0" marL="0">
-              <a:lnSpc>
-                <a:spcPts val="1680"/>
-              </a:lnSpc>
-              <a:spcBef>
-                <a:spcPts val="300"/>
-              </a:spcBef>
-              <a:spcAft>
-                <a:spcPts val="300"/>
-              </a:spcAft>
-              <a:buNone/>
-            </a:pPr>
-            <a:r>
-              <a:rPr lang="en-US" sz="1200" b="1" dirty="0">
-                <a:solidFill>
-                  <a:srgbClr val="1C2833"/>
-                </a:solidFill>
-                <a:latin typeface="Arial" pitchFamily="34" charset="0"/>
-                <a:ea typeface="Arial" pitchFamily="34" charset="-122"/>
-                <a:cs typeface="Arial" pitchFamily="34" charset="-120"/>
-              </a:rPr>
-              <a:t>6</a:t>
-            </a:r>
-            <a:pPr algn="l" indent="0" marL="0">
-              <a:lnSpc>
-                <a:spcPts val="1680"/>
-              </a:lnSpc>
-              <a:spcBef>
-                <a:spcPts val="300"/>
-              </a:spcBef>
-              <a:spcAft>
-                <a:spcPts val="300"/>
-              </a:spcAft>
-              <a:buNone/>
-            </a:pPr>
-            <a:r>
-              <a:rPr lang="en-US" sz="1200" dirty="0">
-                <a:solidFill>
-                  <a:srgbClr val="1C2833"/>
-                </a:solidFill>
-                <a:latin typeface="Arial" pitchFamily="34" charset="0"/>
-                <a:ea typeface="Arial" pitchFamily="34" charset="-122"/>
-                <a:cs typeface="Arial" pitchFamily="34" charset="-120"/>
-              </a:rPr>
-              <a:t> – Last digit (8): 10 − 8 = </a:t>
-            </a:r>
-            <a:pPr algn="l" indent="0" marL="0">
-              <a:lnSpc>
-                <a:spcPts val="1680"/>
-              </a:lnSpc>
-              <a:spcBef>
-                <a:spcPts val="300"/>
-              </a:spcBef>
-              <a:spcAft>
-                <a:spcPts val="300"/>
-              </a:spcAft>
-              <a:buNone/>
-            </a:pPr>
-            <a:r>
-              <a:rPr lang="en-US" sz="1200" b="1" dirty="0">
-                <a:solidFill>
-                  <a:srgbClr val="1C2833"/>
-                </a:solidFill>
-                <a:latin typeface="Arial" pitchFamily="34" charset="0"/>
-                <a:ea typeface="Arial" pitchFamily="34" charset="-122"/>
-                <a:cs typeface="Arial" pitchFamily="34" charset="-120"/>
-              </a:rPr>
-              <a:t>2</a:t>
-            </a:r>
-            <a:pPr algn="l" indent="0" marL="0">
-              <a:lnSpc>
-                <a:spcPts val="1680"/>
-              </a:lnSpc>
-              <a:spcBef>
-                <a:spcPts val="300"/>
-              </a:spcBef>
-              <a:spcAft>
-                <a:spcPts val="300"/>
-              </a:spcAft>
-              <a:buNone/>
-            </a:pPr>
-            <a:r>
-              <a:rPr lang="en-US" sz="1200" dirty="0">
-                <a:solidFill>
-                  <a:srgbClr val="1C2833"/>
-                </a:solidFill>
-                <a:latin typeface="Arial" pitchFamily="34" charset="0"/>
-                <a:ea typeface="Arial" pitchFamily="34" charset="-122"/>
-                <a:cs typeface="Arial" pitchFamily="34" charset="-120"/>
-              </a:rPr>
-              <a:t> – Answer: </a:t>
-            </a:r>
-            <a:pPr algn="l" indent="0" marL="0">
-              <a:lnSpc>
-                <a:spcPts val="1680"/>
-              </a:lnSpc>
-              <a:spcBef>
-                <a:spcPts val="300"/>
-              </a:spcBef>
-              <a:spcAft>
-                <a:spcPts val="300"/>
-              </a:spcAft>
-              <a:buNone/>
-            </a:pPr>
-            <a:r>
-              <a:rPr lang="en-US" sz="1200" b="1" dirty="0">
-                <a:solidFill>
-                  <a:srgbClr val="1C2833"/>
-                </a:solidFill>
-                <a:latin typeface="Arial" pitchFamily="34" charset="0"/>
-                <a:ea typeface="Arial" pitchFamily="34" charset="-122"/>
-                <a:cs typeface="Arial" pitchFamily="34" charset="-120"/>
-              </a:rPr>
-              <a:t>262</a:t>
-            </a:r>
-            <a:pPr algn="l" indent="0" marL="0">
-              <a:lnSpc>
-                <a:spcPts val="1680"/>
-              </a:lnSpc>
-              <a:spcBef>
-                <a:spcPts val="300"/>
-              </a:spcBef>
-              <a:spcAft>
-                <a:spcPts val="300"/>
-              </a:spcAft>
-              <a:buNone/>
-            </a:pPr>
-            <a:r>
-              <a:rPr lang="en-US" sz="1200" dirty="0">
-                <a:solidFill>
-                  <a:srgbClr val="1C2833"/>
-                </a:solidFill>
-                <a:latin typeface="Arial" pitchFamily="34" charset="0"/>
-                <a:ea typeface="Arial" pitchFamily="34" charset="-122"/>
-                <a:cs typeface="Arial" pitchFamily="34" charset="-120"/>
-              </a:rPr>
-              <a:t>. – Verify: 738 + 262 = 1000. ✓</a:t>
-            </a:r>
-            <a:endParaRPr lang="en-US" sz="1200" dirty="0"/>
-          </a:p>
-        </p:txBody>
-      </p:sp>
-      <p:sp>
-        <p:nvSpPr>
-          <p:cNvPr id="11" name="Text 9"/>
-          <p:cNvSpPr/>
-          <p:nvPr/>
-        </p:nvSpPr>
-        <p:spPr>
-          <a:xfrm>
-            <a:off x="634901" y="2892623"/>
-            <a:ext cx="8102798" cy="281880"/>
-          </a:xfrm>
-          <a:prstGeom prst="rect">
-            <a:avLst/>
-          </a:prstGeom>
-          <a:noFill/>
-          <a:ln/>
-        </p:spPr>
-        <p:txBody>
-          <a:bodyPr wrap="square" lIns="0" tIns="0" rIns="0" bIns="0" rtlCol="0" anchor="t"/>
-          <a:lstStyle/>
           <a:p>
             <a:pPr algn="l" marL="342900" indent="-342900">
               <a:lnSpc>
@@ -4826,15 +6705,15 @@
               <a:buChar char="•"/>
             </a:pPr>
             <a:r>
-              <a:rPr lang="en-US" sz="1200" i="1" dirty="0">
-                <a:solidFill>
-                  <a:srgbClr val="1C2833"/>
-                </a:solidFill>
-                <a:latin typeface="Arial" pitchFamily="34" charset="0"/>
-                <a:ea typeface="Arial" pitchFamily="34" charset="-122"/>
-                <a:cs typeface="Arial" pitchFamily="34" charset="-120"/>
-              </a:rPr>
-              <a:t>"Notice — same six-word rule. We just have one more 'from 9' step in the middle."</a:t>
+              <a:rPr lang="en-US" sz="1200" dirty="0">
+                <a:solidFill>
+                  <a:srgbClr val="1C2833"/>
+                </a:solidFill>
+                <a:latin typeface="Arial" pitchFamily="34" charset="0"/>
+                <a:ea typeface="Arial" pitchFamily="34" charset="-122"/>
+                <a:cs typeface="Arial" pitchFamily="34" charset="-120"/>
+              </a:rPr>
+              <a:t>73 → 27, 41 → 59, 28 → 72, 86 → 14, 95 → 05, 60 → 40, 17 → 83.</a:t>
             </a:r>
             <a:endParaRPr lang="en-US" sz="1200" dirty="0"/>
           </a:p>
@@ -4842,971 +6721,13 @@
       </p:sp>
       <p:sp>
         <p:nvSpPr>
-          <p:cNvPr id="12" name="Text 10"/>
-          <p:cNvSpPr/>
-          <p:nvPr/>
-        </p:nvSpPr>
-        <p:spPr>
-          <a:xfrm>
-            <a:off x="634901" y="3276005"/>
-            <a:ext cx="8102798" cy="281880"/>
-          </a:xfrm>
-          <a:prstGeom prst="rect">
-            <a:avLst/>
-          </a:prstGeom>
-          <a:noFill/>
-          <a:ln/>
-        </p:spPr>
-        <p:txBody>
-          <a:bodyPr wrap="square" lIns="0" tIns="0" rIns="0" bIns="0" rtlCol="0" anchor="t"/>
-          <a:lstStyle/>
-          <a:p>
-            <a:pPr algn="l" marL="342900" indent="-342900">
-              <a:lnSpc>
-                <a:spcPts val="1620"/>
-              </a:lnSpc>
-              <a:spcAft>
-                <a:spcPts val="300"/>
-              </a:spcAft>
-              <a:buSzPct val="100000"/>
-              <a:buChar char="•"/>
-            </a:pPr>
-            <a:r>
-              <a:rPr lang="en-US" sz="1200" b="1" dirty="0">
-                <a:solidFill>
-                  <a:srgbClr val="1C2833"/>
-                </a:solidFill>
-                <a:latin typeface="Arial" pitchFamily="34" charset="0"/>
-                <a:ea typeface="Arial" pitchFamily="34" charset="-122"/>
-                <a:cs typeface="Arial" pitchFamily="34" charset="-120"/>
-              </a:rPr>
-              <a:t>The general pattern:</a:t>
-            </a:r>
-            <a:endParaRPr lang="en-US" sz="1200" dirty="0"/>
-          </a:p>
-        </p:txBody>
-      </p:sp>
-      <p:sp>
-        <p:nvSpPr>
-          <p:cNvPr id="13" name="Text 11"/>
-          <p:cNvSpPr/>
-          <p:nvPr/>
-        </p:nvSpPr>
-        <p:spPr>
-          <a:xfrm>
-            <a:off x="406301" y="3646736"/>
-            <a:ext cx="8498026" cy="222796"/>
-          </a:xfrm>
-          <a:prstGeom prst="rect">
-            <a:avLst/>
-          </a:prstGeom>
-          <a:noFill/>
-          <a:ln/>
-        </p:spPr>
-        <p:txBody>
-          <a:bodyPr wrap="square" lIns="0" tIns="0" rIns="0" bIns="0" rtlCol="0" anchor="t"/>
-          <a:lstStyle/>
-          <a:p>
-            <a:pPr algn="l" indent="0" marL="0">
-              <a:lnSpc>
-                <a:spcPts val="1680"/>
-              </a:lnSpc>
-              <a:spcBef>
-                <a:spcPts val="300"/>
-              </a:spcBef>
-              <a:spcAft>
-                <a:spcPts val="300"/>
-              </a:spcAft>
-              <a:buNone/>
-            </a:pPr>
-            <a:r>
-              <a:rPr lang="en-US" sz="1200" dirty="0">
-                <a:solidFill>
-                  <a:srgbClr val="1C2833"/>
-                </a:solidFill>
-                <a:latin typeface="Arial" pitchFamily="34" charset="0"/>
-                <a:ea typeface="Arial" pitchFamily="34" charset="-122"/>
-                <a:cs typeface="Arial" pitchFamily="34" charset="-120"/>
-              </a:rPr>
-              <a:t>For an n-digit number, the complement to </a:t>
-            </a:r>
-            <a:pPr algn="l" indent="0" marL="0">
-              <a:lnSpc>
-                <a:spcPts val="1680"/>
-              </a:lnSpc>
-              <a:spcBef>
-                <a:spcPts val="300"/>
-              </a:spcBef>
-              <a:spcAft>
-                <a:spcPts val="300"/>
-              </a:spcAft>
-              <a:buNone/>
-            </a:pPr>
-            <a:r>
-              <a:rPr lang="en-US" sz="1200" dirty="0">
-                <a:solidFill>
-                  <a:srgbClr val="1C2833"/>
-                </a:solidFill>
-                <a:latin typeface="Arial" pitchFamily="34" charset="0"/>
-                <a:ea typeface="Arial" pitchFamily="34" charset="-122"/>
-                <a:cs typeface="Arial" pitchFamily="34" charset="-120"/>
-              </a:rPr>
-              <a:t>10ⁿ</a:t>
-            </a:r>
-            <a:pPr algn="l" indent="0" marL="0">
-              <a:lnSpc>
-                <a:spcPts val="1680"/>
-              </a:lnSpc>
-              <a:spcBef>
-                <a:spcPts val="300"/>
-              </a:spcBef>
-              <a:spcAft>
-                <a:spcPts val="300"/>
-              </a:spcAft>
-              <a:buNone/>
-            </a:pPr>
-            <a:r>
-              <a:rPr lang="en-US" sz="1200" dirty="0">
-                <a:solidFill>
-                  <a:srgbClr val="1C2833"/>
-                </a:solidFill>
-                <a:latin typeface="Arial" pitchFamily="34" charset="0"/>
-                <a:ea typeface="Arial" pitchFamily="34" charset="-122"/>
-                <a:cs typeface="Arial" pitchFamily="34" charset="-120"/>
-              </a:rPr>
-              <a:t> is:</a:t>
-            </a:r>
-            <a:endParaRPr lang="en-US" sz="1200" dirty="0"/>
-          </a:p>
-        </p:txBody>
-      </p:sp>
-      <p:sp>
-        <p:nvSpPr>
-          <p:cNvPr id="14" name="Text 12"/>
-          <p:cNvSpPr/>
-          <p:nvPr/>
-        </p:nvSpPr>
-        <p:spPr>
-          <a:xfrm>
-            <a:off x="406301" y="3958382"/>
-            <a:ext cx="8331398" cy="428476"/>
-          </a:xfrm>
-          <a:prstGeom prst="rect">
-            <a:avLst/>
-          </a:prstGeom>
-          <a:solidFill>
-            <a:srgbClr val="F4F8F9"/>
-          </a:solidFill>
-          <a:ln/>
-        </p:spPr>
-        <p:txBody>
-          <a:bodyPr wrap="square" rtlCol="0" anchor="ctr"/>
-          <a:lstStyle/>
-          <a:p>
-            <a:pPr indent="0" marL="0">
-              <a:buNone/>
-            </a:pPr>
-            <a:endParaRPr lang="en-US" dirty="0"/>
-          </a:p>
-        </p:txBody>
-      </p:sp>
-      <p:sp>
-        <p:nvSpPr>
-          <p:cNvPr id="15" name="Shape 13"/>
-          <p:cNvSpPr/>
-          <p:nvPr/>
-        </p:nvSpPr>
-        <p:spPr>
-          <a:xfrm>
-            <a:off x="430113" y="3958382"/>
-            <a:ext cx="0" cy="428476"/>
-          </a:xfrm>
-          <a:prstGeom prst="line">
-            <a:avLst/>
-          </a:prstGeom>
-          <a:noFill/>
-          <a:ln w="47625">
-            <a:solidFill>
-              <a:srgbClr val="277884"/>
-            </a:solidFill>
-            <a:prstDash val="solid"/>
-          </a:ln>
-        </p:spPr>
-      </p:sp>
-      <p:sp>
-        <p:nvSpPr>
-          <p:cNvPr id="16" name="Text 14"/>
-          <p:cNvSpPr/>
-          <p:nvPr/>
-        </p:nvSpPr>
-        <p:spPr>
-          <a:xfrm>
-            <a:off x="631627" y="4085332"/>
-            <a:ext cx="8086939" cy="174575"/>
-          </a:xfrm>
-          <a:prstGeom prst="rect">
-            <a:avLst/>
-          </a:prstGeom>
-          <a:noFill/>
-          <a:ln/>
-        </p:spPr>
-        <p:txBody>
-          <a:bodyPr wrap="square" lIns="0" tIns="0" rIns="0" bIns="0" rtlCol="0" anchor="t"/>
-          <a:lstStyle/>
-          <a:p>
-            <a:pPr algn="l" indent="0" marL="0">
-              <a:lnSpc>
-                <a:spcPts val="1375"/>
-              </a:lnSpc>
-              <a:buNone/>
-            </a:pPr>
-            <a:r>
-              <a:rPr lang="en-US" sz="1100" dirty="0">
-                <a:solidFill>
-                  <a:srgbClr val="1C2833"/>
-                </a:solidFill>
-                <a:latin typeface="Courier New" pitchFamily="34" charset="0"/>
-                <a:ea typeface="Courier New" pitchFamily="34" charset="-122"/>
-                <a:cs typeface="Courier New" pitchFamily="34" charset="-120"/>
-              </a:rPr>
-              <a:t>(9 − d₁), (9 − d₂), …, (9 − dₙ₋₁), (10 − dₙ)</a:t>
-            </a:r>
-            <a:endParaRPr lang="en-US" sz="1100" dirty="0"/>
-          </a:p>
-        </p:txBody>
-      </p:sp>
-      <p:sp>
-        <p:nvSpPr>
-          <p:cNvPr id="17" name="Text 15"/>
-          <p:cNvSpPr/>
-          <p:nvPr/>
-        </p:nvSpPr>
-        <p:spPr>
-          <a:xfrm>
-            <a:off x="406301" y="4475708"/>
-            <a:ext cx="8498026" cy="213271"/>
-          </a:xfrm>
-          <a:prstGeom prst="rect">
-            <a:avLst/>
-          </a:prstGeom>
-          <a:noFill/>
-          <a:ln/>
-        </p:spPr>
-        <p:txBody>
-          <a:bodyPr wrap="square" lIns="0" tIns="0" rIns="0" bIns="0" rtlCol="0" anchor="t"/>
-          <a:lstStyle/>
-          <a:p>
-            <a:pPr algn="l" indent="0" marL="0">
-              <a:lnSpc>
-                <a:spcPts val="1680"/>
-              </a:lnSpc>
-              <a:spcBef>
-                <a:spcPts val="300"/>
-              </a:spcBef>
-              <a:spcAft>
-                <a:spcPts val="300"/>
-              </a:spcAft>
-              <a:buNone/>
-            </a:pPr>
-            <a:r>
-              <a:rPr lang="en-US" sz="1200" dirty="0">
-                <a:solidFill>
-                  <a:srgbClr val="1C2833"/>
-                </a:solidFill>
-                <a:latin typeface="Arial" pitchFamily="34" charset="0"/>
-                <a:ea typeface="Arial" pitchFamily="34" charset="-122"/>
-                <a:cs typeface="Arial" pitchFamily="34" charset="-120"/>
-              </a:rPr>
-              <a:t>where d₁ … dₙ are the digits left-to-right.</a:t>
-            </a:r>
-            <a:endParaRPr lang="en-US" sz="1200" dirty="0"/>
-          </a:p>
-        </p:txBody>
-      </p:sp>
-      <p:sp>
-        <p:nvSpPr>
-          <p:cNvPr id="18" name="Text 16"/>
-          <p:cNvSpPr/>
-          <p:nvPr/>
-        </p:nvSpPr>
-        <p:spPr>
-          <a:xfrm>
-            <a:off x="634901" y="4777829"/>
-            <a:ext cx="8102798" cy="281880"/>
-          </a:xfrm>
-          <a:prstGeom prst="rect">
-            <a:avLst/>
-          </a:prstGeom>
-          <a:noFill/>
-          <a:ln/>
-        </p:spPr>
-        <p:txBody>
-          <a:bodyPr wrap="square" lIns="0" tIns="0" rIns="0" bIns="0" rtlCol="0" anchor="t"/>
-          <a:lstStyle/>
-          <a:p>
-            <a:pPr algn="l" marL="342900" indent="-342900">
-              <a:lnSpc>
-                <a:spcPts val="1620"/>
-              </a:lnSpc>
-              <a:spcAft>
-                <a:spcPts val="300"/>
-              </a:spcAft>
-              <a:buSzPct val="100000"/>
-              <a:buChar char="•"/>
-            </a:pPr>
-            <a:r>
-              <a:rPr lang="en-US" sz="1200" b="1" dirty="0">
-                <a:solidFill>
-                  <a:srgbClr val="1C2833"/>
-                </a:solidFill>
-                <a:latin typeface="Arial" pitchFamily="34" charset="0"/>
-                <a:ea typeface="Arial" pitchFamily="34" charset="-122"/>
-                <a:cs typeface="Arial" pitchFamily="34" charset="-120"/>
-              </a:rPr>
-              <a:t>Demo 4 more, with class chanting along:</a:t>
-            </a:r>
-            <a:endParaRPr lang="en-US" sz="1200" dirty="0"/>
-          </a:p>
-        </p:txBody>
-      </p:sp>
-      <p:sp>
-        <p:nvSpPr>
-          <p:cNvPr id="19" name="Text 17"/>
-          <p:cNvSpPr/>
-          <p:nvPr/>
-        </p:nvSpPr>
-        <p:spPr>
-          <a:xfrm>
-            <a:off x="406301" y="5148560"/>
-            <a:ext cx="8498026" cy="213271"/>
-          </a:xfrm>
-          <a:prstGeom prst="rect">
-            <a:avLst/>
-          </a:prstGeom>
-          <a:noFill/>
-          <a:ln/>
-        </p:spPr>
-        <p:txBody>
-          <a:bodyPr wrap="square" lIns="0" tIns="0" rIns="0" bIns="0" rtlCol="0" anchor="t"/>
-          <a:lstStyle/>
-          <a:p>
-            <a:pPr algn="l" indent="0" marL="0">
-              <a:lnSpc>
-                <a:spcPts val="1680"/>
-              </a:lnSpc>
-              <a:spcBef>
-                <a:spcPts val="300"/>
-              </a:spcBef>
-              <a:spcAft>
-                <a:spcPts val="300"/>
-              </a:spcAft>
-              <a:buNone/>
-            </a:pPr>
-            <a:r>
-              <a:rPr lang="en-US" sz="1200" i="1" dirty="0">
-                <a:solidFill>
-                  <a:srgbClr val="1C2833"/>
-                </a:solidFill>
-                <a:latin typeface="Arial" pitchFamily="34" charset="0"/>
-                <a:ea typeface="Arial" pitchFamily="34" charset="-122"/>
-                <a:cs typeface="Arial" pitchFamily="34" charset="-120"/>
-              </a:rPr>
-              <a:t>Each row: Number · Working · Complement · Check.</a:t>
-            </a:r>
-            <a:endParaRPr lang="en-US" sz="1200" dirty="0"/>
-          </a:p>
-        </p:txBody>
-      </p:sp>
-      <p:sp>
-        <p:nvSpPr>
-          <p:cNvPr id="20" name="Text 18"/>
-          <p:cNvSpPr/>
-          <p:nvPr/>
-        </p:nvSpPr>
-        <p:spPr>
-          <a:xfrm>
-            <a:off x="634901" y="5450681"/>
-            <a:ext cx="8102798" cy="1013222"/>
-          </a:xfrm>
-          <a:prstGeom prst="rect">
-            <a:avLst/>
-          </a:prstGeom>
-          <a:noFill/>
-          <a:ln/>
-        </p:spPr>
-        <p:txBody>
-          <a:bodyPr wrap="square" lIns="0" tIns="0" rIns="0" bIns="0" rtlCol="0" anchor="t"/>
-          <a:lstStyle/>
-          <a:p>
-            <a:pPr algn="l" marL="342900" indent="-342900">
-              <a:lnSpc>
-                <a:spcPts val="1620"/>
-              </a:lnSpc>
-              <a:spcAft>
-                <a:spcPts val="300"/>
-              </a:spcAft>
-              <a:buSzPct val="100000"/>
-              <a:buChar char="•"/>
-            </a:pPr>
-            <a:r>
-              <a:rPr lang="en-US" sz="1200" b="1" dirty="0">
-                <a:solidFill>
-                  <a:srgbClr val="1C2833"/>
-                </a:solidFill>
-                <a:latin typeface="Arial" pitchFamily="34" charset="0"/>
-                <a:ea typeface="Arial" pitchFamily="34" charset="-122"/>
-                <a:cs typeface="Arial" pitchFamily="34" charset="-120"/>
-              </a:rPr>
-              <a:t>419</a:t>
-            </a:r>
-            <a:pPr algn="l" indent="0" marL="0">
-              <a:lnSpc>
-                <a:spcPts val="1620"/>
-              </a:lnSpc>
-              <a:spcAft>
-                <a:spcPts val="300"/>
-              </a:spcAft>
-              <a:buNone/>
-            </a:pPr>
-            <a:r>
-              <a:rPr lang="en-US" sz="1200" dirty="0">
-                <a:solidFill>
-                  <a:srgbClr val="1C2833"/>
-                </a:solidFill>
-                <a:latin typeface="Arial" pitchFamily="34" charset="0"/>
-                <a:ea typeface="Arial" pitchFamily="34" charset="-122"/>
-                <a:cs typeface="Arial" pitchFamily="34" charset="-120"/>
-              </a:rPr>
-              <a:t> — 9-4, 9-1, 10-9 = 5, 8, 1 · </a:t>
-            </a:r>
-            <a:pPr algn="l" indent="0" marL="0">
-              <a:lnSpc>
-                <a:spcPts val="1620"/>
-              </a:lnSpc>
-              <a:spcAft>
-                <a:spcPts val="300"/>
-              </a:spcAft>
-              <a:buNone/>
-            </a:pPr>
-            <a:r>
-              <a:rPr lang="en-US" sz="1200" b="1" dirty="0">
-                <a:solidFill>
-                  <a:srgbClr val="1C2833"/>
-                </a:solidFill>
-                <a:latin typeface="Arial" pitchFamily="34" charset="0"/>
-                <a:ea typeface="Arial" pitchFamily="34" charset="-122"/>
-                <a:cs typeface="Arial" pitchFamily="34" charset="-120"/>
-              </a:rPr>
-              <a:t>581</a:t>
-            </a:r>
-            <a:pPr algn="l" indent="0" marL="0">
-              <a:lnSpc>
-                <a:spcPts val="1620"/>
-              </a:lnSpc>
-              <a:spcAft>
-                <a:spcPts val="300"/>
-              </a:spcAft>
-              <a:buNone/>
-            </a:pPr>
-            <a:r>
-              <a:rPr lang="en-US" sz="1200" dirty="0">
-                <a:solidFill>
-                  <a:srgbClr val="1C2833"/>
-                </a:solidFill>
-                <a:latin typeface="Arial" pitchFamily="34" charset="0"/>
-                <a:ea typeface="Arial" pitchFamily="34" charset="-122"/>
-                <a:cs typeface="Arial" pitchFamily="34" charset="-120"/>
-              </a:rPr>
-              <a:t> · 419 + 581 = 1000 ✓</a:t>
-            </a:r>
-            <a:endParaRPr lang="en-US" sz="1200" dirty="0"/>
-          </a:p>
-          <a:p>
-            <a:pPr algn="l" marL="342900" indent="-342900">
-              <a:lnSpc>
-                <a:spcPts val="1620"/>
-              </a:lnSpc>
-              <a:spcAft>
-                <a:spcPts val="300"/>
-              </a:spcAft>
-              <a:buSzPct val="100000"/>
-              <a:buChar char="•"/>
-            </a:pPr>
-            <a:r>
-              <a:rPr lang="en-US" sz="1200" b="1" dirty="0">
-                <a:solidFill>
-                  <a:srgbClr val="1C2833"/>
-                </a:solidFill>
-                <a:latin typeface="Arial" pitchFamily="34" charset="0"/>
-                <a:ea typeface="Arial" pitchFamily="34" charset="-122"/>
-                <a:cs typeface="Arial" pitchFamily="34" charset="-120"/>
-              </a:rPr>
-              <a:t>256</a:t>
-            </a:r>
-            <a:pPr algn="l" indent="0" marL="0">
-              <a:lnSpc>
-                <a:spcPts val="1620"/>
-              </a:lnSpc>
-              <a:spcAft>
-                <a:spcPts val="300"/>
-              </a:spcAft>
-              <a:buNone/>
-            </a:pPr>
-            <a:r>
-              <a:rPr lang="en-US" sz="1200" dirty="0">
-                <a:solidFill>
-                  <a:srgbClr val="1C2833"/>
-                </a:solidFill>
-                <a:latin typeface="Arial" pitchFamily="34" charset="0"/>
-                <a:ea typeface="Arial" pitchFamily="34" charset="-122"/>
-                <a:cs typeface="Arial" pitchFamily="34" charset="-120"/>
-              </a:rPr>
-              <a:t> — 9-2, 9-5, 10-6 = 7, 4, 4 · </a:t>
-            </a:r>
-            <a:pPr algn="l" indent="0" marL="0">
-              <a:lnSpc>
-                <a:spcPts val="1620"/>
-              </a:lnSpc>
-              <a:spcAft>
-                <a:spcPts val="300"/>
-              </a:spcAft>
-              <a:buNone/>
-            </a:pPr>
-            <a:r>
-              <a:rPr lang="en-US" sz="1200" b="1" dirty="0">
-                <a:solidFill>
-                  <a:srgbClr val="1C2833"/>
-                </a:solidFill>
-                <a:latin typeface="Arial" pitchFamily="34" charset="0"/>
-                <a:ea typeface="Arial" pitchFamily="34" charset="-122"/>
-                <a:cs typeface="Arial" pitchFamily="34" charset="-120"/>
-              </a:rPr>
-              <a:t>744</a:t>
-            </a:r>
-            <a:pPr algn="l" indent="0" marL="0">
-              <a:lnSpc>
-                <a:spcPts val="1620"/>
-              </a:lnSpc>
-              <a:spcAft>
-                <a:spcPts val="300"/>
-              </a:spcAft>
-              <a:buNone/>
-            </a:pPr>
-            <a:r>
-              <a:rPr lang="en-US" sz="1200" dirty="0">
-                <a:solidFill>
-                  <a:srgbClr val="1C2833"/>
-                </a:solidFill>
-                <a:latin typeface="Arial" pitchFamily="34" charset="0"/>
-                <a:ea typeface="Arial" pitchFamily="34" charset="-122"/>
-                <a:cs typeface="Arial" pitchFamily="34" charset="-120"/>
-              </a:rPr>
-              <a:t> · 256 + 744 = 1000 ✓</a:t>
-            </a:r>
-            <a:endParaRPr lang="en-US" sz="1200" dirty="0"/>
-          </a:p>
-          <a:p>
-            <a:pPr algn="l" marL="342900" indent="-342900">
-              <a:lnSpc>
-                <a:spcPts val="1620"/>
-              </a:lnSpc>
-              <a:spcAft>
-                <a:spcPts val="300"/>
-              </a:spcAft>
-              <a:buSzPct val="100000"/>
-              <a:buChar char="•"/>
-            </a:pPr>
-            <a:r>
-              <a:rPr lang="en-US" sz="1200" b="1" dirty="0">
-                <a:solidFill>
-                  <a:srgbClr val="1C2833"/>
-                </a:solidFill>
-                <a:latin typeface="Arial" pitchFamily="34" charset="0"/>
-                <a:ea typeface="Arial" pitchFamily="34" charset="-122"/>
-                <a:cs typeface="Arial" pitchFamily="34" charset="-120"/>
-              </a:rPr>
-              <a:t>803</a:t>
-            </a:r>
-            <a:pPr algn="l" indent="0" marL="0">
-              <a:lnSpc>
-                <a:spcPts val="1620"/>
-              </a:lnSpc>
-              <a:spcAft>
-                <a:spcPts val="300"/>
-              </a:spcAft>
-              <a:buNone/>
-            </a:pPr>
-            <a:r>
-              <a:rPr lang="en-US" sz="1200" dirty="0">
-                <a:solidFill>
-                  <a:srgbClr val="1C2833"/>
-                </a:solidFill>
-                <a:latin typeface="Arial" pitchFamily="34" charset="0"/>
-                <a:ea typeface="Arial" pitchFamily="34" charset="-122"/>
-                <a:cs typeface="Arial" pitchFamily="34" charset="-120"/>
-              </a:rPr>
-              <a:t> — 9-8, 9-0, 10-3 = 1, 9, 7 · </a:t>
-            </a:r>
-            <a:pPr algn="l" indent="0" marL="0">
-              <a:lnSpc>
-                <a:spcPts val="1620"/>
-              </a:lnSpc>
-              <a:spcAft>
-                <a:spcPts val="300"/>
-              </a:spcAft>
-              <a:buNone/>
-            </a:pPr>
-            <a:r>
-              <a:rPr lang="en-US" sz="1200" b="1" dirty="0">
-                <a:solidFill>
-                  <a:srgbClr val="1C2833"/>
-                </a:solidFill>
-                <a:latin typeface="Arial" pitchFamily="34" charset="0"/>
-                <a:ea typeface="Arial" pitchFamily="34" charset="-122"/>
-                <a:cs typeface="Arial" pitchFamily="34" charset="-120"/>
-              </a:rPr>
-              <a:t>197</a:t>
-            </a:r>
-            <a:pPr algn="l" indent="0" marL="0">
-              <a:lnSpc>
-                <a:spcPts val="1620"/>
-              </a:lnSpc>
-              <a:spcAft>
-                <a:spcPts val="300"/>
-              </a:spcAft>
-              <a:buNone/>
-            </a:pPr>
-            <a:r>
-              <a:rPr lang="en-US" sz="1200" dirty="0">
-                <a:solidFill>
-                  <a:srgbClr val="1C2833"/>
-                </a:solidFill>
-                <a:latin typeface="Arial" pitchFamily="34" charset="0"/>
-                <a:ea typeface="Arial" pitchFamily="34" charset="-122"/>
-                <a:cs typeface="Arial" pitchFamily="34" charset="-120"/>
-              </a:rPr>
-              <a:t> · 803 + 197 = 1000 ✓</a:t>
-            </a:r>
-            <a:endParaRPr lang="en-US" sz="1200" dirty="0"/>
-          </a:p>
-          <a:p>
-            <a:pPr algn="l" marL="342900" indent="-342900">
-              <a:lnSpc>
-                <a:spcPts val="1620"/>
-              </a:lnSpc>
-              <a:spcAft>
-                <a:spcPts val="300"/>
-              </a:spcAft>
-              <a:buSzPct val="100000"/>
-              <a:buChar char="•"/>
-            </a:pPr>
-            <a:r>
-              <a:rPr lang="en-US" sz="1200" b="1" dirty="0">
-                <a:solidFill>
-                  <a:srgbClr val="1C2833"/>
-                </a:solidFill>
-                <a:latin typeface="Arial" pitchFamily="34" charset="0"/>
-                <a:ea typeface="Arial" pitchFamily="34" charset="-122"/>
-                <a:cs typeface="Arial" pitchFamily="34" charset="-120"/>
-              </a:rPr>
-              <a:t>999</a:t>
-            </a:r>
-            <a:pPr algn="l" indent="0" marL="0">
-              <a:lnSpc>
-                <a:spcPts val="1620"/>
-              </a:lnSpc>
-              <a:spcAft>
-                <a:spcPts val="300"/>
-              </a:spcAft>
-              <a:buNone/>
-            </a:pPr>
-            <a:r>
-              <a:rPr lang="en-US" sz="1200" dirty="0">
-                <a:solidFill>
-                  <a:srgbClr val="1C2833"/>
-                </a:solidFill>
-                <a:latin typeface="Arial" pitchFamily="34" charset="0"/>
-                <a:ea typeface="Arial" pitchFamily="34" charset="-122"/>
-                <a:cs typeface="Arial" pitchFamily="34" charset="-120"/>
-              </a:rPr>
-              <a:t> — 9-9, 9-9, 10-9 = 0, 0, 1 · </a:t>
-            </a:r>
-            <a:pPr algn="l" indent="0" marL="0">
-              <a:lnSpc>
-                <a:spcPts val="1620"/>
-              </a:lnSpc>
-              <a:spcAft>
-                <a:spcPts val="300"/>
-              </a:spcAft>
-              <a:buNone/>
-            </a:pPr>
-            <a:r>
-              <a:rPr lang="en-US" sz="1200" b="1" dirty="0">
-                <a:solidFill>
-                  <a:srgbClr val="1C2833"/>
-                </a:solidFill>
-                <a:latin typeface="Arial" pitchFamily="34" charset="0"/>
-                <a:ea typeface="Arial" pitchFamily="34" charset="-122"/>
-                <a:cs typeface="Arial" pitchFamily="34" charset="-120"/>
-              </a:rPr>
-              <a:t>001</a:t>
-            </a:r>
-            <a:pPr algn="l" indent="0" marL="0">
-              <a:lnSpc>
-                <a:spcPts val="1620"/>
-              </a:lnSpc>
-              <a:spcAft>
-                <a:spcPts val="300"/>
-              </a:spcAft>
-              <a:buNone/>
-            </a:pPr>
-            <a:r>
-              <a:rPr lang="en-US" sz="1200" dirty="0">
-                <a:solidFill>
-                  <a:srgbClr val="1C2833"/>
-                </a:solidFill>
-                <a:latin typeface="Arial" pitchFamily="34" charset="0"/>
-                <a:ea typeface="Arial" pitchFamily="34" charset="-122"/>
-                <a:cs typeface="Arial" pitchFamily="34" charset="-120"/>
-              </a:rPr>
-              <a:t> = 1 · 999 + 1 = 1000 ✓</a:t>
-            </a:r>
-            <a:endParaRPr lang="en-US" sz="1200" dirty="0"/>
-          </a:p>
-        </p:txBody>
-      </p:sp>
-      <p:sp>
-        <p:nvSpPr>
-          <p:cNvPr id="21" name="Text 19"/>
-          <p:cNvSpPr/>
-          <p:nvPr/>
-        </p:nvSpPr>
-        <p:spPr>
-          <a:xfrm>
-            <a:off x="634901" y="6565404"/>
-            <a:ext cx="8102798" cy="300930"/>
-          </a:xfrm>
-          <a:prstGeom prst="rect">
-            <a:avLst/>
-          </a:prstGeom>
-          <a:noFill/>
-          <a:ln/>
-        </p:spPr>
-        <p:txBody>
-          <a:bodyPr wrap="square" lIns="0" tIns="0" rIns="0" bIns="0" rtlCol="0" anchor="t"/>
-          <a:lstStyle/>
-          <a:p>
-            <a:pPr algn="l" marL="342900" indent="-342900">
-              <a:lnSpc>
-                <a:spcPts val="1620"/>
-              </a:lnSpc>
-              <a:spcAft>
-                <a:spcPts val="300"/>
-              </a:spcAft>
-              <a:buSzPct val="100000"/>
-              <a:buChar char="•"/>
-            </a:pPr>
-            <a:r>
-              <a:rPr lang="en-US" sz="1200" b="1" dirty="0">
-                <a:solidFill>
-                  <a:srgbClr val="1C2833"/>
-                </a:solidFill>
-                <a:latin typeface="Arial" pitchFamily="34" charset="0"/>
-                <a:ea typeface="Arial" pitchFamily="34" charset="-122"/>
-                <a:cs typeface="Arial" pitchFamily="34" charset="-120"/>
-              </a:rPr>
-              <a:t>Quick extension to 10 000:</a:t>
-            </a:r>
-            <a:pPr algn="l" indent="0" marL="0">
-              <a:lnSpc>
-                <a:spcPts val="1620"/>
-              </a:lnSpc>
-              <a:spcAft>
-                <a:spcPts val="300"/>
-              </a:spcAft>
-              <a:buNone/>
-            </a:pPr>
-            <a:r>
-              <a:rPr lang="en-US" sz="1200" dirty="0">
-                <a:solidFill>
-                  <a:srgbClr val="1C2833"/>
-                </a:solidFill>
-                <a:latin typeface="Arial" pitchFamily="34" charset="0"/>
-                <a:ea typeface="Arial" pitchFamily="34" charset="-122"/>
-                <a:cs typeface="Arial" pitchFamily="34" charset="-120"/>
-              </a:rPr>
-              <a:t> Complement of </a:t>
-            </a:r>
-            <a:pPr algn="l" indent="0" marL="0">
-              <a:lnSpc>
-                <a:spcPts val="1620"/>
-              </a:lnSpc>
-              <a:spcAft>
-                <a:spcPts val="300"/>
-              </a:spcAft>
-              <a:buNone/>
-            </a:pPr>
-            <a:r>
-              <a:rPr lang="en-US" sz="1200" dirty="0">
-                <a:solidFill>
-                  <a:srgbClr val="1C2833"/>
-                </a:solidFill>
-                <a:latin typeface="Arial" pitchFamily="34" charset="0"/>
-                <a:ea typeface="Arial" pitchFamily="34" charset="-122"/>
-                <a:cs typeface="Arial" pitchFamily="34" charset="-120"/>
-              </a:rPr>
-              <a:t>2347</a:t>
-            </a:r>
-            <a:pPr algn="l" indent="0" marL="0">
-              <a:lnSpc>
-                <a:spcPts val="1620"/>
-              </a:lnSpc>
-              <a:spcAft>
-                <a:spcPts val="300"/>
-              </a:spcAft>
-              <a:buNone/>
-            </a:pPr>
-            <a:r>
-              <a:rPr lang="en-US" sz="1200" dirty="0">
-                <a:solidFill>
-                  <a:srgbClr val="1C2833"/>
-                </a:solidFill>
-                <a:latin typeface="Arial" pitchFamily="34" charset="0"/>
-                <a:ea typeface="Arial" pitchFamily="34" charset="-122"/>
-                <a:cs typeface="Arial" pitchFamily="34" charset="-120"/>
-              </a:rPr>
-              <a:t> to 10 000?</a:t>
-            </a:r>
-            <a:endParaRPr lang="en-US" sz="1200" dirty="0"/>
-          </a:p>
-        </p:txBody>
-      </p:sp>
-      <p:sp>
-        <p:nvSpPr>
-          <p:cNvPr id="22" name="Text 20"/>
-          <p:cNvSpPr/>
-          <p:nvPr/>
-        </p:nvSpPr>
-        <p:spPr>
-          <a:xfrm>
-            <a:off x="406301" y="6955185"/>
-            <a:ext cx="8498026" cy="213271"/>
-          </a:xfrm>
-          <a:prstGeom prst="rect">
-            <a:avLst/>
-          </a:prstGeom>
-          <a:noFill/>
-          <a:ln/>
-        </p:spPr>
-        <p:txBody>
-          <a:bodyPr wrap="square" lIns="0" tIns="0" rIns="0" bIns="0" rtlCol="0" anchor="t"/>
-          <a:lstStyle/>
-          <a:p>
-            <a:pPr algn="l" indent="0" marL="0">
-              <a:lnSpc>
-                <a:spcPts val="1680"/>
-              </a:lnSpc>
-              <a:spcBef>
-                <a:spcPts val="300"/>
-              </a:spcBef>
-              <a:spcAft>
-                <a:spcPts val="300"/>
-              </a:spcAft>
-              <a:buNone/>
-            </a:pPr>
-            <a:r>
-              <a:rPr lang="en-US" sz="1200" dirty="0">
-                <a:solidFill>
-                  <a:srgbClr val="1C2833"/>
-                </a:solidFill>
-                <a:latin typeface="Arial" pitchFamily="34" charset="0"/>
-                <a:ea typeface="Arial" pitchFamily="34" charset="-122"/>
-                <a:cs typeface="Arial" pitchFamily="34" charset="-120"/>
-              </a:rPr>
-              <a:t>– 9-2, 9-3, 9-4, 10-7 = </a:t>
-            </a:r>
-            <a:pPr algn="l" indent="0" marL="0">
-              <a:lnSpc>
-                <a:spcPts val="1680"/>
-              </a:lnSpc>
-              <a:spcBef>
-                <a:spcPts val="300"/>
-              </a:spcBef>
-              <a:spcAft>
-                <a:spcPts val="300"/>
-              </a:spcAft>
-              <a:buNone/>
-            </a:pPr>
-            <a:r>
-              <a:rPr lang="en-US" sz="1200" b="1" dirty="0">
-                <a:solidFill>
-                  <a:srgbClr val="1C2833"/>
-                </a:solidFill>
-                <a:latin typeface="Arial" pitchFamily="34" charset="0"/>
-                <a:ea typeface="Arial" pitchFamily="34" charset="-122"/>
-                <a:cs typeface="Arial" pitchFamily="34" charset="-120"/>
-              </a:rPr>
-              <a:t>7653</a:t>
-            </a:r>
-            <a:pPr algn="l" indent="0" marL="0">
-              <a:lnSpc>
-                <a:spcPts val="1680"/>
-              </a:lnSpc>
-              <a:spcBef>
-                <a:spcPts val="300"/>
-              </a:spcBef>
-              <a:spcAft>
-                <a:spcPts val="300"/>
-              </a:spcAft>
-              <a:buNone/>
-            </a:pPr>
-            <a:r>
-              <a:rPr lang="en-US" sz="1200" dirty="0">
-                <a:solidFill>
-                  <a:srgbClr val="1C2833"/>
-                </a:solidFill>
-                <a:latin typeface="Arial" pitchFamily="34" charset="0"/>
-                <a:ea typeface="Arial" pitchFamily="34" charset="-122"/>
-                <a:cs typeface="Arial" pitchFamily="34" charset="-120"/>
-              </a:rPr>
-              <a:t>. – 2347 + 7653 = 10 000. ✓ - </a:t>
-            </a:r>
-            <a:pPr algn="l" indent="0" marL="0">
-              <a:lnSpc>
-                <a:spcPts val="1680"/>
-              </a:lnSpc>
-              <a:spcBef>
-                <a:spcPts val="300"/>
-              </a:spcBef>
-              <a:spcAft>
-                <a:spcPts val="300"/>
-              </a:spcAft>
-              <a:buNone/>
-            </a:pPr>
-            <a:r>
-              <a:rPr lang="en-US" sz="1200" i="1" dirty="0">
-                <a:solidFill>
-                  <a:srgbClr val="1C2833"/>
-                </a:solidFill>
-                <a:latin typeface="Arial" pitchFamily="34" charset="0"/>
-                <a:ea typeface="Arial" pitchFamily="34" charset="-122"/>
-                <a:cs typeface="Arial" pitchFamily="34" charset="-120"/>
-              </a:rPr>
-              <a:t>"Same rule. Just more digits."</a:t>
-            </a:r>
-            <a:endParaRPr lang="en-US" sz="1200" dirty="0"/>
-          </a:p>
-        </p:txBody>
-      </p:sp>
-      <p:sp>
-        <p:nvSpPr>
-          <p:cNvPr id="23" name="Text 21"/>
-          <p:cNvSpPr/>
-          <p:nvPr/>
-        </p:nvSpPr>
-        <p:spPr>
-          <a:xfrm>
-            <a:off x="406301" y="7320855"/>
+          <p:cNvPr id="5" name="Text 3"/>
+          <p:cNvSpPr/>
+          <p:nvPr/>
+        </p:nvSpPr>
+        <p:spPr>
+          <a:xfrm>
+            <a:off x="406301" y="4434929"/>
             <a:ext cx="8498026" cy="213271"/>
           </a:xfrm>
           <a:prstGeom prst="rect">
@@ -5950,7 +6871,7 @@
                 <a:ea typeface="Georgia" pitchFamily="34" charset="-122"/>
                 <a:cs typeface="Georgia" pitchFamily="34" charset="-120"/>
               </a:rPr>
-              <a:t>Activity (15 min) — Speed drill</a:t>
+              <a:t>Core (15 min) — Three digits, same rule</a:t>
             </a:r>
             <a:endParaRPr lang="en-US" sz="1800" dirty="0"/>
           </a:p>
@@ -5964,8 +6885,8 @@
         </p:nvSpPr>
         <p:spPr>
           <a:xfrm>
-            <a:off x="406301" y="870942"/>
-            <a:ext cx="8498026" cy="639812"/>
+            <a:off x="634901" y="883593"/>
+            <a:ext cx="8102798" cy="525661"/>
           </a:xfrm>
           <a:prstGeom prst="rect">
             <a:avLst/>
@@ -5977,13 +6898,31 @@
           <a:bodyPr wrap="square" lIns="0" tIns="0" rIns="0" bIns="0" rtlCol="0" anchor="t"/>
           <a:lstStyle/>
           <a:p>
-            <a:pPr algn="l" indent="0" marL="0">
-              <a:lnSpc>
-                <a:spcPts val="1680"/>
-              </a:lnSpc>
-              <a:spcBef>
-                <a:spcPts val="300"/>
-              </a:spcBef>
+            <a:pPr algn="l" marL="342900" indent="-342900">
+              <a:lnSpc>
+                <a:spcPts val="1620"/>
+              </a:lnSpc>
+              <a:spcAft>
+                <a:spcPts val="300"/>
+              </a:spcAft>
+              <a:buSzPct val="100000"/>
+              <a:buChar char="•"/>
+            </a:pPr>
+            <a:r>
+              <a:rPr lang="en-US" sz="1200" b="1" dirty="0">
+                <a:solidFill>
+                  <a:srgbClr val="1C2833"/>
+                </a:solidFill>
+                <a:latin typeface="Arial" pitchFamily="34" charset="0"/>
+                <a:ea typeface="Arial" pitchFamily="34" charset="-122"/>
+                <a:cs typeface="Arial" pitchFamily="34" charset="-120"/>
+              </a:rPr>
+              <a:t>Pose:</a:t>
+            </a:r>
+            <a:pPr algn="l" indent="0" marL="0">
+              <a:lnSpc>
+                <a:spcPts val="1620"/>
+              </a:lnSpc>
               <a:spcAft>
                 <a:spcPts val="300"/>
               </a:spcAft>
@@ -5998,15 +6937,238 @@
                 <a:ea typeface="Arial" pitchFamily="34" charset="-122"/>
                 <a:cs typeface="Arial" pitchFamily="34" charset="-120"/>
               </a:rPr>
-              <a:t>– Pair-drill: 20 three-digit numbers. Aim for all 20 in under 90 seconds. – Self-check using a calculator: number + your complement should equal 1000. – Second sheet: 10 four-digit numbers, complement to 10 000. Aim under 60 seconds for the set.</a:t>
+              <a:t> </a:t>
+            </a:r>
+            <a:pPr algn="l" indent="0" marL="0">
+              <a:lnSpc>
+                <a:spcPts val="1620"/>
+              </a:lnSpc>
+              <a:spcAft>
+                <a:spcPts val="300"/>
+              </a:spcAft>
+              <a:buNone/>
+            </a:pPr>
+            <a:r>
+              <a:rPr lang="en-US" sz="1200" i="1" dirty="0">
+                <a:solidFill>
+                  <a:srgbClr val="1C2833"/>
+                </a:solidFill>
+                <a:latin typeface="Arial" pitchFamily="34" charset="0"/>
+                <a:ea typeface="Arial" pitchFamily="34" charset="-122"/>
+                <a:cs typeface="Arial" pitchFamily="34" charset="-120"/>
+              </a:rPr>
+              <a:t>"What's the complement of 738 to 1000?"</a:t>
             </a:r>
             <a:endParaRPr lang="en-US" sz="1200" dirty="0"/>
           </a:p>
+          <a:p>
+            <a:pPr algn="l" marL="342900" indent="-342900">
+              <a:lnSpc>
+                <a:spcPts val="1620"/>
+              </a:lnSpc>
+              <a:spcAft>
+                <a:spcPts val="300"/>
+              </a:spcAft>
+              <a:buSzPct val="100000"/>
+              <a:buChar char="•"/>
+            </a:pPr>
+            <a:r>
+              <a:rPr lang="en-US" sz="1200" dirty="0">
+                <a:solidFill>
+                  <a:srgbClr val="1C2833"/>
+                </a:solidFill>
+                <a:latin typeface="Arial" pitchFamily="34" charset="0"/>
+                <a:ea typeface="Arial" pitchFamily="34" charset="-122"/>
+                <a:cs typeface="Arial" pitchFamily="34" charset="-120"/>
+              </a:rPr>
+              <a:t>Walk through:</a:t>
+            </a:r>
+            <a:endParaRPr lang="en-US" sz="1200" dirty="0"/>
+          </a:p>
         </p:txBody>
       </p:sp>
       <p:sp>
         <p:nvSpPr>
           <p:cNvPr id="5" name="Text 3"/>
+          <p:cNvSpPr/>
+          <p:nvPr/>
+        </p:nvSpPr>
+        <p:spPr>
+          <a:xfrm>
+            <a:off x="406301" y="1510754"/>
+            <a:ext cx="8331398" cy="777627"/>
+          </a:xfrm>
+          <a:prstGeom prst="rect">
+            <a:avLst/>
+          </a:prstGeom>
+          <a:solidFill>
+            <a:srgbClr val="F4F8F9"/>
+          </a:solidFill>
+          <a:ln/>
+        </p:spPr>
+        <p:txBody>
+          <a:bodyPr wrap="square" rtlCol="0" anchor="ctr"/>
+          <a:lstStyle/>
+          <a:p>
+            <a:pPr indent="0" marL="0">
+              <a:buNone/>
+            </a:pPr>
+            <a:endParaRPr lang="en-US" dirty="0"/>
+          </a:p>
+        </p:txBody>
+      </p:sp>
+      <p:sp>
+        <p:nvSpPr>
+          <p:cNvPr id="6" name="Shape 4"/>
+          <p:cNvSpPr/>
+          <p:nvPr/>
+        </p:nvSpPr>
+        <p:spPr>
+          <a:xfrm>
+            <a:off x="430113" y="1510754"/>
+            <a:ext cx="0" cy="777627"/>
+          </a:xfrm>
+          <a:prstGeom prst="line">
+            <a:avLst/>
+          </a:prstGeom>
+          <a:noFill/>
+          <a:ln w="47625">
+            <a:solidFill>
+              <a:srgbClr val="277884"/>
+            </a:solidFill>
+            <a:prstDash val="solid"/>
+          </a:ln>
+        </p:spPr>
+      </p:sp>
+      <p:sp>
+        <p:nvSpPr>
+          <p:cNvPr id="7" name="Text 5"/>
+          <p:cNvSpPr/>
+          <p:nvPr/>
+        </p:nvSpPr>
+        <p:spPr>
+          <a:xfrm>
+            <a:off x="631627" y="1637705"/>
+            <a:ext cx="8086939" cy="174575"/>
+          </a:xfrm>
+          <a:prstGeom prst="rect">
+            <a:avLst/>
+          </a:prstGeom>
+          <a:noFill/>
+          <a:ln/>
+        </p:spPr>
+        <p:txBody>
+          <a:bodyPr wrap="square" lIns="0" tIns="0" rIns="0" bIns="0" rtlCol="0" anchor="t"/>
+          <a:lstStyle/>
+          <a:p>
+            <a:pPr algn="l" indent="0" marL="0">
+              <a:lnSpc>
+                <a:spcPts val="1375"/>
+              </a:lnSpc>
+              <a:buNone/>
+            </a:pPr>
+            <a:r>
+              <a:rPr lang="en-US" sz="1100" dirty="0">
+                <a:solidFill>
+                  <a:srgbClr val="1C2833"/>
+                </a:solidFill>
+                <a:latin typeface="Courier New" pitchFamily="34" charset="0"/>
+                <a:ea typeface="Courier New" pitchFamily="34" charset="-122"/>
+                <a:cs typeface="Courier New" pitchFamily="34" charset="-120"/>
+              </a:rPr>
+              <a:t>1000</a:t>
+            </a:r>
+            <a:endParaRPr lang="en-US" sz="1100" dirty="0"/>
+          </a:p>
+        </p:txBody>
+      </p:sp>
+      <p:sp>
+        <p:nvSpPr>
+          <p:cNvPr id="8" name="Text 6"/>
+          <p:cNvSpPr/>
+          <p:nvPr/>
+        </p:nvSpPr>
+        <p:spPr>
+          <a:xfrm>
+            <a:off x="631627" y="1812280"/>
+            <a:ext cx="8086939" cy="174575"/>
+          </a:xfrm>
+          <a:prstGeom prst="rect">
+            <a:avLst/>
+          </a:prstGeom>
+          <a:noFill/>
+          <a:ln/>
+        </p:spPr>
+        <p:txBody>
+          <a:bodyPr wrap="square" lIns="0" tIns="0" rIns="0" bIns="0" rtlCol="0" anchor="t"/>
+          <a:lstStyle/>
+          <a:p>
+            <a:pPr algn="l" indent="0" marL="0">
+              <a:lnSpc>
+                <a:spcPts val="1375"/>
+              </a:lnSpc>
+              <a:buNone/>
+            </a:pPr>
+            <a:r>
+              <a:rPr lang="en-US" sz="1100" dirty="0">
+                <a:solidFill>
+                  <a:srgbClr val="1C2833"/>
+                </a:solidFill>
+                <a:latin typeface="Courier New" pitchFamily="34" charset="0"/>
+                <a:ea typeface="Courier New" pitchFamily="34" charset="-122"/>
+                <a:cs typeface="Courier New" pitchFamily="34" charset="-120"/>
+              </a:rPr>
+              <a:t>−    738</a:t>
+            </a:r>
+            <a:endParaRPr lang="en-US" sz="1100" dirty="0"/>
+          </a:p>
+        </p:txBody>
+      </p:sp>
+      <p:sp>
+        <p:nvSpPr>
+          <p:cNvPr id="9" name="Text 7"/>
+          <p:cNvSpPr/>
+          <p:nvPr/>
+        </p:nvSpPr>
+        <p:spPr>
+          <a:xfrm>
+            <a:off x="631627" y="1986855"/>
+            <a:ext cx="8086939" cy="174575"/>
+          </a:xfrm>
+          <a:prstGeom prst="rect">
+            <a:avLst/>
+          </a:prstGeom>
+          <a:noFill/>
+          <a:ln/>
+        </p:spPr>
+        <p:txBody>
+          <a:bodyPr wrap="square" lIns="0" tIns="0" rIns="0" bIns="0" rtlCol="0" anchor="t"/>
+          <a:lstStyle/>
+          <a:p>
+            <a:pPr algn="l" indent="0" marL="0">
+              <a:lnSpc>
+                <a:spcPts val="1375"/>
+              </a:lnSpc>
+              <a:buNone/>
+            </a:pPr>
+            <a:r>
+              <a:rPr lang="en-US" sz="1100" dirty="0">
+                <a:solidFill>
+                  <a:srgbClr val="1C2833"/>
+                </a:solidFill>
+                <a:latin typeface="Courier New" pitchFamily="34" charset="0"/>
+                <a:ea typeface="Courier New" pitchFamily="34" charset="-122"/>
+                <a:cs typeface="Courier New" pitchFamily="34" charset="-120"/>
+              </a:rPr>
+              <a:t>————————</a:t>
+            </a:r>
+            <a:endParaRPr lang="en-US" sz="1100" dirty="0"/>
+          </a:p>
+        </p:txBody>
+      </p:sp>
+      <p:sp>
+        <p:nvSpPr>
+          <p:cNvPr id="10" name="Text 8"/>
           <p:cNvSpPr/>
           <p:nvPr/>
         </p:nvSpPr>
@@ -6156,7 +7318,7 @@
                 <a:ea typeface="Georgia" pitchFamily="34" charset="-122"/>
                 <a:cs typeface="Georgia" pitchFamily="34" charset="-120"/>
               </a:rPr>
-              <a:t>Wrap-up + Formative quiz (10 min)</a:t>
+              <a:t>Core (15 min) — Three digits, same rule (cont.)</a:t>
             </a:r>
             <a:endParaRPr lang="en-US" sz="1800" dirty="0"/>
           </a:p>
@@ -6170,8 +7332,8 @@
         </p:nvSpPr>
         <p:spPr>
           <a:xfrm>
-            <a:off x="406301" y="870942"/>
-            <a:ext cx="8498026" cy="436066"/>
+            <a:off x="634901" y="883593"/>
+            <a:ext cx="8102798" cy="1257002"/>
           </a:xfrm>
           <a:prstGeom prst="rect">
             <a:avLst/>
@@ -6183,17 +7345,15 @@
           <a:bodyPr wrap="square" lIns="0" tIns="0" rIns="0" bIns="0" rtlCol="0" anchor="t"/>
           <a:lstStyle/>
           <a:p>
-            <a:pPr algn="l" indent="0" marL="0">
-              <a:lnSpc>
-                <a:spcPts val="1680"/>
-              </a:lnSpc>
-              <a:spcBef>
-                <a:spcPts val="300"/>
-              </a:spcBef>
-              <a:spcAft>
-                <a:spcPts val="300"/>
-              </a:spcAft>
-              <a:buNone/>
+            <a:pPr algn="l" marL="342900" indent="-342900">
+              <a:lnSpc>
+                <a:spcPts val="1620"/>
+              </a:lnSpc>
+              <a:spcAft>
+                <a:spcPts val="300"/>
+              </a:spcAft>
+              <a:buSzPct val="100000"/>
+              <a:buChar char="•"/>
             </a:pPr>
             <a:r>
               <a:rPr lang="en-US" sz="1200" dirty="0">
@@ -6204,19 +7364,40 @@
                 <a:ea typeface="Arial" pitchFamily="34" charset="-122"/>
                 <a:cs typeface="Arial" pitchFamily="34" charset="-120"/>
               </a:rPr>
-              <a:t>– Formative quiz Part A from </a:t>
-            </a:r>
-            <a:pPr algn="l" indent="0" marL="0">
-              <a:lnSpc>
-                <a:spcPts val="1680"/>
-              </a:lnSpc>
-              <a:spcBef>
-                <a:spcPts val="300"/>
-              </a:spcBef>
-              <a:spcAft>
-                <a:spcPts val="300"/>
-              </a:spcAft>
-              <a:buNone/>
+              <a:t>First digit (7): 9 − 7 = </a:t>
+            </a:r>
+            <a:pPr algn="l" indent="0" marL="0">
+              <a:lnSpc>
+                <a:spcPts val="1620"/>
+              </a:lnSpc>
+              <a:spcAft>
+                <a:spcPts val="300"/>
+              </a:spcAft>
+              <a:buNone/>
+            </a:pPr>
+            <a:r>
+              <a:rPr lang="en-US" sz="1200" b="1" dirty="0">
+                <a:solidFill>
+                  <a:srgbClr val="1C2833"/>
+                </a:solidFill>
+                <a:latin typeface="Arial" pitchFamily="34" charset="0"/>
+                <a:ea typeface="Arial" pitchFamily="34" charset="-122"/>
+                <a:cs typeface="Arial" pitchFamily="34" charset="-120"/>
+              </a:rPr>
+              <a:t>2</a:t>
+            </a:r>
+            <a:endParaRPr lang="en-US" sz="1200" dirty="0"/>
+          </a:p>
+          <a:p>
+            <a:pPr algn="l" marL="342900" indent="-342900">
+              <a:lnSpc>
+                <a:spcPts val="1620"/>
+              </a:lnSpc>
+              <a:spcAft>
+                <a:spcPts val="300"/>
+              </a:spcAft>
+              <a:buSzPct val="100000"/>
+              <a:buChar char="•"/>
             </a:pPr>
             <a:r>
               <a:rPr lang="en-US" sz="1200" dirty="0">
@@ -6227,19 +7408,40 @@
                 <a:ea typeface="Arial" pitchFamily="34" charset="-122"/>
                 <a:cs typeface="Arial" pitchFamily="34" charset="-120"/>
               </a:rPr>
-              <a:t>quizzes/formative.md</a:t>
-            </a:r>
-            <a:pPr algn="l" indent="0" marL="0">
-              <a:lnSpc>
-                <a:spcPts val="1680"/>
-              </a:lnSpc>
-              <a:spcBef>
-                <a:spcPts val="300"/>
-              </a:spcBef>
-              <a:spcAft>
-                <a:spcPts val="300"/>
-              </a:spcAft>
-              <a:buNone/>
+              <a:t>Second digit (3): 9 − 3 = </a:t>
+            </a:r>
+            <a:pPr algn="l" indent="0" marL="0">
+              <a:lnSpc>
+                <a:spcPts val="1620"/>
+              </a:lnSpc>
+              <a:spcAft>
+                <a:spcPts val="300"/>
+              </a:spcAft>
+              <a:buNone/>
+            </a:pPr>
+            <a:r>
+              <a:rPr lang="en-US" sz="1200" b="1" dirty="0">
+                <a:solidFill>
+                  <a:srgbClr val="1C2833"/>
+                </a:solidFill>
+                <a:latin typeface="Arial" pitchFamily="34" charset="0"/>
+                <a:ea typeface="Arial" pitchFamily="34" charset="-122"/>
+                <a:cs typeface="Arial" pitchFamily="34" charset="-120"/>
+              </a:rPr>
+              <a:t>6</a:t>
+            </a:r>
+            <a:endParaRPr lang="en-US" sz="1200" dirty="0"/>
+          </a:p>
+          <a:p>
+            <a:pPr algn="l" marL="342900" indent="-342900">
+              <a:lnSpc>
+                <a:spcPts val="1620"/>
+              </a:lnSpc>
+              <a:spcAft>
+                <a:spcPts val="300"/>
+              </a:spcAft>
+              <a:buSzPct val="100000"/>
+              <a:buChar char="•"/>
             </a:pPr>
             <a:r>
               <a:rPr lang="en-US" sz="1200" dirty="0">
@@ -6250,7 +7452,115 @@
                 <a:ea typeface="Arial" pitchFamily="34" charset="-122"/>
                 <a:cs typeface="Arial" pitchFamily="34" charset="-120"/>
               </a:rPr>
-              <a:t> — 5 questions on slips of paper, 5 min. – Collect. Next class includes the result.</a:t>
+              <a:t>Last digit (8): 10 − 8 = </a:t>
+            </a:r>
+            <a:pPr algn="l" indent="0" marL="0">
+              <a:lnSpc>
+                <a:spcPts val="1620"/>
+              </a:lnSpc>
+              <a:spcAft>
+                <a:spcPts val="300"/>
+              </a:spcAft>
+              <a:buNone/>
+            </a:pPr>
+            <a:r>
+              <a:rPr lang="en-US" sz="1200" b="1" dirty="0">
+                <a:solidFill>
+                  <a:srgbClr val="1C2833"/>
+                </a:solidFill>
+                <a:latin typeface="Arial" pitchFamily="34" charset="0"/>
+                <a:ea typeface="Arial" pitchFamily="34" charset="-122"/>
+                <a:cs typeface="Arial" pitchFamily="34" charset="-120"/>
+              </a:rPr>
+              <a:t>2</a:t>
+            </a:r>
+            <a:endParaRPr lang="en-US" sz="1200" dirty="0"/>
+          </a:p>
+          <a:p>
+            <a:pPr algn="l" marL="342900" indent="-342900">
+              <a:lnSpc>
+                <a:spcPts val="1620"/>
+              </a:lnSpc>
+              <a:spcAft>
+                <a:spcPts val="300"/>
+              </a:spcAft>
+              <a:buSzPct val="100000"/>
+              <a:buChar char="•"/>
+            </a:pPr>
+            <a:r>
+              <a:rPr lang="en-US" sz="1200" dirty="0">
+                <a:solidFill>
+                  <a:srgbClr val="1C2833"/>
+                </a:solidFill>
+                <a:latin typeface="Arial" pitchFamily="34" charset="0"/>
+                <a:ea typeface="Arial" pitchFamily="34" charset="-122"/>
+                <a:cs typeface="Arial" pitchFamily="34" charset="-120"/>
+              </a:rPr>
+              <a:t>Answer: </a:t>
+            </a:r>
+            <a:pPr algn="l" indent="0" marL="0">
+              <a:lnSpc>
+                <a:spcPts val="1620"/>
+              </a:lnSpc>
+              <a:spcAft>
+                <a:spcPts val="300"/>
+              </a:spcAft>
+              <a:buNone/>
+            </a:pPr>
+            <a:r>
+              <a:rPr lang="en-US" sz="1200" b="1" dirty="0">
+                <a:solidFill>
+                  <a:srgbClr val="1C2833"/>
+                </a:solidFill>
+                <a:latin typeface="Arial" pitchFamily="34" charset="0"/>
+                <a:ea typeface="Arial" pitchFamily="34" charset="-122"/>
+                <a:cs typeface="Arial" pitchFamily="34" charset="-120"/>
+              </a:rPr>
+              <a:t>262</a:t>
+            </a:r>
+            <a:pPr algn="l" indent="0" marL="0">
+              <a:lnSpc>
+                <a:spcPts val="1620"/>
+              </a:lnSpc>
+              <a:spcAft>
+                <a:spcPts val="300"/>
+              </a:spcAft>
+              <a:buNone/>
+            </a:pPr>
+            <a:r>
+              <a:rPr lang="en-US" sz="1200" dirty="0">
+                <a:solidFill>
+                  <a:srgbClr val="1C2833"/>
+                </a:solidFill>
+                <a:latin typeface="Arial" pitchFamily="34" charset="0"/>
+                <a:ea typeface="Arial" pitchFamily="34" charset="-122"/>
+                <a:cs typeface="Arial" pitchFamily="34" charset="-120"/>
+              </a:rPr>
+              <a:t>.</a:t>
+            </a:r>
+            <a:endParaRPr lang="en-US" sz="1200" dirty="0"/>
+          </a:p>
+          <a:p>
+            <a:pPr algn="l" marL="342900" indent="-342900">
+              <a:lnSpc>
+                <a:spcPts val="1620"/>
+              </a:lnSpc>
+              <a:spcAft>
+                <a:spcPts val="300"/>
+              </a:spcAft>
+              <a:buSzPct val="100000"/>
+              <a:buChar char="•"/>
+            </a:pPr>
+            <a:r>
+              <a:rPr lang="en-US" sz="1200" dirty="0">
+                <a:solidFill>
+                  <a:srgbClr val="1C2833"/>
+                </a:solidFill>
+                <a:latin typeface="Arial" pitchFamily="34" charset="0"/>
+                <a:ea typeface="Arial" pitchFamily="34" charset="-122"/>
+                <a:cs typeface="Arial" pitchFamily="34" charset="-120"/>
+              </a:rPr>
+              <a:t>Verify: 738 + 262 = 1000. ✓</a:t>
             </a:r>
             <a:endParaRPr lang="en-US" sz="1200" dirty="0"/>
           </a:p>
@@ -6408,7 +7718,7 @@
                 <a:ea typeface="Georgia" pitchFamily="34" charset="-122"/>
                 <a:cs typeface="Georgia" pitchFamily="34" charset="-120"/>
               </a:rPr>
-              <a:t>Student-facing content</a:t>
+              <a:t>Core (15 min) — Three digits, same rule (cont.)</a:t>
             </a:r>
             <a:endParaRPr lang="en-US" sz="1800" dirty="0"/>
           </a:p>
@@ -6422,61 +7732,8 @@
         </p:nvSpPr>
         <p:spPr>
           <a:xfrm>
-            <a:off x="406301" y="883593"/>
-            <a:ext cx="8331398" cy="2381250"/>
-          </a:xfrm>
-          <a:prstGeom prst="rect">
-            <a:avLst/>
-          </a:prstGeom>
-          <a:solidFill>
-            <a:srgbClr val="F4F8F9"/>
-          </a:solidFill>
-          <a:ln/>
-        </p:spPr>
-        <p:txBody>
-          <a:bodyPr wrap="square" rtlCol="0" anchor="ctr"/>
-          <a:lstStyle/>
-          <a:p>
-            <a:pPr indent="0" marL="0">
-              <a:buNone/>
-            </a:pPr>
-            <a:endParaRPr lang="en-US" dirty="0"/>
-          </a:p>
-        </p:txBody>
-      </p:sp>
-      <p:sp>
-        <p:nvSpPr>
-          <p:cNvPr id="5" name="Shape 3"/>
-          <p:cNvSpPr/>
-          <p:nvPr/>
-        </p:nvSpPr>
-        <p:spPr>
-          <a:xfrm>
-            <a:off x="434876" y="883593"/>
-            <a:ext cx="0" cy="2381250"/>
-          </a:xfrm>
-          <a:prstGeom prst="line">
-            <a:avLst/>
-          </a:prstGeom>
-          <a:noFill/>
-          <a:ln w="57150">
-            <a:solidFill>
-              <a:srgbClr val="FE4447"/>
-            </a:solidFill>
-            <a:prstDash val="solid"/>
-          </a:ln>
-        </p:spPr>
-      </p:sp>
-      <p:sp>
-        <p:nvSpPr>
-          <p:cNvPr id="6" name="Text 4"/>
-          <p:cNvSpPr/>
-          <p:nvPr/>
-        </p:nvSpPr>
-        <p:spPr>
-          <a:xfrm>
-            <a:off x="692051" y="1074093"/>
-            <a:ext cx="7973389" cy="230981"/>
+            <a:off x="634901" y="883593"/>
+            <a:ext cx="8102798" cy="281880"/>
           </a:xfrm>
           <a:prstGeom prst="rect">
             <a:avLst/>
@@ -6488,43 +7745,41 @@
           <a:bodyPr wrap="square" lIns="0" tIns="0" rIns="0" bIns="0" rtlCol="0" anchor="t"/>
           <a:lstStyle/>
           <a:p>
-            <a:pPr algn="l" indent="0" marL="0">
-              <a:lnSpc>
-                <a:spcPts val="1820"/>
-              </a:lnSpc>
-              <a:spcBef>
-                <a:spcPts val="300"/>
-              </a:spcBef>
-              <a:spcAft>
-                <a:spcPts val="300"/>
-              </a:spcAft>
-              <a:buNone/>
-            </a:pPr>
-            <a:r>
-              <a:rPr lang="en-US" sz="1300" b="1" i="1" dirty="0">
-                <a:solidFill>
-                  <a:srgbClr val="1C2833"/>
-                </a:solidFill>
-                <a:latin typeface="Georgia" pitchFamily="34" charset="0"/>
-                <a:ea typeface="Georgia" pitchFamily="34" charset="-122"/>
-                <a:cs typeface="Georgia" pitchFamily="34" charset="-120"/>
-              </a:rPr>
-              <a:t>Complement to 1000 (and beyond)</a:t>
-            </a:r>
-            <a:endParaRPr lang="en-US" sz="1300" dirty="0"/>
-          </a:p>
-        </p:txBody>
-      </p:sp>
-      <p:sp>
-        <p:nvSpPr>
-          <p:cNvPr id="7" name="Text 5"/>
-          <p:cNvSpPr/>
-          <p:nvPr/>
-        </p:nvSpPr>
-        <p:spPr>
-          <a:xfrm>
-            <a:off x="692051" y="1343174"/>
-            <a:ext cx="7973389" cy="230981"/>
+            <a:pPr algn="l" marL="342900" indent="-342900">
+              <a:lnSpc>
+                <a:spcPts val="1620"/>
+              </a:lnSpc>
+              <a:spcAft>
+                <a:spcPts val="300"/>
+              </a:spcAft>
+              <a:buSzPct val="100000"/>
+              <a:buChar char="•"/>
+            </a:pPr>
+            <a:r>
+              <a:rPr lang="en-US" sz="1200" i="1" dirty="0">
+                <a:solidFill>
+                  <a:srgbClr val="1C2833"/>
+                </a:solidFill>
+                <a:latin typeface="Arial" pitchFamily="34" charset="0"/>
+                <a:ea typeface="Arial" pitchFamily="34" charset="-122"/>
+                <a:cs typeface="Arial" pitchFamily="34" charset="-120"/>
+              </a:rPr>
+              <a:t>"Notice — same six-word rule. We just have one more 'from 9' step in the middle."</a:t>
+            </a:r>
+            <a:endParaRPr lang="en-US" sz="1200" dirty="0"/>
+          </a:p>
+        </p:txBody>
+      </p:sp>
+      <p:sp>
+        <p:nvSpPr>
+          <p:cNvPr id="5" name="Text 3"/>
+          <p:cNvSpPr/>
+          <p:nvPr/>
+        </p:nvSpPr>
+        <p:spPr>
+          <a:xfrm>
+            <a:off x="634901" y="1266974"/>
+            <a:ext cx="8102798" cy="281880"/>
           </a:xfrm>
           <a:prstGeom prst="rect">
             <a:avLst/>
@@ -6536,158 +7791,41 @@
           <a:bodyPr wrap="square" lIns="0" tIns="0" rIns="0" bIns="0" rtlCol="0" anchor="t"/>
           <a:lstStyle/>
           <a:p>
-            <a:pPr algn="l" indent="0" marL="0">
-              <a:lnSpc>
-                <a:spcPts val="1820"/>
-              </a:lnSpc>
-              <a:spcBef>
-                <a:spcPts val="300"/>
-              </a:spcBef>
-              <a:spcAft>
-                <a:spcPts val="300"/>
-              </a:spcAft>
-              <a:buNone/>
-            </a:pPr>
-            <a:r>
-              <a:rPr lang="en-US" sz="1300" dirty="0">
-                <a:solidFill>
-                  <a:srgbClr val="1C2833"/>
-                </a:solidFill>
-                <a:latin typeface="Georgia" pitchFamily="34" charset="0"/>
-                <a:ea typeface="Georgia" pitchFamily="34" charset="-122"/>
-                <a:cs typeface="Georgia" pitchFamily="34" charset="-120"/>
-              </a:rPr>
-              <a:t>For any 3-digit number ABC: - First digit: </a:t>
-            </a:r>
-            <a:pPr algn="l" indent="0" marL="0">
-              <a:lnSpc>
-                <a:spcPts val="1820"/>
-              </a:lnSpc>
-              <a:spcBef>
-                <a:spcPts val="300"/>
-              </a:spcBef>
-              <a:spcAft>
-                <a:spcPts val="300"/>
-              </a:spcAft>
-              <a:buNone/>
-            </a:pPr>
-            <a:r>
-              <a:rPr lang="en-US" sz="1300" b="1" i="1" dirty="0">
-                <a:solidFill>
-                  <a:srgbClr val="1C2833"/>
-                </a:solidFill>
-                <a:latin typeface="Georgia" pitchFamily="34" charset="0"/>
-                <a:ea typeface="Georgia" pitchFamily="34" charset="-122"/>
-                <a:cs typeface="Georgia" pitchFamily="34" charset="-120"/>
-              </a:rPr>
-              <a:t>9 − A</a:t>
-            </a:r>
-            <a:pPr algn="l" indent="0" marL="0">
-              <a:lnSpc>
-                <a:spcPts val="1820"/>
-              </a:lnSpc>
-              <a:spcBef>
-                <a:spcPts val="300"/>
-              </a:spcBef>
-              <a:spcAft>
-                <a:spcPts val="300"/>
-              </a:spcAft>
-              <a:buNone/>
-            </a:pPr>
-            <a:r>
-              <a:rPr lang="en-US" sz="1300" dirty="0">
-                <a:solidFill>
-                  <a:srgbClr val="1C2833"/>
-                </a:solidFill>
-                <a:latin typeface="Georgia" pitchFamily="34" charset="0"/>
-                <a:ea typeface="Georgia" pitchFamily="34" charset="-122"/>
-                <a:cs typeface="Georgia" pitchFamily="34" charset="-120"/>
-              </a:rPr>
-              <a:t> - Second digit: </a:t>
-            </a:r>
-            <a:pPr algn="l" indent="0" marL="0">
-              <a:lnSpc>
-                <a:spcPts val="1820"/>
-              </a:lnSpc>
-              <a:spcBef>
-                <a:spcPts val="300"/>
-              </a:spcBef>
-              <a:spcAft>
-                <a:spcPts val="300"/>
-              </a:spcAft>
-              <a:buNone/>
-            </a:pPr>
-            <a:r>
-              <a:rPr lang="en-US" sz="1300" b="1" i="1" dirty="0">
-                <a:solidFill>
-                  <a:srgbClr val="1C2833"/>
-                </a:solidFill>
-                <a:latin typeface="Georgia" pitchFamily="34" charset="0"/>
-                <a:ea typeface="Georgia" pitchFamily="34" charset="-122"/>
-                <a:cs typeface="Georgia" pitchFamily="34" charset="-120"/>
-              </a:rPr>
-              <a:t>9 − B</a:t>
-            </a:r>
-            <a:pPr algn="l" indent="0" marL="0">
-              <a:lnSpc>
-                <a:spcPts val="1820"/>
-              </a:lnSpc>
-              <a:spcBef>
-                <a:spcPts val="300"/>
-              </a:spcBef>
-              <a:spcAft>
-                <a:spcPts val="300"/>
-              </a:spcAft>
-              <a:buNone/>
-            </a:pPr>
-            <a:r>
-              <a:rPr lang="en-US" sz="1300" dirty="0">
-                <a:solidFill>
-                  <a:srgbClr val="1C2833"/>
-                </a:solidFill>
-                <a:latin typeface="Georgia" pitchFamily="34" charset="0"/>
-                <a:ea typeface="Georgia" pitchFamily="34" charset="-122"/>
-                <a:cs typeface="Georgia" pitchFamily="34" charset="-120"/>
-              </a:rPr>
-              <a:t> - Last digit: </a:t>
-            </a:r>
-            <a:pPr algn="l" indent="0" marL="0">
-              <a:lnSpc>
-                <a:spcPts val="1820"/>
-              </a:lnSpc>
-              <a:spcBef>
-                <a:spcPts val="300"/>
-              </a:spcBef>
-              <a:spcAft>
-                <a:spcPts val="300"/>
-              </a:spcAft>
-              <a:buNone/>
-            </a:pPr>
-            <a:r>
-              <a:rPr lang="en-US" sz="1300" b="1" i="1" dirty="0">
-                <a:solidFill>
-                  <a:srgbClr val="1C2833"/>
-                </a:solidFill>
-                <a:latin typeface="Georgia" pitchFamily="34" charset="0"/>
-                <a:ea typeface="Georgia" pitchFamily="34" charset="-122"/>
-                <a:cs typeface="Georgia" pitchFamily="34" charset="-120"/>
-              </a:rPr>
-              <a:t>10 − C</a:t>
-            </a:r>
-            <a:endParaRPr lang="en-US" sz="1300" dirty="0"/>
-          </a:p>
-        </p:txBody>
-      </p:sp>
-      <p:sp>
-        <p:nvSpPr>
-          <p:cNvPr id="8" name="Text 6"/>
-          <p:cNvSpPr/>
-          <p:nvPr/>
-        </p:nvSpPr>
-        <p:spPr>
-          <a:xfrm>
-            <a:off x="692051" y="1612255"/>
-            <a:ext cx="7973389" cy="461963"/>
+            <a:pPr algn="l" marL="342900" indent="-342900">
+              <a:lnSpc>
+                <a:spcPts val="1620"/>
+              </a:lnSpc>
+              <a:spcAft>
+                <a:spcPts val="300"/>
+              </a:spcAft>
+              <a:buSzPct val="100000"/>
+              <a:buChar char="•"/>
+            </a:pPr>
+            <a:r>
+              <a:rPr lang="en-US" sz="1200" b="1" dirty="0">
+                <a:solidFill>
+                  <a:srgbClr val="1C2833"/>
+                </a:solidFill>
+                <a:latin typeface="Arial" pitchFamily="34" charset="0"/>
+                <a:ea typeface="Arial" pitchFamily="34" charset="-122"/>
+                <a:cs typeface="Arial" pitchFamily="34" charset="-120"/>
+              </a:rPr>
+              <a:t>The general pattern:</a:t>
+            </a:r>
+            <a:endParaRPr lang="en-US" sz="1200" dirty="0"/>
+          </a:p>
+        </p:txBody>
+      </p:sp>
+      <p:sp>
+        <p:nvSpPr>
+          <p:cNvPr id="6" name="Text 4"/>
+          <p:cNvSpPr/>
+          <p:nvPr/>
+        </p:nvSpPr>
+        <p:spPr>
+          <a:xfrm>
+            <a:off x="406301" y="1637705"/>
+            <a:ext cx="8498026" cy="222796"/>
           </a:xfrm>
           <a:prstGeom prst="rect">
             <a:avLst/>
@@ -6701,7 +7839,7 @@
           <a:p>
             <a:pPr algn="l" indent="0" marL="0">
               <a:lnSpc>
-                <a:spcPts val="1820"/>
+                <a:spcPts val="1680"/>
               </a:lnSpc>
               <a:spcBef>
                 <a:spcPts val="300"/>
@@ -6712,44 +7850,19 @@
               <a:buNone/>
             </a:pPr>
             <a:r>
-              <a:rPr lang="en-US" sz="1300" i="1" dirty="0">
-                <a:solidFill>
-                  <a:srgbClr val="1C2833"/>
-                </a:solidFill>
-                <a:latin typeface="Georgia" pitchFamily="34" charset="0"/>
-                <a:ea typeface="Georgia" pitchFamily="34" charset="-122"/>
-                <a:cs typeface="Georgia" pitchFamily="34" charset="-120"/>
-              </a:rPr>
-              <a:t>Same six-word rule. Same approach for 4-digit numbers (one extra "from 9") and 5-digit numbers (two extra "from 9"s).</a:t>
-            </a:r>
-            <a:endParaRPr lang="en-US" sz="1300" dirty="0"/>
-          </a:p>
-        </p:txBody>
-      </p:sp>
-      <p:sp>
-        <p:nvSpPr>
-          <p:cNvPr id="9" name="Text 7"/>
-          <p:cNvSpPr/>
-          <p:nvPr/>
-        </p:nvSpPr>
-        <p:spPr>
-          <a:xfrm>
-            <a:off x="692051" y="2112318"/>
-            <a:ext cx="7973389" cy="230981"/>
-          </a:xfrm>
-          <a:prstGeom prst="rect">
-            <a:avLst/>
-          </a:prstGeom>
-          <a:noFill/>
-          <a:ln/>
-        </p:spPr>
-        <p:txBody>
-          <a:bodyPr wrap="square" lIns="0" tIns="0" rIns="0" bIns="0" rtlCol="0" anchor="t"/>
-          <a:lstStyle/>
-          <a:p>
-            <a:pPr algn="l" indent="0" marL="0">
-              <a:lnSpc>
-                <a:spcPts val="1820"/>
+              <a:rPr lang="en-US" sz="1200" dirty="0">
+                <a:solidFill>
+                  <a:srgbClr val="1C2833"/>
+                </a:solidFill>
+                <a:latin typeface="Arial" pitchFamily="34" charset="0"/>
+                <a:ea typeface="Arial" pitchFamily="34" charset="-122"/>
+                <a:cs typeface="Arial" pitchFamily="34" charset="-120"/>
+              </a:rPr>
+              <a:t>For an n-digit number, the complement to </a:t>
+            </a:r>
+            <a:pPr algn="l" indent="0" marL="0">
+              <a:lnSpc>
+                <a:spcPts val="1680"/>
               </a:lnSpc>
               <a:spcBef>
                 <a:spcPts val="300"/>
@@ -6760,44 +7873,19 @@
               <a:buNone/>
             </a:pPr>
             <a:r>
-              <a:rPr lang="en-US" sz="1300" i="1" dirty="0">
-                <a:solidFill>
-                  <a:srgbClr val="1C2833"/>
-                </a:solidFill>
-                <a:latin typeface="Georgia" pitchFamily="34" charset="0"/>
-                <a:ea typeface="Georgia" pitchFamily="34" charset="-122"/>
-                <a:cs typeface="Georgia" pitchFamily="34" charset="-120"/>
-              </a:rPr>
-              <a:t>Examples: - 738 → 262 - 419 → 581 - 2347 → 7653 (complement to 10 000)</a:t>
-            </a:r>
-            <a:endParaRPr lang="en-US" sz="1300" dirty="0"/>
-          </a:p>
-        </p:txBody>
-      </p:sp>
-      <p:sp>
-        <p:nvSpPr>
-          <p:cNvPr id="10" name="Text 8"/>
-          <p:cNvSpPr/>
-          <p:nvPr/>
-        </p:nvSpPr>
-        <p:spPr>
-          <a:xfrm>
-            <a:off x="692051" y="2381399"/>
-            <a:ext cx="7973389" cy="692944"/>
-          </a:xfrm>
-          <a:prstGeom prst="rect">
-            <a:avLst/>
-          </a:prstGeom>
-          <a:noFill/>
-          <a:ln/>
-        </p:spPr>
-        <p:txBody>
-          <a:bodyPr wrap="square" lIns="0" tIns="0" rIns="0" bIns="0" rtlCol="0" anchor="t"/>
-          <a:lstStyle/>
-          <a:p>
-            <a:pPr algn="l" indent="0" marL="0">
-              <a:lnSpc>
-                <a:spcPts val="1820"/>
+              <a:rPr lang="en-US" sz="1200" dirty="0">
+                <a:solidFill>
+                  <a:srgbClr val="1C2833"/>
+                </a:solidFill>
+                <a:latin typeface="Arial" pitchFamily="34" charset="0"/>
+                <a:ea typeface="Arial" pitchFamily="34" charset="-122"/>
+                <a:cs typeface="Arial" pitchFamily="34" charset="-120"/>
+              </a:rPr>
+              <a:t>10ⁿ</a:t>
+            </a:r>
+            <a:pPr algn="l" indent="0" marL="0">
+              <a:lnSpc>
+                <a:spcPts val="1680"/>
               </a:lnSpc>
               <a:spcBef>
                 <a:spcPts val="300"/>
@@ -6808,115 +7896,23 @@
               <a:buNone/>
             </a:pPr>
             <a:r>
-              <a:rPr lang="en-US" sz="1300" dirty="0">
-                <a:solidFill>
-                  <a:srgbClr val="1C2833"/>
-                </a:solidFill>
-                <a:latin typeface="Georgia" pitchFamily="34" charset="0"/>
-                <a:ea typeface="Georgia" pitchFamily="34" charset="-122"/>
-                <a:cs typeface="Georgia" pitchFamily="34" charset="-120"/>
-              </a:rPr>
-              <a:t>&gt; "Nikhilaṁ navataścaramaṁ daśataḥ — </a:t>
-            </a:r>
-            <a:pPr algn="l" indent="0" marL="0">
-              <a:lnSpc>
-                <a:spcPts val="1820"/>
-              </a:lnSpc>
-              <a:spcBef>
-                <a:spcPts val="300"/>
-              </a:spcBef>
-              <a:spcAft>
-                <a:spcPts val="300"/>
-              </a:spcAft>
-              <a:buNone/>
-            </a:pPr>
-            <a:r>
-              <a:rPr lang="en-US" sz="1300" i="1" dirty="0">
-                <a:solidFill>
-                  <a:srgbClr val="1C2833"/>
-                </a:solidFill>
-                <a:latin typeface="Georgia" pitchFamily="34" charset="0"/>
-                <a:ea typeface="Georgia" pitchFamily="34" charset="-122"/>
-                <a:cs typeface="Georgia" pitchFamily="34" charset="-120"/>
-              </a:rPr>
-              <a:t>all from nine and the last from ten</a:t>
-            </a:r>
-            <a:pPr algn="l" indent="0" marL="0">
-              <a:lnSpc>
-                <a:spcPts val="1820"/>
-              </a:lnSpc>
-              <a:spcBef>
-                <a:spcPts val="300"/>
-              </a:spcBef>
-              <a:spcAft>
-                <a:spcPts val="300"/>
-              </a:spcAft>
-              <a:buNone/>
-            </a:pPr>
-            <a:r>
-              <a:rPr lang="en-US" sz="1300" dirty="0">
-                <a:solidFill>
-                  <a:srgbClr val="1C2833"/>
-                </a:solidFill>
-                <a:latin typeface="Georgia" pitchFamily="34" charset="0"/>
-                <a:ea typeface="Georgia" pitchFamily="34" charset="-122"/>
-                <a:cs typeface="Georgia" pitchFamily="34" charset="-120"/>
-              </a:rPr>
-              <a:t>." (Tirthaji, </a:t>
-            </a:r>
-            <a:pPr algn="l" indent="0" marL="0">
-              <a:lnSpc>
-                <a:spcPts val="1820"/>
-              </a:lnSpc>
-              <a:spcBef>
-                <a:spcPts val="300"/>
-              </a:spcBef>
-              <a:spcAft>
-                <a:spcPts val="300"/>
-              </a:spcAft>
-              <a:buNone/>
-            </a:pPr>
-            <a:r>
-              <a:rPr lang="en-US" sz="1300" i="1" dirty="0">
-                <a:solidFill>
-                  <a:srgbClr val="1C2833"/>
-                </a:solidFill>
-                <a:latin typeface="Georgia" pitchFamily="34" charset="0"/>
-                <a:ea typeface="Georgia" pitchFamily="34" charset="-122"/>
-                <a:cs typeface="Georgia" pitchFamily="34" charset="-120"/>
-              </a:rPr>
-              <a:t>Vedic Mathematics</a:t>
-            </a:r>
-            <a:pPr algn="l" indent="0" marL="0">
-              <a:lnSpc>
-                <a:spcPts val="1820"/>
-              </a:lnSpc>
-              <a:spcBef>
-                <a:spcPts val="300"/>
-              </a:spcBef>
-              <a:spcAft>
-                <a:spcPts val="300"/>
-              </a:spcAft>
-              <a:buNone/>
-            </a:pPr>
-            <a:r>
-              <a:rPr lang="en-US" sz="1300" dirty="0">
-                <a:solidFill>
-                  <a:srgbClr val="1C2833"/>
-                </a:solidFill>
-                <a:latin typeface="Georgia" pitchFamily="34" charset="0"/>
-                <a:ea typeface="Georgia" pitchFamily="34" charset="-122"/>
-                <a:cs typeface="Georgia" pitchFamily="34" charset="-120"/>
-              </a:rPr>
-              <a:t>, 1965, sūtra #2.) The "all" handles every digit except the last; "the last from ten" handles the last digit's special role.</a:t>
-            </a:r>
-            <a:endParaRPr lang="en-US" sz="1300" dirty="0"/>
-          </a:p>
-        </p:txBody>
-      </p:sp>
-      <p:sp>
-        <p:nvSpPr>
-          <p:cNvPr id="11" name="Text 9"/>
+              <a:rPr lang="en-US" sz="1200" dirty="0">
+                <a:solidFill>
+                  <a:srgbClr val="1C2833"/>
+                </a:solidFill>
+                <a:latin typeface="Arial" pitchFamily="34" charset="0"/>
+                <a:ea typeface="Arial" pitchFamily="34" charset="-122"/>
+                <a:cs typeface="Arial" pitchFamily="34" charset="-120"/>
+              </a:rPr>
+              <a:t> is:</a:t>
+            </a:r>
+            <a:endParaRPr lang="en-US" sz="1200" dirty="0"/>
+          </a:p>
+        </p:txBody>
+      </p:sp>
+      <p:sp>
+        <p:nvSpPr>
+          <p:cNvPr id="7" name="Text 5"/>
           <p:cNvSpPr/>
           <p:nvPr/>
         </p:nvSpPr>
